--- a/downloads/slides/Lesson5_Slides.pptx
+++ b/downloads/slides/Lesson5_Slides.pptx
@@ -1284,7 +1284,7 @@
           <a:p>
             <a:r>
               <a:rPr lang="en-US" dirty="0"/>
-              <a:t>Step 3 · 6:18–6:30 · Listening + "Say it" (L5_listening.mp3, about 1:30). Audio: L5_listening.mp3 (about 1:30). The audio plays once, play again if needed. Audio coming soon: until it is ready, read the script with a volunteer learner.</a:t>
+              <a:t>Step 3 · 6:18–6:30 · Listening + "Say it" (L5_listening.mp3, about 1:17). Audio: L5_listening.mp3 (about 1:17). The audio plays once, play again if needed. No speaker? Read the script with a volunteer learner.</a:t>
             </a:r>
           </a:p>
           <a:p>
@@ -4696,7 +4696,7 @@
 
 <file path=ppt/slides/slide11.xml><?xml version="1.0" encoding="utf-8"?>
 <p:sld xmlns:a="http://schemas.openxmlformats.org/drawingml/2006/main" xmlns:r="http://schemas.openxmlformats.org/officeDocument/2006/relationships" xmlns:p="http://schemas.openxmlformats.org/presentationml/2006/main">
-  <p:cSld name="Slide 4">
+  <p:cSld name="Slide 9">
     <p:bg>
       <p:bgPr>
         <a:solidFill>
@@ -4726,8 +4726,32 @@
         </p:nvSpPr>
         <p:spPr>
           <a:xfrm>
-            <a:off x="6742786" y="3649370"/>
-            <a:ext cx="4912157" cy="2561234"/>
+            <a:off x="0" y="0"/>
+            <a:ext cx="3063240" cy="6858000"/>
+          </a:xfrm>
+          <a:prstGeom prst="rect">
+            <a:avLst/>
+          </a:prstGeom>
+          <a:solidFill>
+            <a:srgbClr val="B9D2F7"/>
+          </a:solidFill>
+          <a:ln/>
+        </p:spPr>
+        <p:txBody>
+          <a:bodyPr/>
+          <a:p/>
+        </p:txBody>
+      </p:sp>
+      <p:sp>
+        <p:nvSpPr>
+          <p:cNvPr id="4" name="Shape 2"/>
+          <p:cNvSpPr/>
+          <p:nvPr/>
+        </p:nvSpPr>
+        <p:spPr>
+          <a:xfrm>
+            <a:off x="8156448" y="1289304"/>
+            <a:ext cx="3429000" cy="4983480"/>
           </a:xfrm>
           <a:prstGeom prst="round1Rect">
             <a:avLst>
@@ -4735,14 +4759,9 @@
             </a:avLst>
           </a:prstGeom>
           <a:solidFill>
-            <a:srgbClr val="B9D2F7"/>
-          </a:solidFill>
-          <a:ln w="76200">
-            <a:solidFill>
-              <a:srgbClr val="FFFFFF"/>
-            </a:solidFill>
-            <a:prstDash val="solid"/>
-          </a:ln>
+            <a:srgbClr val="8FAFE3"/>
+          </a:solidFill>
+          <a:ln/>
         </p:spPr>
         <p:txBody>
           <a:bodyPr/>
@@ -4757,8 +4776,34 @@
         </p:nvSpPr>
         <p:spPr>
           <a:xfrm>
-            <a:off x="560116" y="1350752"/>
-            <a:ext cx="5663794" cy="1566367"/>
+            <a:off x="8321040" y="1097280"/>
+            <a:ext cx="3429000" cy="4983480"/>
+          </a:xfrm>
+          <a:prstGeom prst="round1Rect">
+            <a:avLst>
+              <a:gd name="adj" fmla="val 23087"/>
+            </a:avLst>
+          </a:prstGeom>
+          <a:solidFill>
+            <a:srgbClr val="B9D2F7"/>
+          </a:solidFill>
+          <a:ln/>
+        </p:spPr>
+        <p:txBody>
+          <a:bodyPr/>
+          <a:p/>
+        </p:txBody>
+      </p:sp>
+      <p:sp>
+        <p:nvSpPr>
+          <p:cNvPr id="6" name="Shape 4"/>
+          <p:cNvSpPr/>
+          <p:nvPr/>
+        </p:nvSpPr>
+        <p:spPr>
+          <a:xfrm>
+            <a:off x="3394847" y="1032586"/>
+            <a:ext cx="4424782" cy="1863547"/>
           </a:xfrm>
           <a:prstGeom prst="roundRect">
             <a:avLst>
@@ -4777,14 +4822,14 @@
       </p:sp>
       <p:sp>
         <p:nvSpPr>
-          <p:cNvPr id="6" name="Shape 4"/>
-          <p:cNvSpPr/>
-          <p:nvPr/>
-        </p:nvSpPr>
-        <p:spPr>
-          <a:xfrm>
-            <a:off x="593446" y="1286561"/>
-            <a:ext cx="5663794" cy="1566367"/>
+          <p:cNvPr id="7" name="Shape 5"/>
+          <p:cNvSpPr/>
+          <p:nvPr/>
+        </p:nvSpPr>
+        <p:spPr>
+          <a:xfrm>
+            <a:off x="3420770" y="956462"/>
+            <a:ext cx="4424782" cy="1863547"/>
           </a:xfrm>
           <a:prstGeom prst="roundRect">
             <a:avLst>
@@ -4803,14 +4848,14 @@
       </p:sp>
       <p:sp>
         <p:nvSpPr>
-          <p:cNvPr id="7" name="Text 5"/>
-          <p:cNvSpPr/>
-          <p:nvPr/>
-        </p:nvSpPr>
-        <p:spPr>
-          <a:xfrm>
-            <a:off x="832104" y="1371600"/>
-            <a:ext cx="5257800" cy="1417320"/>
+          <p:cNvPr id="8" name="Text 6"/>
+          <p:cNvSpPr/>
+          <p:nvPr/>
+        </p:nvSpPr>
+        <p:spPr>
+          <a:xfrm>
+            <a:off x="3566160" y="1078992"/>
+            <a:ext cx="4114800" cy="749808"/>
           </a:xfrm>
           <a:prstGeom prst="rect">
             <a:avLst/>
@@ -4826,6 +4871,95 @@
               <a:buNone/>
             </a:pPr>
             <a:r>
+              <a:rPr lang="en-US" sz="4400" dirty="0" b="1">
+                <a:solidFill>
+                  <a:srgbClr val="1B2236"/>
+                </a:solidFill>
+                <a:latin typeface="Lexend Deca" pitchFamily="34" charset="0"/>
+                <a:ea typeface="Lexend Deca" pitchFamily="34" charset="-122"/>
+                <a:cs typeface="Lexend Deca" pitchFamily="34" charset="-120"/>
+              </a:rPr>
+              <a:t>What did</a:t>
+            </a:r>
+            <a:endParaRPr lang="en-US" sz="4400" dirty="0"/>
+          </a:p>
+        </p:txBody>
+      </p:sp>
+      <p:sp>
+        <p:nvSpPr>
+          <p:cNvPr id="9" name="Text 7"/>
+          <p:cNvSpPr/>
+          <p:nvPr/>
+        </p:nvSpPr>
+        <p:spPr>
+          <a:xfrm>
+            <a:off x="3566160" y="1828800"/>
+            <a:ext cx="4114800" cy="822960"/>
+          </a:xfrm>
+          <a:prstGeom prst="rect">
+            <a:avLst/>
+          </a:prstGeom>
+          <a:noFill/>
+          <a:ln/>
+        </p:spPr>
+        <p:txBody>
+          <a:bodyPr wrap="square" rtlCol="0" anchor="ctr"/>
+          <a:lstStyle/>
+          <a:p>
+            <a:pPr algn="l" indent="0" marL="0">
+              <a:buNone/>
+            </a:pPr>
+            <a:r>
+              <a:rPr lang="en-US" sz="4400" dirty="0" b="1">
+                <a:solidFill>
+                  <a:srgbClr val="1B2236"/>
+                </a:solidFill>
+                <a:latin typeface="Lexend Deca" pitchFamily="34" charset="0"/>
+                <a:ea typeface="Lexend Deca" pitchFamily="34" charset="-122"/>
+                <a:cs typeface="Lexend Deca" pitchFamily="34" charset="-120"/>
+              </a:rPr>
+              <a:t>you do?</a:t>
+            </a:r>
+            <a:endParaRPr lang="en-US" sz="4400" dirty="0"/>
+          </a:p>
+        </p:txBody>
+      </p:sp>
+      <p:sp>
+        <p:nvSpPr>
+          <p:cNvPr id="10" name="Text 8"/>
+          <p:cNvSpPr/>
+          <p:nvPr/>
+        </p:nvSpPr>
+        <p:spPr>
+          <a:xfrm>
+            <a:off x="3487522" y="3108960"/>
+            <a:ext cx="4206240" cy="868680"/>
+          </a:xfrm>
+          <a:prstGeom prst="rect">
+            <a:avLst/>
+          </a:prstGeom>
+          <a:noFill/>
+          <a:ln/>
+        </p:spPr>
+        <p:txBody>
+          <a:bodyPr wrap="square" lIns="0" tIns="0" rIns="0" bIns="0" rtlCol="0" anchor="ctr"/>
+          <a:lstStyle/>
+          <a:p>
+            <a:pPr algn="l" indent="0" marL="0">
+              <a:buNone/>
+            </a:pPr>
+            <a:r>
+              <a:rPr lang="en-US" sz="2000" dirty="0">
+                <a:solidFill>
+                  <a:srgbClr val="1B2236"/>
+                </a:solidFill>
+                <a:latin typeface="Lexend Deca" pitchFamily="34" charset="0"/>
+                <a:ea typeface="Lexend Deca" pitchFamily="34" charset="-122"/>
+                <a:cs typeface="Lexend Deca" pitchFamily="34" charset="-120"/>
+              </a:rPr>
+              <a:t>Answer with </a:t>
+            </a:r>
+            <a:r>
               <a:rPr lang="en-US" sz="2000" dirty="0" b="1">
                 <a:solidFill>
                   <a:srgbClr val="5B3FC4"/>
@@ -4834,152 +4968,26 @@
                 <a:ea typeface="Lexend Deca" pitchFamily="34" charset="-122"/>
                 <a:cs typeface="Lexend Deca" pitchFamily="34" charset="-120"/>
               </a:rPr>
-              <a:t>Grammar Box 1</a:t>
+              <a:t>-ed</a:t>
+            </a:r>
+            <a:r>
+              <a:rPr lang="en-US" sz="2000" dirty="0">
+                <a:solidFill>
+                  <a:srgbClr val="1B2236"/>
+                </a:solidFill>
+                <a:latin typeface="Lexend Deca" pitchFamily="34" charset="0"/>
+                <a:ea typeface="Lexend Deca" pitchFamily="34" charset="-122"/>
+                <a:cs typeface="Lexend Deca" pitchFamily="34" charset="-120"/>
+              </a:rPr>
+              <a:t>.</a:t>
             </a:r>
             <a:endParaRPr lang="en-US" sz="2000" dirty="0"/>
           </a:p>
-          <a:p>
-            <a:pPr algn="l" indent="0" marL="0">
-              <a:buNone/>
-            </a:pPr>
-            <a:r>
-              <a:rPr lang="en-US" sz="3200" dirty="0" b="1">
-                <a:solidFill>
-                  <a:srgbClr val="1B2236"/>
-                </a:solidFill>
-                <a:latin typeface="Lexend Deca" pitchFamily="34" charset="0"/>
-                <a:ea typeface="Lexend Deca" pitchFamily="34" charset="-122"/>
-                <a:cs typeface="Lexend Deca" pitchFamily="34" charset="-120"/>
-              </a:rPr>
-              <a:t>How was ...?</a:t>
-            </a:r>
-            <a:endParaRPr lang="en-US" sz="3200" dirty="0"/>
-          </a:p>
-          <a:p>
-            <a:pPr algn="l" indent="0" marL="0">
-              <a:buNone/>
-            </a:pPr>
-            <a:r>
-              <a:rPr lang="en-US" sz="3200" dirty="0" b="1">
-                <a:solidFill>
-                  <a:srgbClr val="1B2236"/>
-                </a:solidFill>
-                <a:latin typeface="Lexend Deca" pitchFamily="34" charset="0"/>
-                <a:ea typeface="Lexend Deca" pitchFamily="34" charset="-122"/>
-                <a:cs typeface="Lexend Deca" pitchFamily="34" charset="-120"/>
-              </a:rPr>
-              <a:t>Was it ...?</a:t>
-            </a:r>
-            <a:endParaRPr lang="en-US" sz="3200" dirty="0"/>
-          </a:p>
-        </p:txBody>
-      </p:sp>
-      <p:sp>
-        <p:nvSpPr>
-          <p:cNvPr id="8" name="Shape 6"/>
-          <p:cNvSpPr/>
-          <p:nvPr/>
-        </p:nvSpPr>
-        <p:spPr>
-          <a:xfrm>
-            <a:off x="1305763" y="3649370"/>
-            <a:ext cx="4790542" cy="2599639"/>
-          </a:xfrm>
-          <a:prstGeom prst="round1Rect">
-            <a:avLst>
-              <a:gd name="adj" fmla="val 23087"/>
-            </a:avLst>
-          </a:prstGeom>
-          <a:solidFill>
-            <a:srgbClr val="FFFFFF"/>
-          </a:solidFill>
-          <a:ln w="25400">
-            <a:solidFill>
-              <a:srgbClr val="8FAFE3"/>
-            </a:solidFill>
-            <a:prstDash val="solid"/>
-          </a:ln>
-        </p:spPr>
-        <p:txBody>
-          <a:bodyPr/>
-          <a:p/>
-        </p:txBody>
-      </p:sp>
-      <p:sp>
-        <p:nvSpPr>
-          <p:cNvPr id="15" name="Shape 13"/>
-          <p:cNvSpPr/>
-          <p:nvPr/>
-        </p:nvSpPr>
-        <p:spPr>
-          <a:xfrm>
-            <a:off x="741578" y="3253435"/>
-            <a:ext cx="1024128" cy="967435"/>
-          </a:xfrm>
-          <a:prstGeom prst="star10">
-            <a:avLst/>
-          </a:prstGeom>
-          <a:solidFill>
-            <a:srgbClr val="8FAFE3"/>
-          </a:solidFill>
-          <a:ln/>
-        </p:spPr>
-        <p:txBody>
-          <a:bodyPr/>
-          <a:p/>
-        </p:txBody>
-      </p:sp>
-      <p:sp>
-        <p:nvSpPr>
-          <p:cNvPr id="16" name="Shape 14"/>
-          <p:cNvSpPr/>
-          <p:nvPr/>
-        </p:nvSpPr>
-        <p:spPr>
-          <a:xfrm>
-            <a:off x="823874" y="3240634"/>
-            <a:ext cx="1042416" cy="1042416"/>
-          </a:xfrm>
-          <a:prstGeom prst="star10">
-            <a:avLst/>
-          </a:prstGeom>
-          <a:solidFill>
-            <a:srgbClr val="FFE28C"/>
-          </a:solidFill>
-          <a:ln/>
-        </p:spPr>
-        <p:txBody>
-          <a:bodyPr/>
-          <a:p/>
-        </p:txBody>
-      </p:sp>
-      <p:sp>
-        <p:nvSpPr>
-          <p:cNvPr id="17" name="Shape 15"/>
-          <p:cNvSpPr/>
-          <p:nvPr/>
-        </p:nvSpPr>
-        <p:spPr>
-          <a:xfrm rot="900000">
-            <a:off x="1107338" y="3539642"/>
-            <a:ext cx="445313" cy="445313"/>
-          </a:xfrm>
-          <a:prstGeom prst="mathPlus">
-            <a:avLst/>
-          </a:prstGeom>
-          <a:solidFill>
-            <a:srgbClr val="1B2236"/>
-          </a:solidFill>
-          <a:ln/>
-        </p:spPr>
-        <p:txBody>
-          <a:bodyPr/>
-          <a:p/>
         </p:txBody>
       </p:sp>
       <p:pic>
         <p:nvPicPr>
-          <p:cNvPr id="42" name="Picture 42" descr="L5_fun.png"/>
+          <p:cNvPr id="65" name="Picture 65" descr="L5_cleaned_the_house.png"/>
           <p:cNvPicPr>
             <a:picLocks noChangeAspect="1"/>
           </p:cNvPicPr>
@@ -4993,8 +5001,8 @@
         </p:blipFill>
         <p:spPr>
           <a:xfrm>
-            <a:off x="7598664" y="1216152"/>
-            <a:ext cx="3254350" cy="2278045"/>
+            <a:off x="160020" y="2423160"/>
+            <a:ext cx="2743200" cy="1920240"/>
           </a:xfrm>
           <a:prstGeom prst="rect">
             <a:avLst/>
@@ -5003,14 +5011,14 @@
       </p:pic>
       <p:sp>
         <p:nvSpPr>
-          <p:cNvPr id="43" name="Q head"/>
-          <p:cNvSpPr/>
-          <p:nvPr/>
-        </p:nvSpPr>
-        <p:spPr>
-          <a:xfrm>
-            <a:off x="1920240" y="3794760"/>
-            <a:ext cx="4023360" cy="457200"/>
+          <p:cNvPr id="66" name="Wh"/>
+          <p:cNvSpPr/>
+          <p:nvPr/>
+        </p:nvSpPr>
+        <p:spPr>
+          <a:xfrm>
+            <a:off x="3520440" y="4114800"/>
+            <a:ext cx="907999" cy="530352"/>
           </a:xfrm>
           <a:prstGeom prst="rect">
             <a:avLst/>
@@ -5021,6 +5029,53 @@
           </a:ln>
         </p:spPr>
         <p:txBody>
+          <a:bodyPr wrap="square" lIns="0" tIns="36576" rIns="0" bIns="36576" rtlCol="0" anchor="ctr">
+            <a:noAutofit/>
+          </a:bodyPr>
+          <a:lstStyle/>
+          <a:p>
+            <a:pPr algn="l" indent="0" marL="0">
+              <a:buNone/>
+            </a:pPr>
+            <a:r>
+              <a:rPr lang="en-US" sz="2200" dirty="0">
+                <a:solidFill>
+                  <a:srgbClr val="1B2236"/>
+                </a:solidFill>
+                <a:latin typeface="Lexend Deca" pitchFamily="34" charset="0"/>
+                <a:ea typeface="Lexend Deca" pitchFamily="34" charset="-122"/>
+                <a:cs typeface="Lexend Deca" pitchFamily="34" charset="-120"/>
+              </a:rPr>
+              <a:t>What</a:t>
+            </a:r>
+            <a:endParaRPr lang="en-US" sz="2200" dirty="0"/>
+          </a:p>
+        </p:txBody>
+      </p:sp>
+      <p:sp>
+        <p:nvSpPr>
+          <p:cNvPr id="67" name="Highlight"/>
+          <p:cNvSpPr/>
+          <p:nvPr/>
+        </p:nvSpPr>
+        <p:spPr>
+          <a:xfrm>
+            <a:off x="4428439" y="4114800"/>
+            <a:ext cx="799551" cy="530352"/>
+          </a:xfrm>
+          <a:prstGeom prst="roundRect">
+            <a:avLst>
+              <a:gd name="adj" fmla="val 22000"/>
+            </a:avLst>
+          </a:prstGeom>
+          <a:solidFill>
+            <a:srgbClr val="FFE28C"/>
+          </a:solidFill>
+          <a:ln w="38100">
+            <a:noFill/>
+          </a:ln>
+        </p:spPr>
+        <p:txBody>
           <a:bodyPr wrap="square" lIns="73152" tIns="36576" rIns="73152" bIns="36576" rtlCol="0" anchor="ctr">
             <a:noAutofit/>
           </a:bodyPr>
@@ -5030,15 +5085,15 @@
               <a:buNone/>
             </a:pPr>
             <a:r>
-              <a:rPr lang="en-US" sz="2000" dirty="0" b="1">
-                <a:solidFill>
-                  <a:srgbClr val="5B3FC4"/>
-                </a:solidFill>
-                <a:latin typeface="Lexend Deca" pitchFamily="34" charset="0"/>
-                <a:ea typeface="Lexend Deca" pitchFamily="34" charset="-122"/>
-                <a:cs typeface="Lexend Deca" pitchFamily="34" charset="-120"/>
-              </a:rPr>
-              <a:t>QUESTION</a:t>
+              <a:rPr lang="en-US" sz="2000" dirty="0">
+                <a:solidFill>
+                  <a:srgbClr val="1B2236"/>
+                </a:solidFill>
+                <a:latin typeface="Lexend Deca" pitchFamily="34" charset="0"/>
+                <a:ea typeface="Lexend Deca" pitchFamily="34" charset="-122"/>
+                <a:cs typeface="Lexend Deca" pitchFamily="34" charset="-120"/>
+              </a:rPr>
+              <a:t/>
             </a:r>
             <a:endParaRPr lang="en-US" sz="2000" dirty="0"/>
           </a:p>
@@ -5046,14 +5101,14 @@
       </p:sp>
       <p:sp>
         <p:nvSpPr>
-          <p:cNvPr id="44" name="A head"/>
-          <p:cNvSpPr/>
-          <p:nvPr/>
-        </p:nvSpPr>
-        <p:spPr>
-          <a:xfrm>
-            <a:off x="7040880" y="3794760"/>
-            <a:ext cx="4480560" cy="457200"/>
+          <p:cNvPr id="68" name="Helper"/>
+          <p:cNvSpPr/>
+          <p:nvPr/>
+        </p:nvSpPr>
+        <p:spPr>
+          <a:xfrm>
+            <a:off x="4428439" y="4114800"/>
+            <a:ext cx="799551" cy="530352"/>
           </a:xfrm>
           <a:prstGeom prst="rect">
             <a:avLst/>
@@ -5064,39 +5119,125 @@
           </a:ln>
         </p:spPr>
         <p:txBody>
-          <a:bodyPr wrap="square" lIns="73152" tIns="36576" rIns="73152" bIns="36576" rtlCol="0" anchor="ctr">
+          <a:bodyPr wrap="square" lIns="0" tIns="36576" rIns="0" bIns="36576" rtlCol="0" anchor="ctr">
             <a:noAutofit/>
           </a:bodyPr>
           <a:lstStyle/>
           <a:p>
+            <a:pPr algn="ctr" indent="0" marL="0">
+              <a:buNone/>
+            </a:pPr>
+            <a:r>
+              <a:rPr lang="en-US" sz="2200" dirty="0" b="1">
+                <a:solidFill>
+                  <a:srgbClr val="1B2236"/>
+                </a:solidFill>
+                <a:latin typeface="Lexend Deca" pitchFamily="34" charset="0"/>
+                <a:ea typeface="Lexend Deca" pitchFamily="34" charset="-122"/>
+                <a:cs typeface="Lexend Deca" pitchFamily="34" charset="-120"/>
+              </a:rPr>
+              <a:t>did</a:t>
+            </a:r>
+            <a:endParaRPr lang="en-US" sz="2200" dirty="0"/>
+          </a:p>
+        </p:txBody>
+      </p:sp>
+      <p:sp>
+        <p:nvSpPr>
+          <p:cNvPr id="69" name="Rest"/>
+          <p:cNvSpPr/>
+          <p:nvPr/>
+        </p:nvSpPr>
+        <p:spPr>
+          <a:xfrm>
+            <a:off x="5282855" y="4114800"/>
+            <a:ext cx="1239012" cy="530352"/>
+          </a:xfrm>
+          <a:prstGeom prst="rect">
+            <a:avLst/>
+          </a:prstGeom>
+          <a:noFill/>
+          <a:ln w="38100">
+            <a:noFill/>
+          </a:ln>
+        </p:spPr>
+        <p:txBody>
+          <a:bodyPr wrap="square" lIns="0" tIns="36576" rIns="0" bIns="36576" rtlCol="0" anchor="ctr">
+            <a:noAutofit/>
+          </a:bodyPr>
+          <a:lstStyle/>
+          <a:p>
             <a:pPr algn="l" indent="0" marL="0">
               <a:buNone/>
             </a:pPr>
             <a:r>
-              <a:rPr lang="en-US" sz="2000" dirty="0" b="1">
-                <a:solidFill>
-                  <a:srgbClr val="5B3FC4"/>
-                </a:solidFill>
-                <a:latin typeface="Lexend Deca" pitchFamily="34" charset="0"/>
-                <a:ea typeface="Lexend Deca" pitchFamily="34" charset="-122"/>
-                <a:cs typeface="Lexend Deca" pitchFamily="34" charset="-120"/>
-              </a:rPr>
-              <a:t>ANSWER</a:t>
-            </a:r>
-            <a:endParaRPr lang="en-US" sz="2000" dirty="0"/>
-          </a:p>
-        </p:txBody>
-      </p:sp>
-      <p:sp>
-        <p:nvSpPr>
-          <p:cNvPr id="45" name="Highlight"/>
-          <p:cNvSpPr/>
-          <p:nvPr/>
-        </p:nvSpPr>
-        <p:spPr>
-          <a:xfrm>
-            <a:off x="1481328" y="4453128"/>
-            <a:ext cx="1188720" cy="548640"/>
+              <a:rPr lang="en-US" sz="2200" dirty="0">
+                <a:solidFill>
+                  <a:srgbClr val="1B2236"/>
+                </a:solidFill>
+                <a:latin typeface="Lexend Deca" pitchFamily="34" charset="0"/>
+                <a:ea typeface="Lexend Deca" pitchFamily="34" charset="-122"/>
+                <a:cs typeface="Lexend Deca" pitchFamily="34" charset="-120"/>
+              </a:rPr>
+              <a:t>you do?</a:t>
+            </a:r>
+            <a:endParaRPr lang="en-US" sz="2200" dirty="0"/>
+          </a:p>
+        </p:txBody>
+      </p:sp>
+      <p:sp>
+        <p:nvSpPr>
+          <p:cNvPr id="70" name="Wh"/>
+          <p:cNvSpPr/>
+          <p:nvPr/>
+        </p:nvSpPr>
+        <p:spPr>
+          <a:xfrm>
+            <a:off x="3520440" y="4846320"/>
+            <a:ext cx="907999" cy="530352"/>
+          </a:xfrm>
+          <a:prstGeom prst="rect">
+            <a:avLst/>
+          </a:prstGeom>
+          <a:noFill/>
+          <a:ln w="38100">
+            <a:noFill/>
+          </a:ln>
+        </p:spPr>
+        <p:txBody>
+          <a:bodyPr wrap="square" lIns="0" tIns="36576" rIns="0" bIns="36576" rtlCol="0" anchor="ctr">
+            <a:noAutofit/>
+          </a:bodyPr>
+          <a:lstStyle/>
+          <a:p>
+            <a:pPr algn="l" indent="0" marL="0">
+              <a:buNone/>
+            </a:pPr>
+            <a:r>
+              <a:rPr lang="en-US" sz="2200" dirty="0">
+                <a:solidFill>
+                  <a:srgbClr val="1B2236"/>
+                </a:solidFill>
+                <a:latin typeface="Lexend Deca" pitchFamily="34" charset="0"/>
+                <a:ea typeface="Lexend Deca" pitchFamily="34" charset="-122"/>
+                <a:cs typeface="Lexend Deca" pitchFamily="34" charset="-120"/>
+              </a:rPr>
+              <a:t>What</a:t>
+            </a:r>
+            <a:endParaRPr lang="en-US" sz="2200" dirty="0"/>
+          </a:p>
+        </p:txBody>
+      </p:sp>
+      <p:sp>
+        <p:nvSpPr>
+          <p:cNvPr id="71" name="Highlight"/>
+          <p:cNvSpPr/>
+          <p:nvPr/>
+        </p:nvSpPr>
+        <p:spPr>
+          <a:xfrm>
+            <a:off x="4428439" y="4846320"/>
+            <a:ext cx="799551" cy="530352"/>
           </a:xfrm>
           <a:prstGeom prst="roundRect">
             <a:avLst>
@@ -5136,14 +5277,14 @@
       </p:sp>
       <p:sp>
         <p:nvSpPr>
-          <p:cNvPr id="46" name="Helper"/>
-          <p:cNvSpPr/>
-          <p:nvPr/>
-        </p:nvSpPr>
-        <p:spPr>
-          <a:xfrm>
-            <a:off x="1481328" y="4315968"/>
-            <a:ext cx="1188720" cy="822960"/>
+          <p:cNvPr id="72" name="Helper"/>
+          <p:cNvSpPr/>
+          <p:nvPr/>
+        </p:nvSpPr>
+        <p:spPr>
+          <a:xfrm>
+            <a:off x="4428439" y="4846320"/>
+            <a:ext cx="799551" cy="530352"/>
           </a:xfrm>
           <a:prstGeom prst="rect">
             <a:avLst/>
@@ -5154,7 +5295,7 @@
           </a:ln>
         </p:spPr>
         <p:txBody>
-          <a:bodyPr wrap="square" lIns="73152" tIns="36576" rIns="73152" bIns="36576" rtlCol="0" anchor="ctr">
+          <a:bodyPr wrap="square" lIns="0" tIns="36576" rIns="0" bIns="36576" rtlCol="0" anchor="ctr">
             <a:noAutofit/>
           </a:bodyPr>
           <a:lstStyle/>
@@ -5163,30 +5304,30 @@
               <a:buNone/>
             </a:pPr>
             <a:r>
-              <a:rPr lang="en-US" sz="2600" dirty="0" b="1">
-                <a:solidFill>
-                  <a:srgbClr val="1B2236"/>
-                </a:solidFill>
-                <a:latin typeface="Lexend Deca" pitchFamily="34" charset="0"/>
-                <a:ea typeface="Lexend Deca" pitchFamily="34" charset="-122"/>
-                <a:cs typeface="Lexend Deca" pitchFamily="34" charset="-120"/>
-              </a:rPr>
-              <a:t>How</a:t>
-            </a:r>
-            <a:endParaRPr lang="en-US" sz="2600" dirty="0"/>
-          </a:p>
-        </p:txBody>
-      </p:sp>
-      <p:sp>
-        <p:nvSpPr>
-          <p:cNvPr id="47" name="Question"/>
-          <p:cNvSpPr/>
-          <p:nvPr/>
-        </p:nvSpPr>
-        <p:spPr>
-          <a:xfrm>
-            <a:off x="2697480" y="4315968"/>
-            <a:ext cx="3291840" cy="822960"/>
+              <a:rPr lang="en-US" sz="2200" dirty="0" b="1">
+                <a:solidFill>
+                  <a:srgbClr val="1B2236"/>
+                </a:solidFill>
+                <a:latin typeface="Lexend Deca" pitchFamily="34" charset="0"/>
+                <a:ea typeface="Lexend Deca" pitchFamily="34" charset="-122"/>
+                <a:cs typeface="Lexend Deca" pitchFamily="34" charset="-120"/>
+              </a:rPr>
+              <a:t>did</a:t>
+            </a:r>
+            <a:endParaRPr lang="en-US" sz="2200" dirty="0"/>
+          </a:p>
+        </p:txBody>
+      </p:sp>
+      <p:sp>
+        <p:nvSpPr>
+          <p:cNvPr id="73" name="Rest"/>
+          <p:cNvSpPr/>
+          <p:nvPr/>
+        </p:nvSpPr>
+        <p:spPr>
+          <a:xfrm>
+            <a:off x="5282855" y="4846320"/>
+            <a:ext cx="1239012" cy="530352"/>
           </a:xfrm>
           <a:prstGeom prst="rect">
             <a:avLst/>
@@ -5197,7 +5338,7 @@
           </a:ln>
         </p:spPr>
         <p:txBody>
-          <a:bodyPr wrap="square" lIns="73152" tIns="36576" rIns="73152" bIns="36576" rtlCol="0" anchor="ctr">
+          <a:bodyPr wrap="square" lIns="0" tIns="36576" rIns="0" bIns="36576" rtlCol="0" anchor="ctr">
             <a:noAutofit/>
           </a:bodyPr>
           <a:lstStyle/>
@@ -5206,17 +5347,6 @@
               <a:buNone/>
             </a:pPr>
             <a:r>
-              <a:rPr lang="en-US" sz="2200" dirty="0" b="1">
-                <a:solidFill>
-                  <a:srgbClr val="1B2236"/>
-                </a:solidFill>
-                <a:latin typeface="Lexend Deca" pitchFamily="34" charset="0"/>
-                <a:ea typeface="Lexend Deca" pitchFamily="34" charset="-122"/>
-                <a:cs typeface="Lexend Deca" pitchFamily="34" charset="-120"/>
-              </a:rPr>
-              <a:t>was</a:t>
-            </a:r>
-            <a:r>
               <a:rPr lang="en-US" sz="2200" dirty="0">
                 <a:solidFill>
                   <a:srgbClr val="1B2236"/>
@@ -5225,7 +5355,7 @@
                 <a:ea typeface="Lexend Deca" pitchFamily="34" charset="-122"/>
                 <a:cs typeface="Lexend Deca" pitchFamily="34" charset="-120"/>
               </a:rPr>
-              <a:t> your weekend?</a:t>
+              <a:t>she do?</a:t>
             </a:r>
             <a:endParaRPr lang="en-US" sz="2200" dirty="0"/>
           </a:p>
@@ -5233,14 +5363,57 @@
       </p:sp>
       <p:sp>
         <p:nvSpPr>
-          <p:cNvPr id="49" name="Answer bg"/>
-          <p:cNvSpPr/>
-          <p:nvPr/>
-        </p:nvSpPr>
-        <p:spPr>
-          <a:xfrm>
-            <a:off x="6949440" y="4334256"/>
-            <a:ext cx="4526280" cy="786384"/>
+          <p:cNvPr id="74" name="Wh"/>
+          <p:cNvSpPr/>
+          <p:nvPr/>
+        </p:nvSpPr>
+        <p:spPr>
+          <a:xfrm>
+            <a:off x="3520440" y="5577840"/>
+            <a:ext cx="907999" cy="530352"/>
+          </a:xfrm>
+          <a:prstGeom prst="rect">
+            <a:avLst/>
+          </a:prstGeom>
+          <a:noFill/>
+          <a:ln w="38100">
+            <a:noFill/>
+          </a:ln>
+        </p:spPr>
+        <p:txBody>
+          <a:bodyPr wrap="square" lIns="0" tIns="36576" rIns="0" bIns="36576" rtlCol="0" anchor="ctr">
+            <a:noAutofit/>
+          </a:bodyPr>
+          <a:lstStyle/>
+          <a:p>
+            <a:pPr algn="l" indent="0" marL="0">
+              <a:buNone/>
+            </a:pPr>
+            <a:r>
+              <a:rPr lang="en-US" sz="2200" dirty="0">
+                <a:solidFill>
+                  <a:srgbClr val="1B2236"/>
+                </a:solidFill>
+                <a:latin typeface="Lexend Deca" pitchFamily="34" charset="0"/>
+                <a:ea typeface="Lexend Deca" pitchFamily="34" charset="-122"/>
+                <a:cs typeface="Lexend Deca" pitchFamily="34" charset="-120"/>
+              </a:rPr>
+              <a:t>What</a:t>
+            </a:r>
+            <a:endParaRPr lang="en-US" sz="2200" dirty="0"/>
+          </a:p>
+        </p:txBody>
+      </p:sp>
+      <p:sp>
+        <p:nvSpPr>
+          <p:cNvPr id="75" name="Highlight"/>
+          <p:cNvSpPr/>
+          <p:nvPr/>
+        </p:nvSpPr>
+        <p:spPr>
+          <a:xfrm>
+            <a:off x="4428439" y="5577840"/>
+            <a:ext cx="799551" cy="530352"/>
           </a:xfrm>
           <a:prstGeom prst="roundRect">
             <a:avLst>
@@ -5248,7 +5421,7 @@
             </a:avLst>
           </a:prstGeom>
           <a:solidFill>
-            <a:srgbClr val="FFFFFF"/>
+            <a:srgbClr val="FFE28C"/>
           </a:solidFill>
           <a:ln w="38100">
             <a:noFill/>
@@ -5280,14 +5453,14 @@
       </p:sp>
       <p:sp>
         <p:nvSpPr>
-          <p:cNvPr id="48" name="Answer"/>
-          <p:cNvSpPr/>
-          <p:nvPr/>
-        </p:nvSpPr>
-        <p:spPr>
-          <a:xfrm>
-            <a:off x="6949440" y="4315968"/>
-            <a:ext cx="4526280" cy="822960"/>
+          <p:cNvPr id="76" name="Helper"/>
+          <p:cNvSpPr/>
+          <p:nvPr/>
+        </p:nvSpPr>
+        <p:spPr>
+          <a:xfrm>
+            <a:off x="4428439" y="5577840"/>
+            <a:ext cx="799551" cy="530352"/>
           </a:xfrm>
           <a:prstGeom prst="rect">
             <a:avLst/>
@@ -5298,6 +5471,92 @@
           </a:ln>
         </p:spPr>
         <p:txBody>
+          <a:bodyPr wrap="square" lIns="0" tIns="36576" rIns="0" bIns="36576" rtlCol="0" anchor="ctr">
+            <a:noAutofit/>
+          </a:bodyPr>
+          <a:lstStyle/>
+          <a:p>
+            <a:pPr algn="ctr" indent="0" marL="0">
+              <a:buNone/>
+            </a:pPr>
+            <a:r>
+              <a:rPr lang="en-US" sz="2200" dirty="0" b="1">
+                <a:solidFill>
+                  <a:srgbClr val="1B2236"/>
+                </a:solidFill>
+                <a:latin typeface="Lexend Deca" pitchFamily="34" charset="0"/>
+                <a:ea typeface="Lexend Deca" pitchFamily="34" charset="-122"/>
+                <a:cs typeface="Lexend Deca" pitchFamily="34" charset="-120"/>
+              </a:rPr>
+              <a:t>did</a:t>
+            </a:r>
+            <a:endParaRPr lang="en-US" sz="2200" dirty="0"/>
+          </a:p>
+        </p:txBody>
+      </p:sp>
+      <p:sp>
+        <p:nvSpPr>
+          <p:cNvPr id="77" name="Rest"/>
+          <p:cNvSpPr/>
+          <p:nvPr/>
+        </p:nvSpPr>
+        <p:spPr>
+          <a:xfrm>
+            <a:off x="5282855" y="5577840"/>
+            <a:ext cx="1088136" cy="530352"/>
+          </a:xfrm>
+          <a:prstGeom prst="rect">
+            <a:avLst/>
+          </a:prstGeom>
+          <a:noFill/>
+          <a:ln w="38100">
+            <a:noFill/>
+          </a:ln>
+        </p:spPr>
+        <p:txBody>
+          <a:bodyPr wrap="square" lIns="0" tIns="36576" rIns="0" bIns="36576" rtlCol="0" anchor="ctr">
+            <a:noAutofit/>
+          </a:bodyPr>
+          <a:lstStyle/>
+          <a:p>
+            <a:pPr algn="l" indent="0" marL="0">
+              <a:buNone/>
+            </a:pPr>
+            <a:r>
+              <a:rPr lang="en-US" sz="2200" dirty="0">
+                <a:solidFill>
+                  <a:srgbClr val="1B2236"/>
+                </a:solidFill>
+                <a:latin typeface="Lexend Deca" pitchFamily="34" charset="0"/>
+                <a:ea typeface="Lexend Deca" pitchFamily="34" charset="-122"/>
+                <a:cs typeface="Lexend Deca" pitchFamily="34" charset="-120"/>
+              </a:rPr>
+              <a:t>he do?</a:t>
+            </a:r>
+            <a:endParaRPr lang="en-US" sz="2200" dirty="0"/>
+          </a:p>
+        </p:txBody>
+      </p:sp>
+      <p:sp>
+        <p:nvSpPr>
+          <p:cNvPr id="78" name="Card head"/>
+          <p:cNvSpPr/>
+          <p:nvPr/>
+        </p:nvSpPr>
+        <p:spPr>
+          <a:xfrm>
+            <a:off x="8549640" y="1280160"/>
+            <a:ext cx="3017520" cy="548640"/>
+          </a:xfrm>
+          <a:prstGeom prst="rect">
+            <a:avLst/>
+          </a:prstGeom>
+          <a:noFill/>
+          <a:ln w="38100">
+            <a:noFill/>
+          </a:ln>
+        </p:spPr>
+        <p:txBody>
           <a:bodyPr wrap="square" lIns="73152" tIns="36576" rIns="73152" bIns="36576" rtlCol="0" anchor="ctr">
             <a:noAutofit/>
           </a:bodyPr>
@@ -5307,91 +5566,225 @@
               <a:buNone/>
             </a:pPr>
             <a:r>
-              <a:rPr lang="en-US" sz="2200" dirty="0">
-                <a:solidFill>
-                  <a:srgbClr val="1B2236"/>
-                </a:solidFill>
-                <a:latin typeface="Lexend Deca" pitchFamily="34" charset="0"/>
-                <a:ea typeface="Lexend Deca" pitchFamily="34" charset="-122"/>
-                <a:cs typeface="Lexend Deca" pitchFamily="34" charset="-120"/>
-              </a:rPr>
-              <a:t>It </a:t>
-            </a:r>
-            <a:r>
-              <a:rPr lang="en-US" sz="2200" dirty="0" b="1">
-                <a:solidFill>
-                  <a:srgbClr val="1B2236"/>
-                </a:solidFill>
-                <a:latin typeface="Lexend Deca" pitchFamily="34" charset="0"/>
-                <a:ea typeface="Lexend Deca" pitchFamily="34" charset="-122"/>
-                <a:cs typeface="Lexend Deca" pitchFamily="34" charset="-120"/>
-              </a:rPr>
-              <a:t>was</a:t>
-            </a:r>
-            <a:r>
-              <a:rPr lang="en-US" sz="2200" dirty="0">
-                <a:solidFill>
-                  <a:srgbClr val="1B2236"/>
-                </a:solidFill>
-                <a:latin typeface="Lexend Deca" pitchFamily="34" charset="0"/>
-                <a:ea typeface="Lexend Deca" pitchFamily="34" charset="-122"/>
-                <a:cs typeface="Lexend Deca" pitchFamily="34" charset="-120"/>
-              </a:rPr>
-              <a:t> great.</a:t>
-            </a:r>
-            <a:endParaRPr lang="en-US" sz="2200" dirty="0"/>
-          </a:p>
+              <a:rPr lang="en-US" sz="2400" dirty="0" b="1">
+                <a:solidFill>
+                  <a:srgbClr val="1B2236"/>
+                </a:solidFill>
+                <a:latin typeface="Lexend Deca" pitchFamily="34" charset="0"/>
+                <a:ea typeface="Lexend Deca" pitchFamily="34" charset="-122"/>
+                <a:cs typeface="Lexend Deca" pitchFamily="34" charset="-120"/>
+              </a:rPr>
+              <a:t>Answers</a:t>
+            </a:r>
+            <a:endParaRPr lang="en-US" sz="2400" dirty="0"/>
+          </a:p>
+        </p:txBody>
+      </p:sp>
+      <p:sp>
+        <p:nvSpPr>
+          <p:cNvPr id="79" name="Card item"/>
+          <p:cNvSpPr/>
+          <p:nvPr/>
+        </p:nvSpPr>
+        <p:spPr>
+          <a:xfrm>
+            <a:off x="8549640" y="1920240"/>
+            <a:ext cx="3017520" cy="777240"/>
+          </a:xfrm>
+          <a:prstGeom prst="rect">
+            <a:avLst/>
+          </a:prstGeom>
+          <a:noFill/>
+          <a:ln w="38100">
+            <a:noFill/>
+          </a:ln>
+        </p:spPr>
+        <p:txBody>
+          <a:bodyPr wrap="square" lIns="73152" tIns="36576" rIns="73152" bIns="36576" rtlCol="0" anchor="ctr">
+            <a:noAutofit/>
+          </a:bodyPr>
+          <a:lstStyle/>
           <a:p>
             <a:pPr algn="l" indent="0" marL="0">
               <a:buNone/>
             </a:pPr>
             <a:r>
-              <a:rPr lang="en-US" sz="2200" dirty="0">
-                <a:solidFill>
-                  <a:srgbClr val="1B2236"/>
-                </a:solidFill>
-                <a:latin typeface="Lexend Deca" pitchFamily="34" charset="0"/>
-                <a:ea typeface="Lexend Deca" pitchFamily="34" charset="-122"/>
-                <a:cs typeface="Lexend Deca" pitchFamily="34" charset="-120"/>
-              </a:rPr>
-              <a:t>It </a:t>
-            </a:r>
-            <a:r>
-              <a:rPr lang="en-US" sz="2200" dirty="0" b="1">
-                <a:solidFill>
-                  <a:srgbClr val="1B2236"/>
-                </a:solidFill>
-                <a:latin typeface="Lexend Deca" pitchFamily="34" charset="0"/>
-                <a:ea typeface="Lexend Deca" pitchFamily="34" charset="-122"/>
-                <a:cs typeface="Lexend Deca" pitchFamily="34" charset="-120"/>
-              </a:rPr>
-              <a:t>was</a:t>
-            </a:r>
-            <a:r>
-              <a:rPr lang="en-US" sz="2200" dirty="0">
-                <a:solidFill>
-                  <a:srgbClr val="1B2236"/>
-                </a:solidFill>
-                <a:latin typeface="Lexend Deca" pitchFamily="34" charset="0"/>
-                <a:ea typeface="Lexend Deca" pitchFamily="34" charset="-122"/>
-                <a:cs typeface="Lexend Deca" pitchFamily="34" charset="-120"/>
-              </a:rPr>
-              <a:t> boring.</a:t>
-            </a:r>
-            <a:endParaRPr lang="en-US" sz="2200" dirty="0"/>
-          </a:p>
-        </p:txBody>
-      </p:sp>
-      <p:sp>
-        <p:nvSpPr>
-          <p:cNvPr id="50" name="Highlight"/>
-          <p:cNvSpPr/>
-          <p:nvPr/>
-        </p:nvSpPr>
-        <p:spPr>
-          <a:xfrm>
-            <a:off x="1481328" y="5367528"/>
-            <a:ext cx="1188720" cy="548640"/>
+              <a:rPr lang="en-US" sz="2000" dirty="0">
+                <a:solidFill>
+                  <a:srgbClr val="1B2236"/>
+                </a:solidFill>
+                <a:latin typeface="Lexend Deca" pitchFamily="34" charset="0"/>
+                <a:ea typeface="Lexend Deca" pitchFamily="34" charset="-122"/>
+                <a:cs typeface="Lexend Deca" pitchFamily="34" charset="-120"/>
+              </a:rPr>
+              <a:t>I clean</a:t>
+            </a:r>
+            <a:r>
+              <a:rPr lang="en-US" sz="2000" dirty="0" b="1">
+                <a:solidFill>
+                  <a:srgbClr val="5B3FC4"/>
+                </a:solidFill>
+                <a:latin typeface="Lexend Deca" pitchFamily="34" charset="0"/>
+                <a:ea typeface="Lexend Deca" pitchFamily="34" charset="-122"/>
+                <a:cs typeface="Lexend Deca" pitchFamily="34" charset="-120"/>
+              </a:rPr>
+              <a:t>ed</a:t>
+            </a:r>
+            <a:r>
+              <a:rPr lang="en-US" sz="2000" dirty="0">
+                <a:solidFill>
+                  <a:srgbClr val="1B2236"/>
+                </a:solidFill>
+                <a:latin typeface="Lexend Deca" pitchFamily="34" charset="0"/>
+                <a:ea typeface="Lexend Deca" pitchFamily="34" charset="-122"/>
+                <a:cs typeface="Lexend Deca" pitchFamily="34" charset="-120"/>
+              </a:rPr>
+              <a:t> the house.</a:t>
+            </a:r>
+            <a:endParaRPr lang="en-US" sz="2000" dirty="0"/>
+          </a:p>
+        </p:txBody>
+      </p:sp>
+      <p:sp>
+        <p:nvSpPr>
+          <p:cNvPr id="80" name="Card item"/>
+          <p:cNvSpPr/>
+          <p:nvPr/>
+        </p:nvSpPr>
+        <p:spPr>
+          <a:xfrm>
+            <a:off x="8549640" y="2724912"/>
+            <a:ext cx="3017520" cy="777240"/>
+          </a:xfrm>
+          <a:prstGeom prst="rect">
+            <a:avLst/>
+          </a:prstGeom>
+          <a:noFill/>
+          <a:ln w="38100">
+            <a:noFill/>
+          </a:ln>
+        </p:spPr>
+        <p:txBody>
+          <a:bodyPr wrap="square" lIns="73152" tIns="36576" rIns="73152" bIns="36576" rtlCol="0" anchor="ctr">
+            <a:noAutofit/>
+          </a:bodyPr>
+          <a:lstStyle/>
+          <a:p>
+            <a:pPr algn="l" indent="0" marL="0">
+              <a:buNone/>
+            </a:pPr>
+            <a:r>
+              <a:rPr lang="en-US" sz="2000" dirty="0">
+                <a:solidFill>
+                  <a:srgbClr val="1B2236"/>
+                </a:solidFill>
+                <a:latin typeface="Lexend Deca" pitchFamily="34" charset="0"/>
+                <a:ea typeface="Lexend Deca" pitchFamily="34" charset="-122"/>
+                <a:cs typeface="Lexend Deca" pitchFamily="34" charset="-120"/>
+              </a:rPr>
+              <a:t>She watch</a:t>
+            </a:r>
+            <a:r>
+              <a:rPr lang="en-US" sz="2000" dirty="0" b="1">
+                <a:solidFill>
+                  <a:srgbClr val="5B3FC4"/>
+                </a:solidFill>
+                <a:latin typeface="Lexend Deca" pitchFamily="34" charset="0"/>
+                <a:ea typeface="Lexend Deca" pitchFamily="34" charset="-122"/>
+                <a:cs typeface="Lexend Deca" pitchFamily="34" charset="-120"/>
+              </a:rPr>
+              <a:t>ed</a:t>
+            </a:r>
+            <a:r>
+              <a:rPr lang="en-US" sz="2000" dirty="0">
+                <a:solidFill>
+                  <a:srgbClr val="1B2236"/>
+                </a:solidFill>
+                <a:latin typeface="Lexend Deca" pitchFamily="34" charset="0"/>
+                <a:ea typeface="Lexend Deca" pitchFamily="34" charset="-122"/>
+                <a:cs typeface="Lexend Deca" pitchFamily="34" charset="-120"/>
+              </a:rPr>
+              <a:t> a movie.</a:t>
+            </a:r>
+            <a:endParaRPr lang="en-US" sz="2000" dirty="0"/>
+          </a:p>
+        </p:txBody>
+      </p:sp>
+      <p:sp>
+        <p:nvSpPr>
+          <p:cNvPr id="81" name="Card item"/>
+          <p:cNvSpPr/>
+          <p:nvPr/>
+        </p:nvSpPr>
+        <p:spPr>
+          <a:xfrm>
+            <a:off x="8549640" y="3529584"/>
+            <a:ext cx="3017520" cy="457200"/>
+          </a:xfrm>
+          <a:prstGeom prst="rect">
+            <a:avLst/>
+          </a:prstGeom>
+          <a:noFill/>
+          <a:ln w="38100">
+            <a:noFill/>
+          </a:ln>
+        </p:spPr>
+        <p:txBody>
+          <a:bodyPr wrap="square" lIns="73152" tIns="36576" rIns="73152" bIns="36576" rtlCol="0" anchor="ctr">
+            <a:noAutofit/>
+          </a:bodyPr>
+          <a:lstStyle/>
+          <a:p>
+            <a:pPr algn="l" indent="0" marL="0">
+              <a:buNone/>
+            </a:pPr>
+            <a:r>
+              <a:rPr lang="en-US" sz="2000" dirty="0">
+                <a:solidFill>
+                  <a:srgbClr val="1B2236"/>
+                </a:solidFill>
+                <a:latin typeface="Lexend Deca" pitchFamily="34" charset="0"/>
+                <a:ea typeface="Lexend Deca" pitchFamily="34" charset="-122"/>
+                <a:cs typeface="Lexend Deca" pitchFamily="34" charset="-120"/>
+              </a:rPr>
+              <a:t>He visit</a:t>
+            </a:r>
+            <a:r>
+              <a:rPr lang="en-US" sz="2000" dirty="0" b="1">
+                <a:solidFill>
+                  <a:srgbClr val="5B3FC4"/>
+                </a:solidFill>
+                <a:latin typeface="Lexend Deca" pitchFamily="34" charset="0"/>
+                <a:ea typeface="Lexend Deca" pitchFamily="34" charset="-122"/>
+                <a:cs typeface="Lexend Deca" pitchFamily="34" charset="-120"/>
+              </a:rPr>
+              <a:t>ed</a:t>
+            </a:r>
+            <a:r>
+              <a:rPr lang="en-US" sz="2000" dirty="0">
+                <a:solidFill>
+                  <a:srgbClr val="1B2236"/>
+                </a:solidFill>
+                <a:latin typeface="Lexend Deca" pitchFamily="34" charset="0"/>
+                <a:ea typeface="Lexend Deca" pitchFamily="34" charset="-122"/>
+                <a:cs typeface="Lexend Deca" pitchFamily="34" charset="-120"/>
+              </a:rPr>
+              <a:t> family.</a:t>
+            </a:r>
+            <a:endParaRPr lang="en-US" sz="2000" dirty="0"/>
+          </a:p>
+        </p:txBody>
+      </p:sp>
+      <p:sp>
+        <p:nvSpPr>
+          <p:cNvPr id="82" name="Example"/>
+          <p:cNvSpPr/>
+          <p:nvPr/>
+        </p:nvSpPr>
+        <p:spPr>
+          <a:xfrm>
+            <a:off x="8549640" y="5394960"/>
+            <a:ext cx="3017520" cy="502920"/>
           </a:xfrm>
           <a:prstGeom prst="roundRect">
             <a:avLst>
@@ -5399,7 +5792,7 @@
             </a:avLst>
           </a:prstGeom>
           <a:solidFill>
-            <a:srgbClr val="FFE28C"/>
+            <a:srgbClr val="FFFFFF"/>
           </a:solidFill>
           <a:ln w="38100">
             <a:noFill/>
@@ -5411,96 +5804,10 @@
           </a:bodyPr>
           <a:lstStyle/>
           <a:p>
-            <a:pPr algn="l" indent="0" marL="0">
-              <a:buNone/>
-            </a:pPr>
-            <a:r>
-              <a:rPr lang="en-US" sz="2000" dirty="0">
-                <a:solidFill>
-                  <a:srgbClr val="1B2236"/>
-                </a:solidFill>
-                <a:latin typeface="Lexend Deca" pitchFamily="34" charset="0"/>
-                <a:ea typeface="Lexend Deca" pitchFamily="34" charset="-122"/>
-                <a:cs typeface="Lexend Deca" pitchFamily="34" charset="-120"/>
-              </a:rPr>
-              <a:t/>
-            </a:r>
-            <a:endParaRPr lang="en-US" sz="2000" dirty="0"/>
-          </a:p>
-        </p:txBody>
-      </p:sp>
-      <p:sp>
-        <p:nvSpPr>
-          <p:cNvPr id="51" name="Helper"/>
-          <p:cNvSpPr/>
-          <p:nvPr/>
-        </p:nvSpPr>
-        <p:spPr>
-          <a:xfrm>
-            <a:off x="1481328" y="5230368"/>
-            <a:ext cx="1188720" cy="822960"/>
-          </a:xfrm>
-          <a:prstGeom prst="rect">
-            <a:avLst/>
-          </a:prstGeom>
-          <a:noFill/>
-          <a:ln w="38100">
-            <a:noFill/>
-          </a:ln>
-        </p:spPr>
-        <p:txBody>
-          <a:bodyPr wrap="square" lIns="73152" tIns="36576" rIns="73152" bIns="36576" rtlCol="0" anchor="ctr">
-            <a:noAutofit/>
-          </a:bodyPr>
-          <a:lstStyle/>
-          <a:p>
             <a:pPr algn="ctr" indent="0" marL="0">
               <a:buNone/>
             </a:pPr>
             <a:r>
-              <a:rPr lang="en-US" sz="2600" dirty="0" b="1">
-                <a:solidFill>
-                  <a:srgbClr val="1B2236"/>
-                </a:solidFill>
-                <a:latin typeface="Lexend Deca" pitchFamily="34" charset="0"/>
-                <a:ea typeface="Lexend Deca" pitchFamily="34" charset="-122"/>
-                <a:cs typeface="Lexend Deca" pitchFamily="34" charset="-120"/>
-              </a:rPr>
-              <a:t>Was</a:t>
-            </a:r>
-            <a:endParaRPr lang="en-US" sz="2600" dirty="0"/>
-          </a:p>
-        </p:txBody>
-      </p:sp>
-      <p:sp>
-        <p:nvSpPr>
-          <p:cNvPr id="52" name="Question"/>
-          <p:cNvSpPr/>
-          <p:nvPr/>
-        </p:nvSpPr>
-        <p:spPr>
-          <a:xfrm>
-            <a:off x="2697480" y="5230368"/>
-            <a:ext cx="3291840" cy="822960"/>
-          </a:xfrm>
-          <a:prstGeom prst="rect">
-            <a:avLst/>
-          </a:prstGeom>
-          <a:noFill/>
-          <a:ln w="38100">
-            <a:noFill/>
-          </a:ln>
-        </p:spPr>
-        <p:txBody>
-          <a:bodyPr wrap="square" lIns="73152" tIns="36576" rIns="73152" bIns="36576" rtlCol="0" anchor="ctr">
-            <a:noAutofit/>
-          </a:bodyPr>
-          <a:lstStyle/>
-          <a:p>
-            <a:pPr algn="l" indent="0" marL="0">
-              <a:buNone/>
-            </a:pPr>
-            <a:r>
               <a:rPr lang="en-US" sz="2200" dirty="0">
                 <a:solidFill>
                   <a:srgbClr val="1B2236"/>
@@ -5509,87 +5816,19 @@
                 <a:ea typeface="Lexend Deca" pitchFamily="34" charset="-122"/>
                 <a:cs typeface="Lexend Deca" pitchFamily="34" charset="-120"/>
               </a:rPr>
-              <a:t>it fun?</a:t>
-            </a:r>
-            <a:endParaRPr lang="en-US" sz="2200" dirty="0"/>
-          </a:p>
-        </p:txBody>
-      </p:sp>
-      <p:sp>
-        <p:nvSpPr>
-          <p:cNvPr id="54" name="Answer bg"/>
-          <p:cNvSpPr/>
-          <p:nvPr/>
-        </p:nvSpPr>
-        <p:spPr>
-          <a:xfrm>
-            <a:off x="6949440" y="5248656"/>
-            <a:ext cx="4526280" cy="786384"/>
-          </a:xfrm>
-          <a:prstGeom prst="roundRect">
-            <a:avLst>
-              <a:gd name="adj" fmla="val 22000"/>
-            </a:avLst>
-          </a:prstGeom>
-          <a:solidFill>
-            <a:srgbClr val="FFFFFF"/>
-          </a:solidFill>
-          <a:ln w="38100">
-            <a:noFill/>
-          </a:ln>
-        </p:spPr>
-        <p:txBody>
-          <a:bodyPr wrap="square" lIns="73152" tIns="36576" rIns="73152" bIns="36576" rtlCol="0" anchor="ctr">
-            <a:noAutofit/>
-          </a:bodyPr>
-          <a:lstStyle/>
-          <a:p>
-            <a:pPr algn="l" indent="0" marL="0">
-              <a:buNone/>
-            </a:pPr>
-            <a:r>
-              <a:rPr lang="en-US" sz="2000" dirty="0">
-                <a:solidFill>
-                  <a:srgbClr val="1B2236"/>
-                </a:solidFill>
-                <a:latin typeface="Lexend Deca" pitchFamily="34" charset="0"/>
-                <a:ea typeface="Lexend Deca" pitchFamily="34" charset="-122"/>
-                <a:cs typeface="Lexend Deca" pitchFamily="34" charset="-120"/>
-              </a:rPr>
-              <a:t/>
-            </a:r>
-            <a:endParaRPr lang="en-US" sz="2000" dirty="0"/>
-          </a:p>
-        </p:txBody>
-      </p:sp>
-      <p:sp>
-        <p:nvSpPr>
-          <p:cNvPr id="53" name="Answer"/>
-          <p:cNvSpPr/>
-          <p:nvPr/>
-        </p:nvSpPr>
-        <p:spPr>
-          <a:xfrm>
-            <a:off x="6949440" y="5230368"/>
-            <a:ext cx="4526280" cy="822960"/>
-          </a:xfrm>
-          <a:prstGeom prst="rect">
-            <a:avLst/>
-          </a:prstGeom>
-          <a:noFill/>
-          <a:ln w="38100">
-            <a:noFill/>
-          </a:ln>
-        </p:spPr>
-        <p:txBody>
-          <a:bodyPr wrap="square" lIns="73152" tIns="36576" rIns="73152" bIns="36576" rtlCol="0" anchor="ctr">
-            <a:noAutofit/>
-          </a:bodyPr>
-          <a:lstStyle/>
-          <a:p>
-            <a:pPr algn="l" indent="0" marL="0">
-              <a:buNone/>
-            </a:pPr>
+              <a:t>... last </a:t>
+            </a:r>
+            <a:r>
+              <a:rPr lang="en-US" sz="2200" dirty="0" b="1">
+                <a:solidFill>
+                  <a:srgbClr val="5B3FC4"/>
+                </a:solidFill>
+                <a:latin typeface="Lexend Deca" pitchFamily="34" charset="0"/>
+                <a:ea typeface="Lexend Deca" pitchFamily="34" charset="-122"/>
+                <a:cs typeface="Lexend Deca" pitchFamily="34" charset="-120"/>
+              </a:rPr>
+              <a:t>weekend</a:t>
+            </a:r>
             <a:r>
               <a:rPr lang="en-US" sz="2200" dirty="0">
                 <a:solidFill>
@@ -5599,68 +5838,7 @@
                 <a:ea typeface="Lexend Deca" pitchFamily="34" charset="-122"/>
                 <a:cs typeface="Lexend Deca" pitchFamily="34" charset="-120"/>
               </a:rPr>
-              <a:t>Yes, it </a:t>
-            </a:r>
-            <a:r>
-              <a:rPr lang="en-US" sz="2200" dirty="0" b="1">
-                <a:solidFill>
-                  <a:srgbClr val="1B2236"/>
-                </a:solidFill>
-                <a:latin typeface="Lexend Deca" pitchFamily="34" charset="0"/>
-                <a:ea typeface="Lexend Deca" pitchFamily="34" charset="-122"/>
-                <a:cs typeface="Lexend Deca" pitchFamily="34" charset="-120"/>
-              </a:rPr>
-              <a:t>was</a:t>
-            </a:r>
-            <a:r>
-              <a:rPr lang="en-US" sz="2200" dirty="0">
-                <a:solidFill>
-                  <a:srgbClr val="1B2236"/>
-                </a:solidFill>
-                <a:latin typeface="Lexend Deca" pitchFamily="34" charset="0"/>
-                <a:ea typeface="Lexend Deca" pitchFamily="34" charset="-122"/>
-                <a:cs typeface="Lexend Deca" pitchFamily="34" charset="-120"/>
-              </a:rPr>
-              <a:t>.</a:t>
-            </a:r>
-            <a:endParaRPr lang="en-US" sz="2200" dirty="0"/>
-          </a:p>
-          <a:p>
-            <a:pPr algn="l" indent="0" marL="0">
-              <a:buNone/>
-            </a:pPr>
-            <a:r>
-              <a:rPr lang="en-US" sz="2200" dirty="0">
-                <a:solidFill>
-                  <a:srgbClr val="1B2236"/>
-                </a:solidFill>
-                <a:latin typeface="Lexend Deca" pitchFamily="34" charset="0"/>
-                <a:ea typeface="Lexend Deca" pitchFamily="34" charset="-122"/>
-                <a:cs typeface="Lexend Deca" pitchFamily="34" charset="-120"/>
-              </a:rPr>
-              <a:t>No, it </a:t>
-            </a:r>
-            <a:r>
-              <a:rPr lang="en-US" sz="2200" dirty="0" b="1">
-                <a:solidFill>
-                  <a:srgbClr val="1B2236"/>
-                </a:solidFill>
-                <a:latin typeface="Lexend Deca" pitchFamily="34" charset="0"/>
-                <a:ea typeface="Lexend Deca" pitchFamily="34" charset="-122"/>
-                <a:cs typeface="Lexend Deca" pitchFamily="34" charset="-120"/>
-              </a:rPr>
-              <a:t>wasn't</a:t>
-            </a:r>
-            <a:r>
-              <a:rPr lang="en-US" sz="2200" dirty="0">
-                <a:solidFill>
-                  <a:srgbClr val="1B2236"/>
-                </a:solidFill>
-                <a:latin typeface="Lexend Deca" pitchFamily="34" charset="0"/>
-                <a:ea typeface="Lexend Deca" pitchFamily="34" charset="-122"/>
-                <a:cs typeface="Lexend Deca" pitchFamily="34" charset="-120"/>
-              </a:rPr>
-              <a:t>.</a:t>
+              <a:t>?</a:t>
             </a:r>
             <a:endParaRPr lang="en-US" sz="2200" dirty="0"/>
           </a:p>
@@ -5705,7 +5883,7 @@
                                           </p:stCondLst>
                                         </p:cTn>
                                         <p:tgtEl>
-                                          <p:spTgt spid="45"/>
+                                          <p:spTgt spid="67"/>
                                         </p:tgtEl>
                                         <p:attrNameLst>
                                           <p:attrName>style.visibility</p:attrName>
@@ -5719,42 +5897,7 @@
                                       <p:cBhvr>
                                         <p:cTn id="7" dur="400"/>
                                         <p:tgtEl>
-                                          <p:spTgt spid="45"/>
-                                        </p:tgtEl>
-                                      </p:cBhvr>
-                                    </p:animEffect>
-                                  </p:childTnLst>
-                                </p:cTn>
-                              </p:par>
-                              <p:par>
-                                <p:cTn id="8" presetID="10" presetClass="entr" presetSubtype="0" fill="hold" nodeType="withEffect">
-                                  <p:stCondLst>
-                                    <p:cond delay="0"/>
-                                  </p:stCondLst>
-                                  <p:childTnLst>
-                                    <p:set>
-                                      <p:cBhvr>
-                                        <p:cTn id="9" dur="1" fill="hold">
-                                          <p:stCondLst>
-                                            <p:cond delay="0"/>
-                                          </p:stCondLst>
-                                        </p:cTn>
-                                        <p:tgtEl>
-                                          <p:spTgt spid="49"/>
-                                        </p:tgtEl>
-                                        <p:attrNameLst>
-                                          <p:attrName>style.visibility</p:attrName>
-                                        </p:attrNameLst>
-                                      </p:cBhvr>
-                                      <p:to>
-                                        <p:strVal val="visible"/>
-                                      </p:to>
-                                    </p:set>
-                                    <p:animEffect transition="in" filter="fade">
-                                      <p:cBhvr>
-                                        <p:cTn id="10" dur="400"/>
-                                        <p:tgtEl>
-                                          <p:spTgt spid="49"/>
+                                          <p:spTgt spid="67"/>
                                         </p:tgtEl>
                                       </p:cBhvr>
                                     </p:animEffect>
@@ -5768,32 +5911,32 @@
                     </p:cTn>
                   </p:par>
                   <p:par>
-                    <p:cTn id="11" fill="hold">
+                    <p:cTn id="8" fill="hold">
                       <p:stCondLst>
                         <p:cond delay="indefinite"/>
                       </p:stCondLst>
                       <p:childTnLst>
                         <p:par>
-                          <p:cTn id="12" fill="hold">
+                          <p:cTn id="9" fill="hold">
                             <p:stCondLst>
                               <p:cond delay="0"/>
                             </p:stCondLst>
                             <p:childTnLst>
                               <p:par>
-                                <p:cTn id="13" presetID="10" presetClass="entr" presetSubtype="0" fill="hold" nodeType="clickEffect">
+                                <p:cTn id="10" presetID="10" presetClass="entr" presetSubtype="0" fill="hold" nodeType="clickEffect">
                                   <p:stCondLst>
                                     <p:cond delay="0"/>
                                   </p:stCondLst>
                                   <p:childTnLst>
                                     <p:set>
                                       <p:cBhvr>
-                                        <p:cTn id="14" dur="1" fill="hold">
+                                        <p:cTn id="11" dur="1" fill="hold">
                                           <p:stCondLst>
                                             <p:cond delay="0"/>
                                           </p:stCondLst>
                                         </p:cTn>
                                         <p:tgtEl>
-                                          <p:spTgt spid="50"/>
+                                          <p:spTgt spid="71"/>
                                         </p:tgtEl>
                                         <p:attrNameLst>
                                           <p:attrName>style.visibility</p:attrName>
@@ -5805,30 +5948,48 @@
                                     </p:set>
                                     <p:animEffect transition="in" filter="fade">
                                       <p:cBhvr>
-                                        <p:cTn id="15" dur="400"/>
+                                        <p:cTn id="12" dur="400"/>
                                         <p:tgtEl>
-                                          <p:spTgt spid="50"/>
+                                          <p:spTgt spid="71"/>
                                         </p:tgtEl>
                                       </p:cBhvr>
                                     </p:animEffect>
                                   </p:childTnLst>
                                 </p:cTn>
                               </p:par>
+                            </p:childTnLst>
+                          </p:cTn>
+                        </p:par>
+                      </p:childTnLst>
+                    </p:cTn>
+                  </p:par>
+                  <p:par>
+                    <p:cTn id="13" fill="hold">
+                      <p:stCondLst>
+                        <p:cond delay="indefinite"/>
+                      </p:stCondLst>
+                      <p:childTnLst>
+                        <p:par>
+                          <p:cTn id="14" fill="hold">
+                            <p:stCondLst>
+                              <p:cond delay="0"/>
+                            </p:stCondLst>
+                            <p:childTnLst>
                               <p:par>
-                                <p:cTn id="16" presetID="10" presetClass="entr" presetSubtype="0" fill="hold" nodeType="withEffect">
+                                <p:cTn id="15" presetID="10" presetClass="entr" presetSubtype="0" fill="hold" nodeType="clickEffect">
                                   <p:stCondLst>
                                     <p:cond delay="0"/>
                                   </p:stCondLst>
                                   <p:childTnLst>
                                     <p:set>
                                       <p:cBhvr>
-                                        <p:cTn id="17" dur="1" fill="hold">
+                                        <p:cTn id="16" dur="1" fill="hold">
                                           <p:stCondLst>
                                             <p:cond delay="0"/>
                                           </p:stCondLst>
                                         </p:cTn>
                                         <p:tgtEl>
-                                          <p:spTgt spid="54"/>
+                                          <p:spTgt spid="75"/>
                                         </p:tgtEl>
                                         <p:attrNameLst>
                                           <p:attrName>style.visibility</p:attrName>
@@ -5840,9 +6001,9 @@
                                     </p:set>
                                     <p:animEffect transition="in" filter="fade">
                                       <p:cBhvr>
-                                        <p:cTn id="18" dur="400"/>
+                                        <p:cTn id="17" dur="400"/>
                                         <p:tgtEl>
-                                          <p:spTgt spid="54"/>
+                                          <p:spTgt spid="75"/>
                                         </p:tgtEl>
                                       </p:cBhvr>
                                     </p:animEffect>
@@ -16571,1966 +16732,6 @@
 
 <file path=ppt/slides/slide6.xml><?xml version="1.0" encoding="utf-8"?>
 <p:sld xmlns:a="http://schemas.openxmlformats.org/drawingml/2006/main" xmlns:r="http://schemas.openxmlformats.org/officeDocument/2006/relationships" xmlns:p="http://schemas.openxmlformats.org/presentationml/2006/main">
-  <p:cSld name="Slide 13">
-    <p:bg>
-      <p:bgPr>
-        <a:solidFill>
-          <a:srgbClr val="F1F5FB"/>
-        </a:solidFill>
-      </p:bgPr>
-    </p:bg>
-    <p:spTree>
-      <p:nvGrpSpPr>
-        <p:cNvPr id="1" name=""/>
-        <p:cNvGrpSpPr/>
-        <p:nvPr/>
-      </p:nvGrpSpPr>
-      <p:grpSpPr>
-        <a:xfrm>
-          <a:off x="0" y="0"/>
-          <a:ext cx="0" cy="0"/>
-          <a:chOff x="0" y="0"/>
-          <a:chExt cx="0" cy="0"/>
-        </a:xfrm>
-      </p:grpSpPr>
-      <p:sp>
-        <p:nvSpPr>
-          <p:cNvPr id="4" name="Shape 2"/>
-          <p:cNvSpPr/>
-          <p:nvPr/>
-        </p:nvSpPr>
-        <p:spPr>
-          <a:xfrm>
-            <a:off x="560984" y="1342842"/>
-            <a:ext cx="4912157" cy="1595628"/>
-          </a:xfrm>
-          <a:prstGeom prst="roundRect">
-            <a:avLst>
-              <a:gd name="adj" fmla="val 16667"/>
-            </a:avLst>
-          </a:prstGeom>
-          <a:solidFill>
-            <a:srgbClr val="8FAFE3"/>
-          </a:solidFill>
-          <a:ln/>
-        </p:spPr>
-        <p:txBody>
-          <a:bodyPr/>
-          <a:p/>
-        </p:txBody>
-      </p:sp>
-      <p:sp>
-        <p:nvSpPr>
-          <p:cNvPr id="5" name="Shape 3"/>
-          <p:cNvSpPr/>
-          <p:nvPr/>
-        </p:nvSpPr>
-        <p:spPr>
-          <a:xfrm>
-            <a:off x="589788" y="1277417"/>
-            <a:ext cx="4912157" cy="1595628"/>
-          </a:xfrm>
-          <a:prstGeom prst="roundRect">
-            <a:avLst>
-              <a:gd name="adj" fmla="val 16667"/>
-            </a:avLst>
-          </a:prstGeom>
-          <a:solidFill>
-            <a:srgbClr val="FFFFFF"/>
-          </a:solidFill>
-          <a:ln/>
-        </p:spPr>
-        <p:txBody>
-          <a:bodyPr/>
-          <a:p/>
-        </p:txBody>
-      </p:sp>
-      <p:sp>
-        <p:nvSpPr>
-          <p:cNvPr id="6" name="Text 4"/>
-          <p:cNvSpPr/>
-          <p:nvPr/>
-        </p:nvSpPr>
-        <p:spPr>
-          <a:xfrm>
-            <a:off x="771754" y="1417320"/>
-            <a:ext cx="4572000" cy="731520"/>
-          </a:xfrm>
-          <a:prstGeom prst="rect">
-            <a:avLst/>
-          </a:prstGeom>
-          <a:noFill/>
-          <a:ln/>
-        </p:spPr>
-        <p:txBody>
-          <a:bodyPr wrap="square" rtlCol="0" anchor="ctr"/>
-          <a:lstStyle/>
-          <a:p>
-            <a:pPr algn="l" indent="0" marL="0">
-              <a:buNone/>
-            </a:pPr>
-            <a:r>
-              <a:rPr lang="en-US" sz="4000" dirty="0" b="1">
-                <a:solidFill>
-                  <a:srgbClr val="1B2236"/>
-                </a:solidFill>
-                <a:latin typeface="Lexend Deca" pitchFamily="34" charset="0"/>
-                <a:ea typeface="Lexend Deca" pitchFamily="34" charset="-122"/>
-                <a:cs typeface="Lexend Deca" pitchFamily="34" charset="-120"/>
-              </a:rPr>
-              <a:t>Listening B</a:t>
-            </a:r>
-            <a:endParaRPr lang="en-US" sz="4000" dirty="0"/>
-          </a:p>
-        </p:txBody>
-      </p:sp>
-      <p:sp>
-        <p:nvSpPr>
-          <p:cNvPr id="22" name="Shape 20"/>
-          <p:cNvSpPr/>
-          <p:nvPr/>
-        </p:nvSpPr>
-        <p:spPr>
-          <a:xfrm>
-            <a:off x="4702759" y="5703113"/>
-            <a:ext cx="727862" cy="687570"/>
-          </a:xfrm>
-          <a:prstGeom prst="star10">
-            <a:avLst/>
-          </a:prstGeom>
-          <a:solidFill>
-            <a:srgbClr val="8FAFE3"/>
-          </a:solidFill>
-          <a:ln/>
-        </p:spPr>
-        <p:txBody>
-          <a:bodyPr/>
-          <a:p/>
-        </p:txBody>
-      </p:sp>
-      <p:sp>
-        <p:nvSpPr>
-          <p:cNvPr id="23" name="Shape 21"/>
-          <p:cNvSpPr/>
-          <p:nvPr/>
-        </p:nvSpPr>
-        <p:spPr>
-          <a:xfrm>
-            <a:off x="4761248" y="5694015"/>
-            <a:ext cx="740860" cy="740860"/>
-          </a:xfrm>
-          <a:prstGeom prst="star10">
-            <a:avLst/>
-          </a:prstGeom>
-          <a:solidFill>
-            <a:srgbClr val="FFE28C"/>
-          </a:solidFill>
-          <a:ln/>
-        </p:spPr>
-        <p:txBody>
-          <a:bodyPr/>
-          <a:p/>
-        </p:txBody>
-      </p:sp>
-      <p:sp>
-        <p:nvSpPr>
-          <p:cNvPr id="24" name="Shape 22"/>
-          <p:cNvSpPr/>
-          <p:nvPr/>
-        </p:nvSpPr>
-        <p:spPr>
-          <a:xfrm rot="900000">
-            <a:off x="4962710" y="5906524"/>
-            <a:ext cx="316490" cy="316490"/>
-          </a:xfrm>
-          <a:prstGeom prst="mathPlus">
-            <a:avLst/>
-          </a:prstGeom>
-          <a:solidFill>
-            <a:srgbClr val="1B2236"/>
-          </a:solidFill>
-          <a:ln/>
-        </p:spPr>
-        <p:txBody>
-          <a:bodyPr/>
-          <a:p/>
-        </p:txBody>
-      </p:sp>
-      <p:sp>
-        <p:nvSpPr>
-          <p:cNvPr id="65" name="Subtitle"/>
-          <p:cNvSpPr/>
-          <p:nvPr/>
-        </p:nvSpPr>
-        <p:spPr>
-          <a:xfrm>
-            <a:off x="771754" y="2148840"/>
-            <a:ext cx="4572000" cy="548640"/>
-          </a:xfrm>
-          <a:prstGeom prst="rect">
-            <a:avLst/>
-          </a:prstGeom>
-          <a:noFill/>
-          <a:ln w="38100">
-            <a:noFill/>
-          </a:ln>
-        </p:spPr>
-        <p:txBody>
-          <a:bodyPr wrap="square" lIns="91440" tIns="36576" rIns="91440" bIns="36576" rtlCol="0" anchor="ctr">
-            <a:noAutofit/>
-          </a:bodyPr>
-          <a:lstStyle/>
-          <a:p>
-            <a:pPr algn="l" indent="0" marL="0">
-              <a:buNone/>
-            </a:pPr>
-            <a:r>
-              <a:rPr lang="en-US" sz="2000" dirty="0">
-                <a:solidFill>
-                  <a:srgbClr val="1B2236"/>
-                </a:solidFill>
-                <a:latin typeface="Lexend Deca" pitchFamily="34" charset="0"/>
-                <a:ea typeface="Lexend Deca" pitchFamily="34" charset="-122"/>
-                <a:cs typeface="Lexend Deca" pitchFamily="34" charset="-120"/>
-              </a:rPr>
-              <a:t>Listen again. Circle.</a:t>
-            </a:r>
-            <a:endParaRPr lang="en-US" sz="2000" dirty="0"/>
-          </a:p>
-        </p:txBody>
-      </p:sp>
-      <p:pic>
-        <p:nvPicPr>
-          <p:cNvPr id="66" name="Picture 66" descr="L5_watched_a_movie.png"/>
-          <p:cNvPicPr>
-            <a:picLocks noChangeAspect="1"/>
-          </p:cNvPicPr>
-          <p:nvPr/>
-        </p:nvPicPr>
-        <p:blipFill>
-          <a:blip r:embed="rIdQ1"/>
-          <a:stretch>
-            <a:fillRect/>
-          </a:stretch>
-        </p:blipFill>
-        <p:spPr>
-          <a:xfrm>
-            <a:off x="1274674" y="3680460"/>
-            <a:ext cx="3450031" cy="2415022"/>
-          </a:xfrm>
-          <a:prstGeom prst="rect">
-            <a:avLst/>
-          </a:prstGeom>
-        </p:spPr>
-      </p:pic>
-      <p:sp>
-        <p:nvSpPr>
-          <p:cNvPr id="67" name="Row shadow"/>
-          <p:cNvSpPr/>
-          <p:nvPr/>
-        </p:nvSpPr>
-        <p:spPr>
-          <a:xfrm>
-            <a:off x="5970118" y="1153973"/>
-            <a:ext cx="5897880" cy="1188720"/>
-          </a:xfrm>
-          <a:prstGeom prst="round1Rect">
-            <a:avLst/>
-          </a:prstGeom>
-          <a:solidFill>
-            <a:srgbClr val="8FAFE3"/>
-          </a:solidFill>
-          <a:ln w="38100">
-            <a:noFill/>
-          </a:ln>
-        </p:spPr>
-        <p:txBody>
-          <a:bodyPr wrap="square" lIns="73152" tIns="36576" rIns="73152" bIns="36576" rtlCol="0" anchor="ctr">
-            <a:noAutofit/>
-          </a:bodyPr>
-          <a:lstStyle/>
-          <a:p>
-            <a:pPr algn="l" indent="0" marL="0">
-              <a:buNone/>
-            </a:pPr>
-            <a:r>
-              <a:rPr lang="en-US" sz="2000" dirty="0">
-                <a:solidFill>
-                  <a:srgbClr val="1B2236"/>
-                </a:solidFill>
-                <a:latin typeface="Lexend Deca" pitchFamily="34" charset="0"/>
-                <a:ea typeface="Lexend Deca" pitchFamily="34" charset="-122"/>
-                <a:cs typeface="Lexend Deca" pitchFamily="34" charset="-120"/>
-              </a:rPr>
-              <a:t/>
-            </a:r>
-            <a:endParaRPr lang="en-US" sz="2000" dirty="0"/>
-          </a:p>
-        </p:txBody>
-      </p:sp>
-      <p:sp>
-        <p:nvSpPr>
-          <p:cNvPr id="68" name="Row"/>
-          <p:cNvSpPr/>
-          <p:nvPr/>
-        </p:nvSpPr>
-        <p:spPr>
-          <a:xfrm>
-            <a:off x="5897880" y="1097280"/>
-            <a:ext cx="5897880" cy="1188720"/>
-          </a:xfrm>
-          <a:prstGeom prst="round1Rect">
-            <a:avLst/>
-          </a:prstGeom>
-          <a:solidFill>
-            <a:srgbClr val="FFFFFF"/>
-          </a:solidFill>
-          <a:ln w="38100">
-            <a:noFill/>
-          </a:ln>
-        </p:spPr>
-        <p:txBody>
-          <a:bodyPr wrap="square" lIns="73152" tIns="36576" rIns="73152" bIns="36576" rtlCol="0" anchor="ctr">
-            <a:noAutofit/>
-          </a:bodyPr>
-          <a:lstStyle/>
-          <a:p>
-            <a:pPr algn="l" indent="0" marL="0">
-              <a:buNone/>
-            </a:pPr>
-            <a:r>
-              <a:rPr lang="en-US" sz="2000" dirty="0">
-                <a:solidFill>
-                  <a:srgbClr val="1B2236"/>
-                </a:solidFill>
-                <a:latin typeface="Lexend Deca" pitchFamily="34" charset="0"/>
-                <a:ea typeface="Lexend Deca" pitchFamily="34" charset="-122"/>
-                <a:cs typeface="Lexend Deca" pitchFamily="34" charset="-120"/>
-              </a:rPr>
-              <a:t/>
-            </a:r>
-            <a:endParaRPr lang="en-US" sz="2000" dirty="0"/>
-          </a:p>
-        </p:txBody>
-      </p:sp>
-      <p:sp>
-        <p:nvSpPr>
-          <p:cNvPr id="69" name="Row num"/>
-          <p:cNvSpPr/>
-          <p:nvPr/>
-        </p:nvSpPr>
-        <p:spPr>
-          <a:xfrm>
-            <a:off x="6035040" y="1352398"/>
-            <a:ext cx="678485" cy="678485"/>
-          </a:xfrm>
-          <a:prstGeom prst="ellipse">
-            <a:avLst/>
-          </a:prstGeom>
-          <a:solidFill>
-            <a:srgbClr val="B9D2F7"/>
-          </a:solidFill>
-          <a:ln w="38100">
-            <a:noFill/>
-          </a:ln>
-        </p:spPr>
-        <p:txBody>
-          <a:bodyPr wrap="square" lIns="0" tIns="36576" rIns="0" bIns="36576" rtlCol="0" anchor="ctr">
-            <a:noAutofit/>
-          </a:bodyPr>
-          <a:lstStyle/>
-          <a:p>
-            <a:pPr algn="ctr" indent="0" marL="0">
-              <a:buNone/>
-            </a:pPr>
-            <a:r>
-              <a:rPr lang="en-US" sz="2000" dirty="0" b="1">
-                <a:solidFill>
-                  <a:srgbClr val="1B2236"/>
-                </a:solidFill>
-                <a:latin typeface="Lexend Deca" pitchFamily="34" charset="0"/>
-                <a:ea typeface="Lexend Deca" pitchFamily="34" charset="-122"/>
-                <a:cs typeface="Lexend Deca" pitchFamily="34" charset="-120"/>
-              </a:rPr>
-              <a:t>01</a:t>
-            </a:r>
-            <a:endParaRPr lang="en-US" sz="2000" dirty="0"/>
-          </a:p>
-        </p:txBody>
-      </p:sp>
-      <p:sp>
-        <p:nvSpPr>
-          <p:cNvPr id="70" name="Row question"/>
-          <p:cNvSpPr/>
-          <p:nvPr/>
-        </p:nvSpPr>
-        <p:spPr>
-          <a:xfrm>
-            <a:off x="6858000" y="1170432"/>
-            <a:ext cx="4800600" cy="457200"/>
-          </a:xfrm>
-          <a:prstGeom prst="rect">
-            <a:avLst/>
-          </a:prstGeom>
-          <a:noFill/>
-          <a:ln w="38100">
-            <a:noFill/>
-          </a:ln>
-        </p:spPr>
-        <p:txBody>
-          <a:bodyPr wrap="square" lIns="73152" tIns="36576" rIns="73152" bIns="36576" rtlCol="0" anchor="ctr">
-            <a:noAutofit/>
-          </a:bodyPr>
-          <a:lstStyle/>
-          <a:p>
-            <a:pPr algn="l" indent="0" marL="0">
-              <a:buNone/>
-            </a:pPr>
-            <a:r>
-              <a:rPr lang="en-US" sz="2200" dirty="0" b="1">
-                <a:solidFill>
-                  <a:srgbClr val="1B2236"/>
-                </a:solidFill>
-                <a:latin typeface="Lexend Deca" pitchFamily="34" charset="0"/>
-                <a:ea typeface="Lexend Deca" pitchFamily="34" charset="-122"/>
-                <a:cs typeface="Lexend Deca" pitchFamily="34" charset="-120"/>
-              </a:rPr>
-              <a:t>Marco's weekend was ...</a:t>
-            </a:r>
-            <a:endParaRPr lang="en-US" sz="2200" dirty="0"/>
-          </a:p>
-        </p:txBody>
-      </p:sp>
-      <p:sp>
-        <p:nvSpPr>
-          <p:cNvPr id="71" name="Option"/>
-          <p:cNvSpPr/>
-          <p:nvPr/>
-        </p:nvSpPr>
-        <p:spPr>
-          <a:xfrm>
-            <a:off x="6858000" y="1719072"/>
-            <a:ext cx="1097280" cy="438912"/>
-          </a:xfrm>
-          <a:prstGeom prst="roundRect">
-            <a:avLst>
-              <a:gd name="adj" fmla="val 22000"/>
-            </a:avLst>
-          </a:prstGeom>
-          <a:solidFill>
-            <a:srgbClr val="F1F5FB"/>
-          </a:solidFill>
-          <a:ln w="38100">
-            <a:noFill/>
-          </a:ln>
-        </p:spPr>
-        <p:txBody>
-          <a:bodyPr wrap="square" lIns="36576" tIns="36576" rIns="36576" bIns="36576" rtlCol="0" anchor="ctr">
-            <a:noAutofit/>
-          </a:bodyPr>
-          <a:lstStyle/>
-          <a:p>
-            <a:pPr algn="ctr" indent="0" marL="0">
-              <a:buNone/>
-            </a:pPr>
-            <a:r>
-              <a:rPr lang="en-US" sz="2000" dirty="0">
-                <a:solidFill>
-                  <a:srgbClr val="1B2236"/>
-                </a:solidFill>
-                <a:latin typeface="Lexend Deca" pitchFamily="34" charset="0"/>
-                <a:ea typeface="Lexend Deca" pitchFamily="34" charset="-122"/>
-                <a:cs typeface="Lexend Deca" pitchFamily="34" charset="-120"/>
-              </a:rPr>
-              <a:t>great</a:t>
-            </a:r>
-            <a:endParaRPr lang="en-US" sz="2000" dirty="0"/>
-          </a:p>
-        </p:txBody>
-      </p:sp>
-      <p:sp>
-        <p:nvSpPr>
-          <p:cNvPr id="72" name="Circle 1"/>
-          <p:cNvSpPr/>
-          <p:nvPr/>
-        </p:nvSpPr>
-        <p:spPr>
-          <a:xfrm>
-            <a:off x="6748272" y="1655064"/>
-            <a:ext cx="1316736" cy="566928"/>
-          </a:xfrm>
-          <a:prstGeom prst="ellipse">
-            <a:avLst/>
-          </a:prstGeom>
-          <a:noFill/>
-          <a:ln w="50800">
-            <a:solidFill>
-              <a:srgbClr val="5B3FC4"/>
-            </a:solidFill>
-          </a:ln>
-        </p:spPr>
-        <p:txBody>
-          <a:bodyPr wrap="square" lIns="73152" tIns="36576" rIns="73152" bIns="36576" rtlCol="0" anchor="ctr">
-            <a:noAutofit/>
-          </a:bodyPr>
-          <a:lstStyle/>
-          <a:p>
-            <a:pPr algn="l" indent="0" marL="0">
-              <a:buNone/>
-            </a:pPr>
-            <a:r>
-              <a:rPr lang="en-US" sz="2000" dirty="0">
-                <a:solidFill>
-                  <a:srgbClr val="1B2236"/>
-                </a:solidFill>
-                <a:latin typeface="Lexend Deca" pitchFamily="34" charset="0"/>
-                <a:ea typeface="Lexend Deca" pitchFamily="34" charset="-122"/>
-                <a:cs typeface="Lexend Deca" pitchFamily="34" charset="-120"/>
-              </a:rPr>
-              <a:t/>
-            </a:r>
-            <a:endParaRPr lang="en-US" sz="2000" dirty="0"/>
-          </a:p>
-        </p:txBody>
-      </p:sp>
-      <p:sp>
-        <p:nvSpPr>
-          <p:cNvPr id="73" name="Option"/>
-          <p:cNvSpPr/>
-          <p:nvPr/>
-        </p:nvSpPr>
-        <p:spPr>
-          <a:xfrm>
-            <a:off x="8065008" y="1719072"/>
-            <a:ext cx="1163117" cy="438912"/>
-          </a:xfrm>
-          <a:prstGeom prst="roundRect">
-            <a:avLst>
-              <a:gd name="adj" fmla="val 22000"/>
-            </a:avLst>
-          </a:prstGeom>
-          <a:solidFill>
-            <a:srgbClr val="F1F5FB"/>
-          </a:solidFill>
-          <a:ln w="38100">
-            <a:noFill/>
-          </a:ln>
-        </p:spPr>
-        <p:txBody>
-          <a:bodyPr wrap="square" lIns="36576" tIns="36576" rIns="36576" bIns="36576" rtlCol="0" anchor="ctr">
-            <a:noAutofit/>
-          </a:bodyPr>
-          <a:lstStyle/>
-          <a:p>
-            <a:pPr algn="ctr" indent="0" marL="0">
-              <a:buNone/>
-            </a:pPr>
-            <a:r>
-              <a:rPr lang="en-US" sz="2000" dirty="0">
-                <a:solidFill>
-                  <a:srgbClr val="1B2236"/>
-                </a:solidFill>
-                <a:latin typeface="Lexend Deca" pitchFamily="34" charset="0"/>
-                <a:ea typeface="Lexend Deca" pitchFamily="34" charset="-122"/>
-                <a:cs typeface="Lexend Deca" pitchFamily="34" charset="-120"/>
-              </a:rPr>
-              <a:t>boring</a:t>
-            </a:r>
-            <a:endParaRPr lang="en-US" sz="2000" dirty="0"/>
-          </a:p>
-        </p:txBody>
-      </p:sp>
-      <p:sp>
-        <p:nvSpPr>
-          <p:cNvPr id="74" name="Option"/>
-          <p:cNvSpPr/>
-          <p:nvPr/>
-        </p:nvSpPr>
-        <p:spPr>
-          <a:xfrm>
-            <a:off x="9337853" y="1719072"/>
-            <a:ext cx="1459382" cy="438912"/>
-          </a:xfrm>
-          <a:prstGeom prst="roundRect">
-            <a:avLst>
-              <a:gd name="adj" fmla="val 22000"/>
-            </a:avLst>
-          </a:prstGeom>
-          <a:solidFill>
-            <a:srgbClr val="F1F5FB"/>
-          </a:solidFill>
-          <a:ln w="38100">
-            <a:noFill/>
-          </a:ln>
-        </p:spPr>
-        <p:txBody>
-          <a:bodyPr wrap="square" lIns="36576" tIns="36576" rIns="36576" bIns="36576" rtlCol="0" anchor="ctr">
-            <a:noAutofit/>
-          </a:bodyPr>
-          <a:lstStyle/>
-          <a:p>
-            <a:pPr algn="ctr" indent="0" marL="0">
-              <a:buNone/>
-            </a:pPr>
-            <a:r>
-              <a:rPr lang="en-US" sz="2000" dirty="0">
-                <a:solidFill>
-                  <a:srgbClr val="1B2236"/>
-                </a:solidFill>
-                <a:latin typeface="Lexend Deca" pitchFamily="34" charset="0"/>
-                <a:ea typeface="Lexend Deca" pitchFamily="34" charset="-122"/>
-                <a:cs typeface="Lexend Deca" pitchFamily="34" charset="-120"/>
-              </a:rPr>
-              <a:t>terrible</a:t>
-            </a:r>
-            <a:endParaRPr lang="en-US" sz="2000" dirty="0"/>
-          </a:p>
-        </p:txBody>
-      </p:sp>
-      <p:sp>
-        <p:nvSpPr>
-          <p:cNvPr id="75" name="Row shadow"/>
-          <p:cNvSpPr/>
-          <p:nvPr/>
-        </p:nvSpPr>
-        <p:spPr>
-          <a:xfrm>
-            <a:off x="5970118" y="2452421"/>
-            <a:ext cx="5897880" cy="1188720"/>
-          </a:xfrm>
-          <a:prstGeom prst="round1Rect">
-            <a:avLst/>
-          </a:prstGeom>
-          <a:solidFill>
-            <a:srgbClr val="8FAFE3"/>
-          </a:solidFill>
-          <a:ln w="38100">
-            <a:noFill/>
-          </a:ln>
-        </p:spPr>
-        <p:txBody>
-          <a:bodyPr wrap="square" lIns="73152" tIns="36576" rIns="73152" bIns="36576" rtlCol="0" anchor="ctr">
-            <a:noAutofit/>
-          </a:bodyPr>
-          <a:lstStyle/>
-          <a:p>
-            <a:pPr algn="l" indent="0" marL="0">
-              <a:buNone/>
-            </a:pPr>
-            <a:r>
-              <a:rPr lang="en-US" sz="2000" dirty="0">
-                <a:solidFill>
-                  <a:srgbClr val="1B2236"/>
-                </a:solidFill>
-                <a:latin typeface="Lexend Deca" pitchFamily="34" charset="0"/>
-                <a:ea typeface="Lexend Deca" pitchFamily="34" charset="-122"/>
-                <a:cs typeface="Lexend Deca" pitchFamily="34" charset="-120"/>
-              </a:rPr>
-              <a:t/>
-            </a:r>
-            <a:endParaRPr lang="en-US" sz="2000" dirty="0"/>
-          </a:p>
-        </p:txBody>
-      </p:sp>
-      <p:sp>
-        <p:nvSpPr>
-          <p:cNvPr id="76" name="Row"/>
-          <p:cNvSpPr/>
-          <p:nvPr/>
-        </p:nvSpPr>
-        <p:spPr>
-          <a:xfrm>
-            <a:off x="5897880" y="2395728"/>
-            <a:ext cx="5897880" cy="1188720"/>
-          </a:xfrm>
-          <a:prstGeom prst="round1Rect">
-            <a:avLst/>
-          </a:prstGeom>
-          <a:solidFill>
-            <a:srgbClr val="B9D2F7"/>
-          </a:solidFill>
-          <a:ln w="38100">
-            <a:noFill/>
-          </a:ln>
-        </p:spPr>
-        <p:txBody>
-          <a:bodyPr wrap="square" lIns="73152" tIns="36576" rIns="73152" bIns="36576" rtlCol="0" anchor="ctr">
-            <a:noAutofit/>
-          </a:bodyPr>
-          <a:lstStyle/>
-          <a:p>
-            <a:pPr algn="l" indent="0" marL="0">
-              <a:buNone/>
-            </a:pPr>
-            <a:r>
-              <a:rPr lang="en-US" sz="2000" dirty="0">
-                <a:solidFill>
-                  <a:srgbClr val="1B2236"/>
-                </a:solidFill>
-                <a:latin typeface="Lexend Deca" pitchFamily="34" charset="0"/>
-                <a:ea typeface="Lexend Deca" pitchFamily="34" charset="-122"/>
-                <a:cs typeface="Lexend Deca" pitchFamily="34" charset="-120"/>
-              </a:rPr>
-              <a:t/>
-            </a:r>
-            <a:endParaRPr lang="en-US" sz="2000" dirty="0"/>
-          </a:p>
-        </p:txBody>
-      </p:sp>
-      <p:sp>
-        <p:nvSpPr>
-          <p:cNvPr id="77" name="Row num"/>
-          <p:cNvSpPr/>
-          <p:nvPr/>
-        </p:nvSpPr>
-        <p:spPr>
-          <a:xfrm>
-            <a:off x="6035040" y="2650846"/>
-            <a:ext cx="678485" cy="678485"/>
-          </a:xfrm>
-          <a:prstGeom prst="ellipse">
-            <a:avLst/>
-          </a:prstGeom>
-          <a:solidFill>
-            <a:srgbClr val="FFFFFF"/>
-          </a:solidFill>
-          <a:ln w="38100">
-            <a:noFill/>
-          </a:ln>
-        </p:spPr>
-        <p:txBody>
-          <a:bodyPr wrap="square" lIns="0" tIns="36576" rIns="0" bIns="36576" rtlCol="0" anchor="ctr">
-            <a:noAutofit/>
-          </a:bodyPr>
-          <a:lstStyle/>
-          <a:p>
-            <a:pPr algn="ctr" indent="0" marL="0">
-              <a:buNone/>
-            </a:pPr>
-            <a:r>
-              <a:rPr lang="en-US" sz="2000" dirty="0" b="1">
-                <a:solidFill>
-                  <a:srgbClr val="1B2236"/>
-                </a:solidFill>
-                <a:latin typeface="Lexend Deca" pitchFamily="34" charset="0"/>
-                <a:ea typeface="Lexend Deca" pitchFamily="34" charset="-122"/>
-                <a:cs typeface="Lexend Deca" pitchFamily="34" charset="-120"/>
-              </a:rPr>
-              <a:t>02</a:t>
-            </a:r>
-            <a:endParaRPr lang="en-US" sz="2000" dirty="0"/>
-          </a:p>
-        </p:txBody>
-      </p:sp>
-      <p:sp>
-        <p:nvSpPr>
-          <p:cNvPr id="78" name="Row question"/>
-          <p:cNvSpPr/>
-          <p:nvPr/>
-        </p:nvSpPr>
-        <p:spPr>
-          <a:xfrm>
-            <a:off x="6858000" y="2468880"/>
-            <a:ext cx="4800600" cy="457200"/>
-          </a:xfrm>
-          <a:prstGeom prst="rect">
-            <a:avLst/>
-          </a:prstGeom>
-          <a:noFill/>
-          <a:ln w="38100">
-            <a:noFill/>
-          </a:ln>
-        </p:spPr>
-        <p:txBody>
-          <a:bodyPr wrap="square" lIns="73152" tIns="36576" rIns="73152" bIns="36576" rtlCol="0" anchor="ctr">
-            <a:noAutofit/>
-          </a:bodyPr>
-          <a:lstStyle/>
-          <a:p>
-            <a:pPr algn="l" indent="0" marL="0">
-              <a:buNone/>
-            </a:pPr>
-            <a:r>
-              <a:rPr lang="en-US" sz="2200" dirty="0" b="1">
-                <a:solidFill>
-                  <a:srgbClr val="1B2236"/>
-                </a:solidFill>
-                <a:latin typeface="Lexend Deca" pitchFamily="34" charset="0"/>
-                <a:ea typeface="Lexend Deca" pitchFamily="34" charset="-122"/>
-                <a:cs typeface="Lexend Deca" pitchFamily="34" charset="-120"/>
-              </a:rPr>
-              <a:t>Kim's weekend was ...</a:t>
-            </a:r>
-            <a:endParaRPr lang="en-US" sz="2200" dirty="0"/>
-          </a:p>
-        </p:txBody>
-      </p:sp>
-      <p:sp>
-        <p:nvSpPr>
-          <p:cNvPr id="79" name="Option"/>
-          <p:cNvSpPr/>
-          <p:nvPr/>
-        </p:nvSpPr>
-        <p:spPr>
-          <a:xfrm>
-            <a:off x="6858000" y="3017520"/>
-            <a:ext cx="1097280" cy="438912"/>
-          </a:xfrm>
-          <a:prstGeom prst="roundRect">
-            <a:avLst>
-              <a:gd name="adj" fmla="val 22000"/>
-            </a:avLst>
-          </a:prstGeom>
-          <a:solidFill>
-            <a:srgbClr val="FFFFFF"/>
-          </a:solidFill>
-          <a:ln w="38100">
-            <a:noFill/>
-          </a:ln>
-        </p:spPr>
-        <p:txBody>
-          <a:bodyPr wrap="square" lIns="36576" tIns="36576" rIns="36576" bIns="36576" rtlCol="0" anchor="ctr">
-            <a:noAutofit/>
-          </a:bodyPr>
-          <a:lstStyle/>
-          <a:p>
-            <a:pPr algn="ctr" indent="0" marL="0">
-              <a:buNone/>
-            </a:pPr>
-            <a:r>
-              <a:rPr lang="en-US" sz="2000" dirty="0">
-                <a:solidFill>
-                  <a:srgbClr val="1B2236"/>
-                </a:solidFill>
-                <a:latin typeface="Lexend Deca" pitchFamily="34" charset="0"/>
-                <a:ea typeface="Lexend Deca" pitchFamily="34" charset="-122"/>
-                <a:cs typeface="Lexend Deca" pitchFamily="34" charset="-120"/>
-              </a:rPr>
-              <a:t>fun</a:t>
-            </a:r>
-            <a:endParaRPr lang="en-US" sz="2000" dirty="0"/>
-          </a:p>
-        </p:txBody>
-      </p:sp>
-      <p:sp>
-        <p:nvSpPr>
-          <p:cNvPr id="80" name="Option"/>
-          <p:cNvSpPr/>
-          <p:nvPr/>
-        </p:nvSpPr>
-        <p:spPr>
-          <a:xfrm>
-            <a:off x="8065008" y="3017520"/>
-            <a:ext cx="1163117" cy="438912"/>
-          </a:xfrm>
-          <a:prstGeom prst="roundRect">
-            <a:avLst>
-              <a:gd name="adj" fmla="val 22000"/>
-            </a:avLst>
-          </a:prstGeom>
-          <a:solidFill>
-            <a:srgbClr val="FFFFFF"/>
-          </a:solidFill>
-          <a:ln w="38100">
-            <a:noFill/>
-          </a:ln>
-        </p:spPr>
-        <p:txBody>
-          <a:bodyPr wrap="square" lIns="36576" tIns="36576" rIns="36576" bIns="36576" rtlCol="0" anchor="ctr">
-            <a:noAutofit/>
-          </a:bodyPr>
-          <a:lstStyle/>
-          <a:p>
-            <a:pPr algn="ctr" indent="0" marL="0">
-              <a:buNone/>
-            </a:pPr>
-            <a:r>
-              <a:rPr lang="en-US" sz="2000" dirty="0">
-                <a:solidFill>
-                  <a:srgbClr val="1B2236"/>
-                </a:solidFill>
-                <a:latin typeface="Lexend Deca" pitchFamily="34" charset="0"/>
-                <a:ea typeface="Lexend Deca" pitchFamily="34" charset="-122"/>
-                <a:cs typeface="Lexend Deca" pitchFamily="34" charset="-120"/>
-              </a:rPr>
-              <a:t>boring</a:t>
-            </a:r>
-            <a:endParaRPr lang="en-US" sz="2000" dirty="0"/>
-          </a:p>
-        </p:txBody>
-      </p:sp>
-      <p:sp>
-        <p:nvSpPr>
-          <p:cNvPr id="81" name="Circle 2"/>
-          <p:cNvSpPr/>
-          <p:nvPr/>
-        </p:nvSpPr>
-        <p:spPr>
-          <a:xfrm>
-            <a:off x="7955280" y="2953512"/>
-            <a:ext cx="1382573" cy="566928"/>
-          </a:xfrm>
-          <a:prstGeom prst="ellipse">
-            <a:avLst/>
-          </a:prstGeom>
-          <a:noFill/>
-          <a:ln w="50800">
-            <a:solidFill>
-              <a:srgbClr val="5B3FC4"/>
-            </a:solidFill>
-          </a:ln>
-        </p:spPr>
-        <p:txBody>
-          <a:bodyPr wrap="square" lIns="73152" tIns="36576" rIns="73152" bIns="36576" rtlCol="0" anchor="ctr">
-            <a:noAutofit/>
-          </a:bodyPr>
-          <a:lstStyle/>
-          <a:p>
-            <a:pPr algn="l" indent="0" marL="0">
-              <a:buNone/>
-            </a:pPr>
-            <a:r>
-              <a:rPr lang="en-US" sz="2000" dirty="0">
-                <a:solidFill>
-                  <a:srgbClr val="1B2236"/>
-                </a:solidFill>
-                <a:latin typeface="Lexend Deca" pitchFamily="34" charset="0"/>
-                <a:ea typeface="Lexend Deca" pitchFamily="34" charset="-122"/>
-                <a:cs typeface="Lexend Deca" pitchFamily="34" charset="-120"/>
-              </a:rPr>
-              <a:t/>
-            </a:r>
-            <a:endParaRPr lang="en-US" sz="2000" dirty="0"/>
-          </a:p>
-        </p:txBody>
-      </p:sp>
-      <p:sp>
-        <p:nvSpPr>
-          <p:cNvPr id="82" name="Option"/>
-          <p:cNvSpPr/>
-          <p:nvPr/>
-        </p:nvSpPr>
-        <p:spPr>
-          <a:xfrm>
-            <a:off x="9337853" y="3017520"/>
-            <a:ext cx="1097280" cy="438912"/>
-          </a:xfrm>
-          <a:prstGeom prst="roundRect">
-            <a:avLst>
-              <a:gd name="adj" fmla="val 22000"/>
-            </a:avLst>
-          </a:prstGeom>
-          <a:solidFill>
-            <a:srgbClr val="FFFFFF"/>
-          </a:solidFill>
-          <a:ln w="38100">
-            <a:noFill/>
-          </a:ln>
-        </p:spPr>
-        <p:txBody>
-          <a:bodyPr wrap="square" lIns="36576" tIns="36576" rIns="36576" bIns="36576" rtlCol="0" anchor="ctr">
-            <a:noAutofit/>
-          </a:bodyPr>
-          <a:lstStyle/>
-          <a:p>
-            <a:pPr algn="ctr" indent="0" marL="0">
-              <a:buNone/>
-            </a:pPr>
-            <a:r>
-              <a:rPr lang="en-US" sz="2000" dirty="0">
-                <a:solidFill>
-                  <a:srgbClr val="1B2236"/>
-                </a:solidFill>
-                <a:latin typeface="Lexend Deca" pitchFamily="34" charset="0"/>
-                <a:ea typeface="Lexend Deca" pitchFamily="34" charset="-122"/>
-                <a:cs typeface="Lexend Deca" pitchFamily="34" charset="-120"/>
-              </a:rPr>
-              <a:t>great</a:t>
-            </a:r>
-            <a:endParaRPr lang="en-US" sz="2000" dirty="0"/>
-          </a:p>
-        </p:txBody>
-      </p:sp>
-      <p:sp>
-        <p:nvSpPr>
-          <p:cNvPr id="83" name="Row shadow"/>
-          <p:cNvSpPr/>
-          <p:nvPr/>
-        </p:nvSpPr>
-        <p:spPr>
-          <a:xfrm>
-            <a:off x="5970118" y="3750869"/>
-            <a:ext cx="5897880" cy="1188720"/>
-          </a:xfrm>
-          <a:prstGeom prst="round1Rect">
-            <a:avLst/>
-          </a:prstGeom>
-          <a:solidFill>
-            <a:srgbClr val="8FAFE3"/>
-          </a:solidFill>
-          <a:ln w="38100">
-            <a:noFill/>
-          </a:ln>
-        </p:spPr>
-        <p:txBody>
-          <a:bodyPr wrap="square" lIns="73152" tIns="36576" rIns="73152" bIns="36576" rtlCol="0" anchor="ctr">
-            <a:noAutofit/>
-          </a:bodyPr>
-          <a:lstStyle/>
-          <a:p>
-            <a:pPr algn="l" indent="0" marL="0">
-              <a:buNone/>
-            </a:pPr>
-            <a:r>
-              <a:rPr lang="en-US" sz="2000" dirty="0">
-                <a:solidFill>
-                  <a:srgbClr val="1B2236"/>
-                </a:solidFill>
-                <a:latin typeface="Lexend Deca" pitchFamily="34" charset="0"/>
-                <a:ea typeface="Lexend Deca" pitchFamily="34" charset="-122"/>
-                <a:cs typeface="Lexend Deca" pitchFamily="34" charset="-120"/>
-              </a:rPr>
-              <a:t/>
-            </a:r>
-            <a:endParaRPr lang="en-US" sz="2000" dirty="0"/>
-          </a:p>
-        </p:txBody>
-      </p:sp>
-      <p:sp>
-        <p:nvSpPr>
-          <p:cNvPr id="84" name="Row"/>
-          <p:cNvSpPr/>
-          <p:nvPr/>
-        </p:nvSpPr>
-        <p:spPr>
-          <a:xfrm>
-            <a:off x="5897880" y="3694176"/>
-            <a:ext cx="5897880" cy="1188720"/>
-          </a:xfrm>
-          <a:prstGeom prst="round1Rect">
-            <a:avLst/>
-          </a:prstGeom>
-          <a:solidFill>
-            <a:srgbClr val="FFFFFF"/>
-          </a:solidFill>
-          <a:ln w="38100">
-            <a:noFill/>
-          </a:ln>
-        </p:spPr>
-        <p:txBody>
-          <a:bodyPr wrap="square" lIns="73152" tIns="36576" rIns="73152" bIns="36576" rtlCol="0" anchor="ctr">
-            <a:noAutofit/>
-          </a:bodyPr>
-          <a:lstStyle/>
-          <a:p>
-            <a:pPr algn="l" indent="0" marL="0">
-              <a:buNone/>
-            </a:pPr>
-            <a:r>
-              <a:rPr lang="en-US" sz="2000" dirty="0">
-                <a:solidFill>
-                  <a:srgbClr val="1B2236"/>
-                </a:solidFill>
-                <a:latin typeface="Lexend Deca" pitchFamily="34" charset="0"/>
-                <a:ea typeface="Lexend Deca" pitchFamily="34" charset="-122"/>
-                <a:cs typeface="Lexend Deca" pitchFamily="34" charset="-120"/>
-              </a:rPr>
-              <a:t/>
-            </a:r>
-            <a:endParaRPr lang="en-US" sz="2000" dirty="0"/>
-          </a:p>
-        </p:txBody>
-      </p:sp>
-      <p:sp>
-        <p:nvSpPr>
-          <p:cNvPr id="85" name="Row num"/>
-          <p:cNvSpPr/>
-          <p:nvPr/>
-        </p:nvSpPr>
-        <p:spPr>
-          <a:xfrm>
-            <a:off x="6035040" y="3949294"/>
-            <a:ext cx="678485" cy="678485"/>
-          </a:xfrm>
-          <a:prstGeom prst="ellipse">
-            <a:avLst/>
-          </a:prstGeom>
-          <a:solidFill>
-            <a:srgbClr val="B9D2F7"/>
-          </a:solidFill>
-          <a:ln w="38100">
-            <a:noFill/>
-          </a:ln>
-        </p:spPr>
-        <p:txBody>
-          <a:bodyPr wrap="square" lIns="0" tIns="36576" rIns="0" bIns="36576" rtlCol="0" anchor="ctr">
-            <a:noAutofit/>
-          </a:bodyPr>
-          <a:lstStyle/>
-          <a:p>
-            <a:pPr algn="ctr" indent="0" marL="0">
-              <a:buNone/>
-            </a:pPr>
-            <a:r>
-              <a:rPr lang="en-US" sz="2000" dirty="0" b="1">
-                <a:solidFill>
-                  <a:srgbClr val="1B2236"/>
-                </a:solidFill>
-                <a:latin typeface="Lexend Deca" pitchFamily="34" charset="0"/>
-                <a:ea typeface="Lexend Deca" pitchFamily="34" charset="-122"/>
-                <a:cs typeface="Lexend Deca" pitchFamily="34" charset="-120"/>
-              </a:rPr>
-              <a:t>03</a:t>
-            </a:r>
-            <a:endParaRPr lang="en-US" sz="2000" dirty="0"/>
-          </a:p>
-        </p:txBody>
-      </p:sp>
-      <p:sp>
-        <p:nvSpPr>
-          <p:cNvPr id="86" name="Row question"/>
-          <p:cNvSpPr/>
-          <p:nvPr/>
-        </p:nvSpPr>
-        <p:spPr>
-          <a:xfrm>
-            <a:off x="6858000" y="3767328"/>
-            <a:ext cx="4800600" cy="457200"/>
-          </a:xfrm>
-          <a:prstGeom prst="rect">
-            <a:avLst/>
-          </a:prstGeom>
-          <a:noFill/>
-          <a:ln w="38100">
-            <a:noFill/>
-          </a:ln>
-        </p:spPr>
-        <p:txBody>
-          <a:bodyPr wrap="square" lIns="73152" tIns="36576" rIns="73152" bIns="36576" rtlCol="0" anchor="ctr">
-            <a:noAutofit/>
-          </a:bodyPr>
-          <a:lstStyle/>
-          <a:p>
-            <a:pPr algn="l" indent="0" marL="0">
-              <a:buNone/>
-            </a:pPr>
-            <a:r>
-              <a:rPr lang="en-US" sz="2200" dirty="0" b="1">
-                <a:solidFill>
-                  <a:srgbClr val="1B2236"/>
-                </a:solidFill>
-                <a:latin typeface="Lexend Deca" pitchFamily="34" charset="0"/>
-                <a:ea typeface="Lexend Deca" pitchFamily="34" charset="-122"/>
-                <a:cs typeface="Lexend Deca" pitchFamily="34" charset="-120"/>
-              </a:rPr>
-              <a:t>Kim's movie was ...</a:t>
-            </a:r>
-            <a:endParaRPr lang="en-US" sz="2200" dirty="0"/>
-          </a:p>
-        </p:txBody>
-      </p:sp>
-      <p:sp>
-        <p:nvSpPr>
-          <p:cNvPr id="87" name="Option"/>
-          <p:cNvSpPr/>
-          <p:nvPr/>
-        </p:nvSpPr>
-        <p:spPr>
-          <a:xfrm>
-            <a:off x="6858000" y="4315968"/>
-            <a:ext cx="1097280" cy="438912"/>
-          </a:xfrm>
-          <a:prstGeom prst="roundRect">
-            <a:avLst>
-              <a:gd name="adj" fmla="val 22000"/>
-            </a:avLst>
-          </a:prstGeom>
-          <a:solidFill>
-            <a:srgbClr val="F1F5FB"/>
-          </a:solidFill>
-          <a:ln w="38100">
-            <a:noFill/>
-          </a:ln>
-        </p:spPr>
-        <p:txBody>
-          <a:bodyPr wrap="square" lIns="36576" tIns="36576" rIns="36576" bIns="36576" rtlCol="0" anchor="ctr">
-            <a:noAutofit/>
-          </a:bodyPr>
-          <a:lstStyle/>
-          <a:p>
-            <a:pPr algn="ctr" indent="0" marL="0">
-              <a:buNone/>
-            </a:pPr>
-            <a:r>
-              <a:rPr lang="en-US" sz="2000" dirty="0">
-                <a:solidFill>
-                  <a:srgbClr val="1B2236"/>
-                </a:solidFill>
-                <a:latin typeface="Lexend Deca" pitchFamily="34" charset="0"/>
-                <a:ea typeface="Lexend Deca" pitchFamily="34" charset="-122"/>
-                <a:cs typeface="Lexend Deca" pitchFamily="34" charset="-120"/>
-              </a:rPr>
-              <a:t>good</a:t>
-            </a:r>
-            <a:endParaRPr lang="en-US" sz="2000" dirty="0"/>
-          </a:p>
-        </p:txBody>
-      </p:sp>
-      <p:sp>
-        <p:nvSpPr>
-          <p:cNvPr id="88" name="Option"/>
-          <p:cNvSpPr/>
-          <p:nvPr/>
-        </p:nvSpPr>
-        <p:spPr>
-          <a:xfrm>
-            <a:off x="8065008" y="4315968"/>
-            <a:ext cx="1097280" cy="438912"/>
-          </a:xfrm>
-          <a:prstGeom prst="roundRect">
-            <a:avLst>
-              <a:gd name="adj" fmla="val 22000"/>
-            </a:avLst>
-          </a:prstGeom>
-          <a:solidFill>
-            <a:srgbClr val="F1F5FB"/>
-          </a:solidFill>
-          <a:ln w="38100">
-            <a:noFill/>
-          </a:ln>
-        </p:spPr>
-        <p:txBody>
-          <a:bodyPr wrap="square" lIns="36576" tIns="36576" rIns="36576" bIns="36576" rtlCol="0" anchor="ctr">
-            <a:noAutofit/>
-          </a:bodyPr>
-          <a:lstStyle/>
-          <a:p>
-            <a:pPr algn="ctr" indent="0" marL="0">
-              <a:buNone/>
-            </a:pPr>
-            <a:r>
-              <a:rPr lang="en-US" sz="2000" dirty="0">
-                <a:solidFill>
-                  <a:srgbClr val="1B2236"/>
-                </a:solidFill>
-                <a:latin typeface="Lexend Deca" pitchFamily="34" charset="0"/>
-                <a:ea typeface="Lexend Deca" pitchFamily="34" charset="-122"/>
-                <a:cs typeface="Lexend Deca" pitchFamily="34" charset="-120"/>
-              </a:rPr>
-              <a:t>funny</a:t>
-            </a:r>
-            <a:endParaRPr lang="en-US" sz="2000" dirty="0"/>
-          </a:p>
-        </p:txBody>
-      </p:sp>
-      <p:sp>
-        <p:nvSpPr>
-          <p:cNvPr id="89" name="Option"/>
-          <p:cNvSpPr/>
-          <p:nvPr/>
-        </p:nvSpPr>
-        <p:spPr>
-          <a:xfrm>
-            <a:off x="9272016" y="4315968"/>
-            <a:ext cx="1459382" cy="438912"/>
-          </a:xfrm>
-          <a:prstGeom prst="roundRect">
-            <a:avLst>
-              <a:gd name="adj" fmla="val 22000"/>
-            </a:avLst>
-          </a:prstGeom>
-          <a:solidFill>
-            <a:srgbClr val="F1F5FB"/>
-          </a:solidFill>
-          <a:ln w="38100">
-            <a:noFill/>
-          </a:ln>
-        </p:spPr>
-        <p:txBody>
-          <a:bodyPr wrap="square" lIns="36576" tIns="36576" rIns="36576" bIns="36576" rtlCol="0" anchor="ctr">
-            <a:noAutofit/>
-          </a:bodyPr>
-          <a:lstStyle/>
-          <a:p>
-            <a:pPr algn="ctr" indent="0" marL="0">
-              <a:buNone/>
-            </a:pPr>
-            <a:r>
-              <a:rPr lang="en-US" sz="2000" dirty="0">
-                <a:solidFill>
-                  <a:srgbClr val="1B2236"/>
-                </a:solidFill>
-                <a:latin typeface="Lexend Deca" pitchFamily="34" charset="0"/>
-                <a:ea typeface="Lexend Deca" pitchFamily="34" charset="-122"/>
-                <a:cs typeface="Lexend Deca" pitchFamily="34" charset="-120"/>
-              </a:rPr>
-              <a:t>terrible</a:t>
-            </a:r>
-            <a:endParaRPr lang="en-US" sz="2000" dirty="0"/>
-          </a:p>
-        </p:txBody>
-      </p:sp>
-      <p:sp>
-        <p:nvSpPr>
-          <p:cNvPr id="90" name="Circle 3"/>
-          <p:cNvSpPr/>
-          <p:nvPr/>
-        </p:nvSpPr>
-        <p:spPr>
-          <a:xfrm>
-            <a:off x="9162288" y="4251960"/>
-            <a:ext cx="1678838" cy="566928"/>
-          </a:xfrm>
-          <a:prstGeom prst="ellipse">
-            <a:avLst/>
-          </a:prstGeom>
-          <a:noFill/>
-          <a:ln w="50800">
-            <a:solidFill>
-              <a:srgbClr val="5B3FC4"/>
-            </a:solidFill>
-          </a:ln>
-        </p:spPr>
-        <p:txBody>
-          <a:bodyPr wrap="square" lIns="73152" tIns="36576" rIns="73152" bIns="36576" rtlCol="0" anchor="ctr">
-            <a:noAutofit/>
-          </a:bodyPr>
-          <a:lstStyle/>
-          <a:p>
-            <a:pPr algn="l" indent="0" marL="0">
-              <a:buNone/>
-            </a:pPr>
-            <a:r>
-              <a:rPr lang="en-US" sz="2000" dirty="0">
-                <a:solidFill>
-                  <a:srgbClr val="1B2236"/>
-                </a:solidFill>
-                <a:latin typeface="Lexend Deca" pitchFamily="34" charset="0"/>
-                <a:ea typeface="Lexend Deca" pitchFamily="34" charset="-122"/>
-                <a:cs typeface="Lexend Deca" pitchFamily="34" charset="-120"/>
-              </a:rPr>
-              <a:t/>
-            </a:r>
-            <a:endParaRPr lang="en-US" sz="2000" dirty="0"/>
-          </a:p>
-        </p:txBody>
-      </p:sp>
-      <p:sp>
-        <p:nvSpPr>
-          <p:cNvPr id="91" name="Row shadow"/>
-          <p:cNvSpPr/>
-          <p:nvPr/>
-        </p:nvSpPr>
-        <p:spPr>
-          <a:xfrm>
-            <a:off x="5970118" y="5049317"/>
-            <a:ext cx="5897880" cy="1188720"/>
-          </a:xfrm>
-          <a:prstGeom prst="round1Rect">
-            <a:avLst/>
-          </a:prstGeom>
-          <a:solidFill>
-            <a:srgbClr val="8FAFE3"/>
-          </a:solidFill>
-          <a:ln w="38100">
-            <a:noFill/>
-          </a:ln>
-        </p:spPr>
-        <p:txBody>
-          <a:bodyPr wrap="square" lIns="73152" tIns="36576" rIns="73152" bIns="36576" rtlCol="0" anchor="ctr">
-            <a:noAutofit/>
-          </a:bodyPr>
-          <a:lstStyle/>
-          <a:p>
-            <a:pPr algn="l" indent="0" marL="0">
-              <a:buNone/>
-            </a:pPr>
-            <a:r>
-              <a:rPr lang="en-US" sz="2000" dirty="0">
-                <a:solidFill>
-                  <a:srgbClr val="1B2236"/>
-                </a:solidFill>
-                <a:latin typeface="Lexend Deca" pitchFamily="34" charset="0"/>
-                <a:ea typeface="Lexend Deca" pitchFamily="34" charset="-122"/>
-                <a:cs typeface="Lexend Deca" pitchFamily="34" charset="-120"/>
-              </a:rPr>
-              <a:t/>
-            </a:r>
-            <a:endParaRPr lang="en-US" sz="2000" dirty="0"/>
-          </a:p>
-        </p:txBody>
-      </p:sp>
-      <p:sp>
-        <p:nvSpPr>
-          <p:cNvPr id="92" name="Row"/>
-          <p:cNvSpPr/>
-          <p:nvPr/>
-        </p:nvSpPr>
-        <p:spPr>
-          <a:xfrm>
-            <a:off x="5897880" y="4992624"/>
-            <a:ext cx="5897880" cy="1188720"/>
-          </a:xfrm>
-          <a:prstGeom prst="round1Rect">
-            <a:avLst/>
-          </a:prstGeom>
-          <a:solidFill>
-            <a:srgbClr val="B9D2F7"/>
-          </a:solidFill>
-          <a:ln w="38100">
-            <a:noFill/>
-          </a:ln>
-        </p:spPr>
-        <p:txBody>
-          <a:bodyPr wrap="square" lIns="73152" tIns="36576" rIns="73152" bIns="36576" rtlCol="0" anchor="ctr">
-            <a:noAutofit/>
-          </a:bodyPr>
-          <a:lstStyle/>
-          <a:p>
-            <a:pPr algn="l" indent="0" marL="0">
-              <a:buNone/>
-            </a:pPr>
-            <a:r>
-              <a:rPr lang="en-US" sz="2000" dirty="0">
-                <a:solidFill>
-                  <a:srgbClr val="1B2236"/>
-                </a:solidFill>
-                <a:latin typeface="Lexend Deca" pitchFamily="34" charset="0"/>
-                <a:ea typeface="Lexend Deca" pitchFamily="34" charset="-122"/>
-                <a:cs typeface="Lexend Deca" pitchFamily="34" charset="-120"/>
-              </a:rPr>
-              <a:t/>
-            </a:r>
-            <a:endParaRPr lang="en-US" sz="2000" dirty="0"/>
-          </a:p>
-        </p:txBody>
-      </p:sp>
-      <p:sp>
-        <p:nvSpPr>
-          <p:cNvPr id="93" name="Row num"/>
-          <p:cNvSpPr/>
-          <p:nvPr/>
-        </p:nvSpPr>
-        <p:spPr>
-          <a:xfrm>
-            <a:off x="6035040" y="5247742"/>
-            <a:ext cx="678485" cy="678485"/>
-          </a:xfrm>
-          <a:prstGeom prst="ellipse">
-            <a:avLst/>
-          </a:prstGeom>
-          <a:solidFill>
-            <a:srgbClr val="FFFFFF"/>
-          </a:solidFill>
-          <a:ln w="38100">
-            <a:noFill/>
-          </a:ln>
-        </p:spPr>
-        <p:txBody>
-          <a:bodyPr wrap="square" lIns="0" tIns="36576" rIns="0" bIns="36576" rtlCol="0" anchor="ctr">
-            <a:noAutofit/>
-          </a:bodyPr>
-          <a:lstStyle/>
-          <a:p>
-            <a:pPr algn="ctr" indent="0" marL="0">
-              <a:buNone/>
-            </a:pPr>
-            <a:r>
-              <a:rPr lang="en-US" sz="2000" dirty="0" b="1">
-                <a:solidFill>
-                  <a:srgbClr val="1B2236"/>
-                </a:solidFill>
-                <a:latin typeface="Lexend Deca" pitchFamily="34" charset="0"/>
-                <a:ea typeface="Lexend Deca" pitchFamily="34" charset="-122"/>
-                <a:cs typeface="Lexend Deca" pitchFamily="34" charset="-120"/>
-              </a:rPr>
-              <a:t>04</a:t>
-            </a:r>
-            <a:endParaRPr lang="en-US" sz="2000" dirty="0"/>
-          </a:p>
-        </p:txBody>
-      </p:sp>
-      <p:sp>
-        <p:nvSpPr>
-          <p:cNvPr id="94" name="Row question"/>
-          <p:cNvSpPr/>
-          <p:nvPr/>
-        </p:nvSpPr>
-        <p:spPr>
-          <a:xfrm>
-            <a:off x="6858000" y="5065776"/>
-            <a:ext cx="4800600" cy="457200"/>
-          </a:xfrm>
-          <a:prstGeom prst="rect">
-            <a:avLst/>
-          </a:prstGeom>
-          <a:noFill/>
-          <a:ln w="38100">
-            <a:noFill/>
-          </a:ln>
-        </p:spPr>
-        <p:txBody>
-          <a:bodyPr wrap="square" lIns="73152" tIns="36576" rIns="73152" bIns="36576" rtlCol="0" anchor="ctr">
-            <a:noAutofit/>
-          </a:bodyPr>
-          <a:lstStyle/>
-          <a:p>
-            <a:pPr algn="l" indent="0" marL="0">
-              <a:buNone/>
-            </a:pPr>
-            <a:r>
-              <a:rPr lang="en-US" sz="2200" dirty="0" b="1">
-                <a:solidFill>
-                  <a:srgbClr val="1B2236"/>
-                </a:solidFill>
-                <a:latin typeface="Lexend Deca" pitchFamily="34" charset="0"/>
-                <a:ea typeface="Lexend Deca" pitchFamily="34" charset="-122"/>
-                <a:cs typeface="Lexend Deca" pitchFamily="34" charset="-120"/>
-              </a:rPr>
-              <a:t>She stopped it after ...</a:t>
-            </a:r>
-            <a:endParaRPr lang="en-US" sz="2200" dirty="0"/>
-          </a:p>
-        </p:txBody>
-      </p:sp>
-      <p:sp>
-        <p:nvSpPr>
-          <p:cNvPr id="95" name="Option"/>
-          <p:cNvSpPr/>
-          <p:nvPr/>
-        </p:nvSpPr>
-        <p:spPr>
-          <a:xfrm>
-            <a:off x="6858000" y="5614416"/>
-            <a:ext cx="1097280" cy="438912"/>
-          </a:xfrm>
-          <a:prstGeom prst="roundRect">
-            <a:avLst>
-              <a:gd name="adj" fmla="val 22000"/>
-            </a:avLst>
-          </a:prstGeom>
-          <a:solidFill>
-            <a:srgbClr val="FFFFFF"/>
-          </a:solidFill>
-          <a:ln w="38100">
-            <a:noFill/>
-          </a:ln>
-        </p:spPr>
-        <p:txBody>
-          <a:bodyPr wrap="square" lIns="36576" tIns="36576" rIns="36576" bIns="36576" rtlCol="0" anchor="ctr">
-            <a:noAutofit/>
-          </a:bodyPr>
-          <a:lstStyle/>
-          <a:p>
-            <a:pPr algn="ctr" indent="0" marL="0">
-              <a:buNone/>
-            </a:pPr>
-            <a:r>
-              <a:rPr lang="en-US" sz="2000" dirty="0">
-                <a:solidFill>
-                  <a:srgbClr val="1B2236"/>
-                </a:solidFill>
-                <a:latin typeface="Lexend Deca" pitchFamily="34" charset="0"/>
-                <a:ea typeface="Lexend Deca" pitchFamily="34" charset="-122"/>
-                <a:cs typeface="Lexend Deca" pitchFamily="34" charset="-120"/>
-              </a:rPr>
-              <a:t>10</a:t>
-            </a:r>
-            <a:endParaRPr lang="en-US" sz="2000" dirty="0"/>
-          </a:p>
-        </p:txBody>
-      </p:sp>
-      <p:sp>
-        <p:nvSpPr>
-          <p:cNvPr id="96" name="Option"/>
-          <p:cNvSpPr/>
-          <p:nvPr/>
-        </p:nvSpPr>
-        <p:spPr>
-          <a:xfrm>
-            <a:off x="8065008" y="5614416"/>
-            <a:ext cx="1097280" cy="438912"/>
-          </a:xfrm>
-          <a:prstGeom prst="roundRect">
-            <a:avLst>
-              <a:gd name="adj" fmla="val 22000"/>
-            </a:avLst>
-          </a:prstGeom>
-          <a:solidFill>
-            <a:srgbClr val="FFFFFF"/>
-          </a:solidFill>
-          <a:ln w="38100">
-            <a:noFill/>
-          </a:ln>
-        </p:spPr>
-        <p:txBody>
-          <a:bodyPr wrap="square" lIns="36576" tIns="36576" rIns="36576" bIns="36576" rtlCol="0" anchor="ctr">
-            <a:noAutofit/>
-          </a:bodyPr>
-          <a:lstStyle/>
-          <a:p>
-            <a:pPr algn="ctr" indent="0" marL="0">
-              <a:buNone/>
-            </a:pPr>
-            <a:r>
-              <a:rPr lang="en-US" sz="2000" dirty="0">
-                <a:solidFill>
-                  <a:srgbClr val="1B2236"/>
-                </a:solidFill>
-                <a:latin typeface="Lexend Deca" pitchFamily="34" charset="0"/>
-                <a:ea typeface="Lexend Deca" pitchFamily="34" charset="-122"/>
-                <a:cs typeface="Lexend Deca" pitchFamily="34" charset="-120"/>
-              </a:rPr>
-              <a:t>20</a:t>
-            </a:r>
-            <a:endParaRPr lang="en-US" sz="2000" dirty="0"/>
-          </a:p>
-        </p:txBody>
-      </p:sp>
-      <p:sp>
-        <p:nvSpPr>
-          <p:cNvPr id="97" name="Circle 4"/>
-          <p:cNvSpPr/>
-          <p:nvPr/>
-        </p:nvSpPr>
-        <p:spPr>
-          <a:xfrm>
-            <a:off x="7955280" y="5550408"/>
-            <a:ext cx="1316736" cy="566928"/>
-          </a:xfrm>
-          <a:prstGeom prst="ellipse">
-            <a:avLst/>
-          </a:prstGeom>
-          <a:noFill/>
-          <a:ln w="50800">
-            <a:solidFill>
-              <a:srgbClr val="5B3FC4"/>
-            </a:solidFill>
-          </a:ln>
-        </p:spPr>
-        <p:txBody>
-          <a:bodyPr wrap="square" lIns="73152" tIns="36576" rIns="73152" bIns="36576" rtlCol="0" anchor="ctr">
-            <a:noAutofit/>
-          </a:bodyPr>
-          <a:lstStyle/>
-          <a:p>
-            <a:pPr algn="l" indent="0" marL="0">
-              <a:buNone/>
-            </a:pPr>
-            <a:r>
-              <a:rPr lang="en-US" sz="2000" dirty="0">
-                <a:solidFill>
-                  <a:srgbClr val="1B2236"/>
-                </a:solidFill>
-                <a:latin typeface="Lexend Deca" pitchFamily="34" charset="0"/>
-                <a:ea typeface="Lexend Deca" pitchFamily="34" charset="-122"/>
-                <a:cs typeface="Lexend Deca" pitchFamily="34" charset="-120"/>
-              </a:rPr>
-              <a:t/>
-            </a:r>
-            <a:endParaRPr lang="en-US" sz="2000" dirty="0"/>
-          </a:p>
-        </p:txBody>
-      </p:sp>
-      <p:sp>
-        <p:nvSpPr>
-          <p:cNvPr id="98" name="Option"/>
-          <p:cNvSpPr/>
-          <p:nvPr/>
-        </p:nvSpPr>
-        <p:spPr>
-          <a:xfrm>
-            <a:off x="9272016" y="5614416"/>
-            <a:ext cx="1755648" cy="438912"/>
-          </a:xfrm>
-          <a:prstGeom prst="roundRect">
-            <a:avLst>
-              <a:gd name="adj" fmla="val 22000"/>
-            </a:avLst>
-          </a:prstGeom>
-          <a:solidFill>
-            <a:srgbClr val="FFFFFF"/>
-          </a:solidFill>
-          <a:ln w="38100">
-            <a:noFill/>
-          </a:ln>
-        </p:spPr>
-        <p:txBody>
-          <a:bodyPr wrap="square" lIns="36576" tIns="36576" rIns="36576" bIns="36576" rtlCol="0" anchor="ctr">
-            <a:noAutofit/>
-          </a:bodyPr>
-          <a:lstStyle/>
-          <a:p>
-            <a:pPr algn="ctr" indent="0" marL="0">
-              <a:buNone/>
-            </a:pPr>
-            <a:r>
-              <a:rPr lang="en-US" sz="2000" dirty="0">
-                <a:solidFill>
-                  <a:srgbClr val="1B2236"/>
-                </a:solidFill>
-                <a:latin typeface="Lexend Deca" pitchFamily="34" charset="0"/>
-                <a:ea typeface="Lexend Deca" pitchFamily="34" charset="-122"/>
-                <a:cs typeface="Lexend Deca" pitchFamily="34" charset="-120"/>
-              </a:rPr>
-              <a:t>30 minutes</a:t>
-            </a:r>
-            <a:endParaRPr lang="en-US" sz="2000" dirty="0"/>
-          </a:p>
-        </p:txBody>
-      </p:sp>
-    </p:spTree>
-  </p:cSld>
-  <p:clrMapOvr>
-    <a:masterClrMapping/>
-  </p:clrMapOvr>
-  <p:timing>
-    <p:tnLst>
-      <p:par>
-        <p:cTn id="1" dur="indefinite" restart="never" nodeType="tmRoot">
-          <p:childTnLst>
-            <p:seq concurrent="1" nextAc="seek">
-              <p:cTn id="2" dur="indefinite" nodeType="mainSeq">
-                <p:childTnLst>
-                  <p:par>
-                    <p:cTn id="3" fill="hold">
-                      <p:stCondLst>
-                        <p:cond delay="indefinite"/>
-                      </p:stCondLst>
-                      <p:childTnLst>
-                        <p:par>
-                          <p:cTn id="4" fill="hold">
-                            <p:stCondLst>
-                              <p:cond delay="0"/>
-                            </p:stCondLst>
-                            <p:childTnLst>
-                              <p:par>
-                                <p:cTn id="5" presetID="10" presetClass="entr" presetSubtype="0" fill="hold" nodeType="clickEffect">
-                                  <p:stCondLst>
-                                    <p:cond delay="0"/>
-                                  </p:stCondLst>
-                                  <p:childTnLst>
-                                    <p:set>
-                                      <p:cBhvr>
-                                        <p:cTn id="6" dur="1" fill="hold">
-                                          <p:stCondLst>
-                                            <p:cond delay="0"/>
-                                          </p:stCondLst>
-                                        </p:cTn>
-                                        <p:tgtEl>
-                                          <p:spTgt spid="72"/>
-                                        </p:tgtEl>
-                                        <p:attrNameLst>
-                                          <p:attrName>style.visibility</p:attrName>
-                                        </p:attrNameLst>
-                                      </p:cBhvr>
-                                      <p:to>
-                                        <p:strVal val="visible"/>
-                                      </p:to>
-                                    </p:set>
-                                    <p:animEffect transition="in" filter="fade">
-                                      <p:cBhvr>
-                                        <p:cTn id="7" dur="400"/>
-                                        <p:tgtEl>
-                                          <p:spTgt spid="72"/>
-                                        </p:tgtEl>
-                                      </p:cBhvr>
-                                    </p:animEffect>
-                                  </p:childTnLst>
-                                </p:cTn>
-                              </p:par>
-                            </p:childTnLst>
-                          </p:cTn>
-                        </p:par>
-                      </p:childTnLst>
-                    </p:cTn>
-                  </p:par>
-                  <p:par>
-                    <p:cTn id="8" fill="hold">
-                      <p:stCondLst>
-                        <p:cond delay="indefinite"/>
-                      </p:stCondLst>
-                      <p:childTnLst>
-                        <p:par>
-                          <p:cTn id="9" fill="hold">
-                            <p:stCondLst>
-                              <p:cond delay="0"/>
-                            </p:stCondLst>
-                            <p:childTnLst>
-                              <p:par>
-                                <p:cTn id="10" presetID="10" presetClass="entr" presetSubtype="0" fill="hold" nodeType="clickEffect">
-                                  <p:stCondLst>
-                                    <p:cond delay="0"/>
-                                  </p:stCondLst>
-                                  <p:childTnLst>
-                                    <p:set>
-                                      <p:cBhvr>
-                                        <p:cTn id="11" dur="1" fill="hold">
-                                          <p:stCondLst>
-                                            <p:cond delay="0"/>
-                                          </p:stCondLst>
-                                        </p:cTn>
-                                        <p:tgtEl>
-                                          <p:spTgt spid="81"/>
-                                        </p:tgtEl>
-                                        <p:attrNameLst>
-                                          <p:attrName>style.visibility</p:attrName>
-                                        </p:attrNameLst>
-                                      </p:cBhvr>
-                                      <p:to>
-                                        <p:strVal val="visible"/>
-                                      </p:to>
-                                    </p:set>
-                                    <p:animEffect transition="in" filter="fade">
-                                      <p:cBhvr>
-                                        <p:cTn id="12" dur="400"/>
-                                        <p:tgtEl>
-                                          <p:spTgt spid="81"/>
-                                        </p:tgtEl>
-                                      </p:cBhvr>
-                                    </p:animEffect>
-                                  </p:childTnLst>
-                                </p:cTn>
-                              </p:par>
-                            </p:childTnLst>
-                          </p:cTn>
-                        </p:par>
-                      </p:childTnLst>
-                    </p:cTn>
-                  </p:par>
-                  <p:par>
-                    <p:cTn id="13" fill="hold">
-                      <p:stCondLst>
-                        <p:cond delay="indefinite"/>
-                      </p:stCondLst>
-                      <p:childTnLst>
-                        <p:par>
-                          <p:cTn id="14" fill="hold">
-                            <p:stCondLst>
-                              <p:cond delay="0"/>
-                            </p:stCondLst>
-                            <p:childTnLst>
-                              <p:par>
-                                <p:cTn id="15" presetID="10" presetClass="entr" presetSubtype="0" fill="hold" nodeType="clickEffect">
-                                  <p:stCondLst>
-                                    <p:cond delay="0"/>
-                                  </p:stCondLst>
-                                  <p:childTnLst>
-                                    <p:set>
-                                      <p:cBhvr>
-                                        <p:cTn id="16" dur="1" fill="hold">
-                                          <p:stCondLst>
-                                            <p:cond delay="0"/>
-                                          </p:stCondLst>
-                                        </p:cTn>
-                                        <p:tgtEl>
-                                          <p:spTgt spid="90"/>
-                                        </p:tgtEl>
-                                        <p:attrNameLst>
-                                          <p:attrName>style.visibility</p:attrName>
-                                        </p:attrNameLst>
-                                      </p:cBhvr>
-                                      <p:to>
-                                        <p:strVal val="visible"/>
-                                      </p:to>
-                                    </p:set>
-                                    <p:animEffect transition="in" filter="fade">
-                                      <p:cBhvr>
-                                        <p:cTn id="17" dur="400"/>
-                                        <p:tgtEl>
-                                          <p:spTgt spid="90"/>
-                                        </p:tgtEl>
-                                      </p:cBhvr>
-                                    </p:animEffect>
-                                  </p:childTnLst>
-                                </p:cTn>
-                              </p:par>
-                            </p:childTnLst>
-                          </p:cTn>
-                        </p:par>
-                      </p:childTnLst>
-                    </p:cTn>
-                  </p:par>
-                  <p:par>
-                    <p:cTn id="18" fill="hold">
-                      <p:stCondLst>
-                        <p:cond delay="indefinite"/>
-                      </p:stCondLst>
-                      <p:childTnLst>
-                        <p:par>
-                          <p:cTn id="19" fill="hold">
-                            <p:stCondLst>
-                              <p:cond delay="0"/>
-                            </p:stCondLst>
-                            <p:childTnLst>
-                              <p:par>
-                                <p:cTn id="20" presetID="10" presetClass="entr" presetSubtype="0" fill="hold" nodeType="clickEffect">
-                                  <p:stCondLst>
-                                    <p:cond delay="0"/>
-                                  </p:stCondLst>
-                                  <p:childTnLst>
-                                    <p:set>
-                                      <p:cBhvr>
-                                        <p:cTn id="21" dur="1" fill="hold">
-                                          <p:stCondLst>
-                                            <p:cond delay="0"/>
-                                          </p:stCondLst>
-                                        </p:cTn>
-                                        <p:tgtEl>
-                                          <p:spTgt spid="97"/>
-                                        </p:tgtEl>
-                                        <p:attrNameLst>
-                                          <p:attrName>style.visibility</p:attrName>
-                                        </p:attrNameLst>
-                                      </p:cBhvr>
-                                      <p:to>
-                                        <p:strVal val="visible"/>
-                                      </p:to>
-                                    </p:set>
-                                    <p:animEffect transition="in" filter="fade">
-                                      <p:cBhvr>
-                                        <p:cTn id="22" dur="400"/>
-                                        <p:tgtEl>
-                                          <p:spTgt spid="97"/>
-                                        </p:tgtEl>
-                                      </p:cBhvr>
-                                    </p:animEffect>
-                                  </p:childTnLst>
-                                </p:cTn>
-                              </p:par>
-                            </p:childTnLst>
-                          </p:cTn>
-                        </p:par>
-                      </p:childTnLst>
-                    </p:cTn>
-                  </p:par>
-                </p:childTnLst>
-              </p:cTn>
-              <p:prevCondLst>
-                <p:cond evt="onPrev" delay="0">
-                  <p:tgtEl>
-                    <p:sldTgt/>
-                  </p:tgtEl>
-                </p:cond>
-              </p:prevCondLst>
-              <p:nextCondLst>
-                <p:cond evt="onNext" delay="0">
-                  <p:tgtEl>
-                    <p:sldTgt/>
-                  </p:tgtEl>
-                </p:cond>
-              </p:nextCondLst>
-            </p:seq>
-          </p:childTnLst>
-        </p:cTn>
-      </p:par>
-    </p:tnLst>
-  </p:timing>
-</p:sld>
-</file>
-
-<file path=ppt/slides/slide7.xml><?xml version="1.0" encoding="utf-8"?>
-<p:sld xmlns:a="http://schemas.openxmlformats.org/drawingml/2006/main" xmlns:r="http://schemas.openxmlformats.org/officeDocument/2006/relationships" xmlns:p="http://schemas.openxmlformats.org/presentationml/2006/main">
   <p:cSld name="Slide 17">
     <p:bg>
       <p:bgPr>
@@ -20278,6 +18479,1966 @@
 </p:sld>
 </file>
 
+<file path=ppt/slides/slide7.xml><?xml version="1.0" encoding="utf-8"?>
+<p:sld xmlns:a="http://schemas.openxmlformats.org/drawingml/2006/main" xmlns:r="http://schemas.openxmlformats.org/officeDocument/2006/relationships" xmlns:p="http://schemas.openxmlformats.org/presentationml/2006/main">
+  <p:cSld name="Slide 13">
+    <p:bg>
+      <p:bgPr>
+        <a:solidFill>
+          <a:srgbClr val="F1F5FB"/>
+        </a:solidFill>
+      </p:bgPr>
+    </p:bg>
+    <p:spTree>
+      <p:nvGrpSpPr>
+        <p:cNvPr id="1" name=""/>
+        <p:cNvGrpSpPr/>
+        <p:nvPr/>
+      </p:nvGrpSpPr>
+      <p:grpSpPr>
+        <a:xfrm>
+          <a:off x="0" y="0"/>
+          <a:ext cx="0" cy="0"/>
+          <a:chOff x="0" y="0"/>
+          <a:chExt cx="0" cy="0"/>
+        </a:xfrm>
+      </p:grpSpPr>
+      <p:sp>
+        <p:nvSpPr>
+          <p:cNvPr id="4" name="Shape 2"/>
+          <p:cNvSpPr/>
+          <p:nvPr/>
+        </p:nvSpPr>
+        <p:spPr>
+          <a:xfrm>
+            <a:off x="560984" y="1342842"/>
+            <a:ext cx="4912157" cy="1595628"/>
+          </a:xfrm>
+          <a:prstGeom prst="roundRect">
+            <a:avLst>
+              <a:gd name="adj" fmla="val 16667"/>
+            </a:avLst>
+          </a:prstGeom>
+          <a:solidFill>
+            <a:srgbClr val="8FAFE3"/>
+          </a:solidFill>
+          <a:ln/>
+        </p:spPr>
+        <p:txBody>
+          <a:bodyPr/>
+          <a:p/>
+        </p:txBody>
+      </p:sp>
+      <p:sp>
+        <p:nvSpPr>
+          <p:cNvPr id="5" name="Shape 3"/>
+          <p:cNvSpPr/>
+          <p:nvPr/>
+        </p:nvSpPr>
+        <p:spPr>
+          <a:xfrm>
+            <a:off x="589788" y="1277417"/>
+            <a:ext cx="4912157" cy="1595628"/>
+          </a:xfrm>
+          <a:prstGeom prst="roundRect">
+            <a:avLst>
+              <a:gd name="adj" fmla="val 16667"/>
+            </a:avLst>
+          </a:prstGeom>
+          <a:solidFill>
+            <a:srgbClr val="FFFFFF"/>
+          </a:solidFill>
+          <a:ln/>
+        </p:spPr>
+        <p:txBody>
+          <a:bodyPr/>
+          <a:p/>
+        </p:txBody>
+      </p:sp>
+      <p:sp>
+        <p:nvSpPr>
+          <p:cNvPr id="6" name="Text 4"/>
+          <p:cNvSpPr/>
+          <p:nvPr/>
+        </p:nvSpPr>
+        <p:spPr>
+          <a:xfrm>
+            <a:off x="771754" y="1417320"/>
+            <a:ext cx="4572000" cy="731520"/>
+          </a:xfrm>
+          <a:prstGeom prst="rect">
+            <a:avLst/>
+          </a:prstGeom>
+          <a:noFill/>
+          <a:ln/>
+        </p:spPr>
+        <p:txBody>
+          <a:bodyPr wrap="square" rtlCol="0" anchor="ctr"/>
+          <a:lstStyle/>
+          <a:p>
+            <a:pPr algn="l" indent="0" marL="0">
+              <a:buNone/>
+            </a:pPr>
+            <a:r>
+              <a:rPr lang="en-US" sz="4000" dirty="0" b="1">
+                <a:solidFill>
+                  <a:srgbClr val="1B2236"/>
+                </a:solidFill>
+                <a:latin typeface="Lexend Deca" pitchFamily="34" charset="0"/>
+                <a:ea typeface="Lexend Deca" pitchFamily="34" charset="-122"/>
+                <a:cs typeface="Lexend Deca" pitchFamily="34" charset="-120"/>
+              </a:rPr>
+              <a:t>Listening B</a:t>
+            </a:r>
+            <a:endParaRPr lang="en-US" sz="4000" dirty="0"/>
+          </a:p>
+        </p:txBody>
+      </p:sp>
+      <p:sp>
+        <p:nvSpPr>
+          <p:cNvPr id="22" name="Shape 20"/>
+          <p:cNvSpPr/>
+          <p:nvPr/>
+        </p:nvSpPr>
+        <p:spPr>
+          <a:xfrm>
+            <a:off x="4702759" y="5703113"/>
+            <a:ext cx="727862" cy="687570"/>
+          </a:xfrm>
+          <a:prstGeom prst="star10">
+            <a:avLst/>
+          </a:prstGeom>
+          <a:solidFill>
+            <a:srgbClr val="8FAFE3"/>
+          </a:solidFill>
+          <a:ln/>
+        </p:spPr>
+        <p:txBody>
+          <a:bodyPr/>
+          <a:p/>
+        </p:txBody>
+      </p:sp>
+      <p:sp>
+        <p:nvSpPr>
+          <p:cNvPr id="23" name="Shape 21"/>
+          <p:cNvSpPr/>
+          <p:nvPr/>
+        </p:nvSpPr>
+        <p:spPr>
+          <a:xfrm>
+            <a:off x="4761248" y="5694015"/>
+            <a:ext cx="740860" cy="740860"/>
+          </a:xfrm>
+          <a:prstGeom prst="star10">
+            <a:avLst/>
+          </a:prstGeom>
+          <a:solidFill>
+            <a:srgbClr val="FFE28C"/>
+          </a:solidFill>
+          <a:ln/>
+        </p:spPr>
+        <p:txBody>
+          <a:bodyPr/>
+          <a:p/>
+        </p:txBody>
+      </p:sp>
+      <p:sp>
+        <p:nvSpPr>
+          <p:cNvPr id="24" name="Shape 22"/>
+          <p:cNvSpPr/>
+          <p:nvPr/>
+        </p:nvSpPr>
+        <p:spPr>
+          <a:xfrm rot="900000">
+            <a:off x="4962710" y="5906524"/>
+            <a:ext cx="316490" cy="316490"/>
+          </a:xfrm>
+          <a:prstGeom prst="mathPlus">
+            <a:avLst/>
+          </a:prstGeom>
+          <a:solidFill>
+            <a:srgbClr val="1B2236"/>
+          </a:solidFill>
+          <a:ln/>
+        </p:spPr>
+        <p:txBody>
+          <a:bodyPr/>
+          <a:p/>
+        </p:txBody>
+      </p:sp>
+      <p:sp>
+        <p:nvSpPr>
+          <p:cNvPr id="65" name="Subtitle"/>
+          <p:cNvSpPr/>
+          <p:nvPr/>
+        </p:nvSpPr>
+        <p:spPr>
+          <a:xfrm>
+            <a:off x="771754" y="2148840"/>
+            <a:ext cx="4572000" cy="548640"/>
+          </a:xfrm>
+          <a:prstGeom prst="rect">
+            <a:avLst/>
+          </a:prstGeom>
+          <a:noFill/>
+          <a:ln w="38100">
+            <a:noFill/>
+          </a:ln>
+        </p:spPr>
+        <p:txBody>
+          <a:bodyPr wrap="square" lIns="91440" tIns="36576" rIns="91440" bIns="36576" rtlCol="0" anchor="ctr">
+            <a:noAutofit/>
+          </a:bodyPr>
+          <a:lstStyle/>
+          <a:p>
+            <a:pPr algn="l" indent="0" marL="0">
+              <a:buNone/>
+            </a:pPr>
+            <a:r>
+              <a:rPr lang="en-US" sz="2000" dirty="0">
+                <a:solidFill>
+                  <a:srgbClr val="1B2236"/>
+                </a:solidFill>
+                <a:latin typeface="Lexend Deca" pitchFamily="34" charset="0"/>
+                <a:ea typeface="Lexend Deca" pitchFamily="34" charset="-122"/>
+                <a:cs typeface="Lexend Deca" pitchFamily="34" charset="-120"/>
+              </a:rPr>
+              <a:t>Listen again. Circle.</a:t>
+            </a:r>
+            <a:endParaRPr lang="en-US" sz="2000" dirty="0"/>
+          </a:p>
+        </p:txBody>
+      </p:sp>
+      <p:pic>
+        <p:nvPicPr>
+          <p:cNvPr id="66" name="Picture 66" descr="L5_watched_a_movie.png"/>
+          <p:cNvPicPr>
+            <a:picLocks noChangeAspect="1"/>
+          </p:cNvPicPr>
+          <p:nvPr/>
+        </p:nvPicPr>
+        <p:blipFill>
+          <a:blip r:embed="rIdQ1"/>
+          <a:stretch>
+            <a:fillRect/>
+          </a:stretch>
+        </p:blipFill>
+        <p:spPr>
+          <a:xfrm>
+            <a:off x="1274674" y="3680460"/>
+            <a:ext cx="3450031" cy="2415022"/>
+          </a:xfrm>
+          <a:prstGeom prst="rect">
+            <a:avLst/>
+          </a:prstGeom>
+        </p:spPr>
+      </p:pic>
+      <p:sp>
+        <p:nvSpPr>
+          <p:cNvPr id="67" name="Row shadow"/>
+          <p:cNvSpPr/>
+          <p:nvPr/>
+        </p:nvSpPr>
+        <p:spPr>
+          <a:xfrm>
+            <a:off x="5970118" y="1153973"/>
+            <a:ext cx="5897880" cy="1188720"/>
+          </a:xfrm>
+          <a:prstGeom prst="round1Rect">
+            <a:avLst/>
+          </a:prstGeom>
+          <a:solidFill>
+            <a:srgbClr val="8FAFE3"/>
+          </a:solidFill>
+          <a:ln w="38100">
+            <a:noFill/>
+          </a:ln>
+        </p:spPr>
+        <p:txBody>
+          <a:bodyPr wrap="square" lIns="73152" tIns="36576" rIns="73152" bIns="36576" rtlCol="0" anchor="ctr">
+            <a:noAutofit/>
+          </a:bodyPr>
+          <a:lstStyle/>
+          <a:p>
+            <a:pPr algn="l" indent="0" marL="0">
+              <a:buNone/>
+            </a:pPr>
+            <a:r>
+              <a:rPr lang="en-US" sz="2000" dirty="0">
+                <a:solidFill>
+                  <a:srgbClr val="1B2236"/>
+                </a:solidFill>
+                <a:latin typeface="Lexend Deca" pitchFamily="34" charset="0"/>
+                <a:ea typeface="Lexend Deca" pitchFamily="34" charset="-122"/>
+                <a:cs typeface="Lexend Deca" pitchFamily="34" charset="-120"/>
+              </a:rPr>
+              <a:t/>
+            </a:r>
+            <a:endParaRPr lang="en-US" sz="2000" dirty="0"/>
+          </a:p>
+        </p:txBody>
+      </p:sp>
+      <p:sp>
+        <p:nvSpPr>
+          <p:cNvPr id="68" name="Row"/>
+          <p:cNvSpPr/>
+          <p:nvPr/>
+        </p:nvSpPr>
+        <p:spPr>
+          <a:xfrm>
+            <a:off x="5897880" y="1097280"/>
+            <a:ext cx="5897880" cy="1188720"/>
+          </a:xfrm>
+          <a:prstGeom prst="round1Rect">
+            <a:avLst/>
+          </a:prstGeom>
+          <a:solidFill>
+            <a:srgbClr val="FFFFFF"/>
+          </a:solidFill>
+          <a:ln w="38100">
+            <a:noFill/>
+          </a:ln>
+        </p:spPr>
+        <p:txBody>
+          <a:bodyPr wrap="square" lIns="73152" tIns="36576" rIns="73152" bIns="36576" rtlCol="0" anchor="ctr">
+            <a:noAutofit/>
+          </a:bodyPr>
+          <a:lstStyle/>
+          <a:p>
+            <a:pPr algn="l" indent="0" marL="0">
+              <a:buNone/>
+            </a:pPr>
+            <a:r>
+              <a:rPr lang="en-US" sz="2000" dirty="0">
+                <a:solidFill>
+                  <a:srgbClr val="1B2236"/>
+                </a:solidFill>
+                <a:latin typeface="Lexend Deca" pitchFamily="34" charset="0"/>
+                <a:ea typeface="Lexend Deca" pitchFamily="34" charset="-122"/>
+                <a:cs typeface="Lexend Deca" pitchFamily="34" charset="-120"/>
+              </a:rPr>
+              <a:t/>
+            </a:r>
+            <a:endParaRPr lang="en-US" sz="2000" dirty="0"/>
+          </a:p>
+        </p:txBody>
+      </p:sp>
+      <p:sp>
+        <p:nvSpPr>
+          <p:cNvPr id="69" name="Row num"/>
+          <p:cNvSpPr/>
+          <p:nvPr/>
+        </p:nvSpPr>
+        <p:spPr>
+          <a:xfrm>
+            <a:off x="6035040" y="1352398"/>
+            <a:ext cx="678485" cy="678485"/>
+          </a:xfrm>
+          <a:prstGeom prst="ellipse">
+            <a:avLst/>
+          </a:prstGeom>
+          <a:solidFill>
+            <a:srgbClr val="B9D2F7"/>
+          </a:solidFill>
+          <a:ln w="38100">
+            <a:noFill/>
+          </a:ln>
+        </p:spPr>
+        <p:txBody>
+          <a:bodyPr wrap="square" lIns="0" tIns="36576" rIns="0" bIns="36576" rtlCol="0" anchor="ctr">
+            <a:noAutofit/>
+          </a:bodyPr>
+          <a:lstStyle/>
+          <a:p>
+            <a:pPr algn="ctr" indent="0" marL="0">
+              <a:buNone/>
+            </a:pPr>
+            <a:r>
+              <a:rPr lang="en-US" sz="2000" dirty="0" b="1">
+                <a:solidFill>
+                  <a:srgbClr val="1B2236"/>
+                </a:solidFill>
+                <a:latin typeface="Lexend Deca" pitchFamily="34" charset="0"/>
+                <a:ea typeface="Lexend Deca" pitchFamily="34" charset="-122"/>
+                <a:cs typeface="Lexend Deca" pitchFamily="34" charset="-120"/>
+              </a:rPr>
+              <a:t>01</a:t>
+            </a:r>
+            <a:endParaRPr lang="en-US" sz="2000" dirty="0"/>
+          </a:p>
+        </p:txBody>
+      </p:sp>
+      <p:sp>
+        <p:nvSpPr>
+          <p:cNvPr id="70" name="Row question"/>
+          <p:cNvSpPr/>
+          <p:nvPr/>
+        </p:nvSpPr>
+        <p:spPr>
+          <a:xfrm>
+            <a:off x="6858000" y="1170432"/>
+            <a:ext cx="4800600" cy="457200"/>
+          </a:xfrm>
+          <a:prstGeom prst="rect">
+            <a:avLst/>
+          </a:prstGeom>
+          <a:noFill/>
+          <a:ln w="38100">
+            <a:noFill/>
+          </a:ln>
+        </p:spPr>
+        <p:txBody>
+          <a:bodyPr wrap="square" lIns="73152" tIns="36576" rIns="73152" bIns="36576" rtlCol="0" anchor="ctr">
+            <a:noAutofit/>
+          </a:bodyPr>
+          <a:lstStyle/>
+          <a:p>
+            <a:pPr algn="l" indent="0" marL="0">
+              <a:buNone/>
+            </a:pPr>
+            <a:r>
+              <a:rPr lang="en-US" sz="2200" dirty="0" b="1">
+                <a:solidFill>
+                  <a:srgbClr val="1B2236"/>
+                </a:solidFill>
+                <a:latin typeface="Lexend Deca" pitchFamily="34" charset="0"/>
+                <a:ea typeface="Lexend Deca" pitchFamily="34" charset="-122"/>
+                <a:cs typeface="Lexend Deca" pitchFamily="34" charset="-120"/>
+              </a:rPr>
+              <a:t>Marco's weekend was ...</a:t>
+            </a:r>
+            <a:endParaRPr lang="en-US" sz="2200" dirty="0"/>
+          </a:p>
+        </p:txBody>
+      </p:sp>
+      <p:sp>
+        <p:nvSpPr>
+          <p:cNvPr id="71" name="Option"/>
+          <p:cNvSpPr/>
+          <p:nvPr/>
+        </p:nvSpPr>
+        <p:spPr>
+          <a:xfrm>
+            <a:off x="6858000" y="1719072"/>
+            <a:ext cx="1097280" cy="438912"/>
+          </a:xfrm>
+          <a:prstGeom prst="roundRect">
+            <a:avLst>
+              <a:gd name="adj" fmla="val 22000"/>
+            </a:avLst>
+          </a:prstGeom>
+          <a:solidFill>
+            <a:srgbClr val="F1F5FB"/>
+          </a:solidFill>
+          <a:ln w="38100">
+            <a:noFill/>
+          </a:ln>
+        </p:spPr>
+        <p:txBody>
+          <a:bodyPr wrap="square" lIns="36576" tIns="36576" rIns="36576" bIns="36576" rtlCol="0" anchor="ctr">
+            <a:noAutofit/>
+          </a:bodyPr>
+          <a:lstStyle/>
+          <a:p>
+            <a:pPr algn="ctr" indent="0" marL="0">
+              <a:buNone/>
+            </a:pPr>
+            <a:r>
+              <a:rPr lang="en-US" sz="2000" dirty="0">
+                <a:solidFill>
+                  <a:srgbClr val="1B2236"/>
+                </a:solidFill>
+                <a:latin typeface="Lexend Deca" pitchFamily="34" charset="0"/>
+                <a:ea typeface="Lexend Deca" pitchFamily="34" charset="-122"/>
+                <a:cs typeface="Lexend Deca" pitchFamily="34" charset="-120"/>
+              </a:rPr>
+              <a:t>great</a:t>
+            </a:r>
+            <a:endParaRPr lang="en-US" sz="2000" dirty="0"/>
+          </a:p>
+        </p:txBody>
+      </p:sp>
+      <p:sp>
+        <p:nvSpPr>
+          <p:cNvPr id="72" name="Circle 1"/>
+          <p:cNvSpPr/>
+          <p:nvPr/>
+        </p:nvSpPr>
+        <p:spPr>
+          <a:xfrm>
+            <a:off x="6748272" y="1655064"/>
+            <a:ext cx="1316736" cy="566928"/>
+          </a:xfrm>
+          <a:prstGeom prst="ellipse">
+            <a:avLst/>
+          </a:prstGeom>
+          <a:noFill/>
+          <a:ln w="50800">
+            <a:solidFill>
+              <a:srgbClr val="5B3FC4"/>
+            </a:solidFill>
+          </a:ln>
+        </p:spPr>
+        <p:txBody>
+          <a:bodyPr wrap="square" lIns="73152" tIns="36576" rIns="73152" bIns="36576" rtlCol="0" anchor="ctr">
+            <a:noAutofit/>
+          </a:bodyPr>
+          <a:lstStyle/>
+          <a:p>
+            <a:pPr algn="l" indent="0" marL="0">
+              <a:buNone/>
+            </a:pPr>
+            <a:r>
+              <a:rPr lang="en-US" sz="2000" dirty="0">
+                <a:solidFill>
+                  <a:srgbClr val="1B2236"/>
+                </a:solidFill>
+                <a:latin typeface="Lexend Deca" pitchFamily="34" charset="0"/>
+                <a:ea typeface="Lexend Deca" pitchFamily="34" charset="-122"/>
+                <a:cs typeface="Lexend Deca" pitchFamily="34" charset="-120"/>
+              </a:rPr>
+              <a:t/>
+            </a:r>
+            <a:endParaRPr lang="en-US" sz="2000" dirty="0"/>
+          </a:p>
+        </p:txBody>
+      </p:sp>
+      <p:sp>
+        <p:nvSpPr>
+          <p:cNvPr id="73" name="Option"/>
+          <p:cNvSpPr/>
+          <p:nvPr/>
+        </p:nvSpPr>
+        <p:spPr>
+          <a:xfrm>
+            <a:off x="8065008" y="1719072"/>
+            <a:ext cx="1163117" cy="438912"/>
+          </a:xfrm>
+          <a:prstGeom prst="roundRect">
+            <a:avLst>
+              <a:gd name="adj" fmla="val 22000"/>
+            </a:avLst>
+          </a:prstGeom>
+          <a:solidFill>
+            <a:srgbClr val="F1F5FB"/>
+          </a:solidFill>
+          <a:ln w="38100">
+            <a:noFill/>
+          </a:ln>
+        </p:spPr>
+        <p:txBody>
+          <a:bodyPr wrap="square" lIns="36576" tIns="36576" rIns="36576" bIns="36576" rtlCol="0" anchor="ctr">
+            <a:noAutofit/>
+          </a:bodyPr>
+          <a:lstStyle/>
+          <a:p>
+            <a:pPr algn="ctr" indent="0" marL="0">
+              <a:buNone/>
+            </a:pPr>
+            <a:r>
+              <a:rPr lang="en-US" sz="2000" dirty="0">
+                <a:solidFill>
+                  <a:srgbClr val="1B2236"/>
+                </a:solidFill>
+                <a:latin typeface="Lexend Deca" pitchFamily="34" charset="0"/>
+                <a:ea typeface="Lexend Deca" pitchFamily="34" charset="-122"/>
+                <a:cs typeface="Lexend Deca" pitchFamily="34" charset="-120"/>
+              </a:rPr>
+              <a:t>boring</a:t>
+            </a:r>
+            <a:endParaRPr lang="en-US" sz="2000" dirty="0"/>
+          </a:p>
+        </p:txBody>
+      </p:sp>
+      <p:sp>
+        <p:nvSpPr>
+          <p:cNvPr id="74" name="Option"/>
+          <p:cNvSpPr/>
+          <p:nvPr/>
+        </p:nvSpPr>
+        <p:spPr>
+          <a:xfrm>
+            <a:off x="9337853" y="1719072"/>
+            <a:ext cx="1459382" cy="438912"/>
+          </a:xfrm>
+          <a:prstGeom prst="roundRect">
+            <a:avLst>
+              <a:gd name="adj" fmla="val 22000"/>
+            </a:avLst>
+          </a:prstGeom>
+          <a:solidFill>
+            <a:srgbClr val="F1F5FB"/>
+          </a:solidFill>
+          <a:ln w="38100">
+            <a:noFill/>
+          </a:ln>
+        </p:spPr>
+        <p:txBody>
+          <a:bodyPr wrap="square" lIns="36576" tIns="36576" rIns="36576" bIns="36576" rtlCol="0" anchor="ctr">
+            <a:noAutofit/>
+          </a:bodyPr>
+          <a:lstStyle/>
+          <a:p>
+            <a:pPr algn="ctr" indent="0" marL="0">
+              <a:buNone/>
+            </a:pPr>
+            <a:r>
+              <a:rPr lang="en-US" sz="2000" dirty="0">
+                <a:solidFill>
+                  <a:srgbClr val="1B2236"/>
+                </a:solidFill>
+                <a:latin typeface="Lexend Deca" pitchFamily="34" charset="0"/>
+                <a:ea typeface="Lexend Deca" pitchFamily="34" charset="-122"/>
+                <a:cs typeface="Lexend Deca" pitchFamily="34" charset="-120"/>
+              </a:rPr>
+              <a:t>terrible</a:t>
+            </a:r>
+            <a:endParaRPr lang="en-US" sz="2000" dirty="0"/>
+          </a:p>
+        </p:txBody>
+      </p:sp>
+      <p:sp>
+        <p:nvSpPr>
+          <p:cNvPr id="75" name="Row shadow"/>
+          <p:cNvSpPr/>
+          <p:nvPr/>
+        </p:nvSpPr>
+        <p:spPr>
+          <a:xfrm>
+            <a:off x="5970118" y="2452421"/>
+            <a:ext cx="5897880" cy="1188720"/>
+          </a:xfrm>
+          <a:prstGeom prst="round1Rect">
+            <a:avLst/>
+          </a:prstGeom>
+          <a:solidFill>
+            <a:srgbClr val="8FAFE3"/>
+          </a:solidFill>
+          <a:ln w="38100">
+            <a:noFill/>
+          </a:ln>
+        </p:spPr>
+        <p:txBody>
+          <a:bodyPr wrap="square" lIns="73152" tIns="36576" rIns="73152" bIns="36576" rtlCol="0" anchor="ctr">
+            <a:noAutofit/>
+          </a:bodyPr>
+          <a:lstStyle/>
+          <a:p>
+            <a:pPr algn="l" indent="0" marL="0">
+              <a:buNone/>
+            </a:pPr>
+            <a:r>
+              <a:rPr lang="en-US" sz="2000" dirty="0">
+                <a:solidFill>
+                  <a:srgbClr val="1B2236"/>
+                </a:solidFill>
+                <a:latin typeface="Lexend Deca" pitchFamily="34" charset="0"/>
+                <a:ea typeface="Lexend Deca" pitchFamily="34" charset="-122"/>
+                <a:cs typeface="Lexend Deca" pitchFamily="34" charset="-120"/>
+              </a:rPr>
+              <a:t/>
+            </a:r>
+            <a:endParaRPr lang="en-US" sz="2000" dirty="0"/>
+          </a:p>
+        </p:txBody>
+      </p:sp>
+      <p:sp>
+        <p:nvSpPr>
+          <p:cNvPr id="76" name="Row"/>
+          <p:cNvSpPr/>
+          <p:nvPr/>
+        </p:nvSpPr>
+        <p:spPr>
+          <a:xfrm>
+            <a:off x="5897880" y="2395728"/>
+            <a:ext cx="5897880" cy="1188720"/>
+          </a:xfrm>
+          <a:prstGeom prst="round1Rect">
+            <a:avLst/>
+          </a:prstGeom>
+          <a:solidFill>
+            <a:srgbClr val="B9D2F7"/>
+          </a:solidFill>
+          <a:ln w="38100">
+            <a:noFill/>
+          </a:ln>
+        </p:spPr>
+        <p:txBody>
+          <a:bodyPr wrap="square" lIns="73152" tIns="36576" rIns="73152" bIns="36576" rtlCol="0" anchor="ctr">
+            <a:noAutofit/>
+          </a:bodyPr>
+          <a:lstStyle/>
+          <a:p>
+            <a:pPr algn="l" indent="0" marL="0">
+              <a:buNone/>
+            </a:pPr>
+            <a:r>
+              <a:rPr lang="en-US" sz="2000" dirty="0">
+                <a:solidFill>
+                  <a:srgbClr val="1B2236"/>
+                </a:solidFill>
+                <a:latin typeface="Lexend Deca" pitchFamily="34" charset="0"/>
+                <a:ea typeface="Lexend Deca" pitchFamily="34" charset="-122"/>
+                <a:cs typeface="Lexend Deca" pitchFamily="34" charset="-120"/>
+              </a:rPr>
+              <a:t/>
+            </a:r>
+            <a:endParaRPr lang="en-US" sz="2000" dirty="0"/>
+          </a:p>
+        </p:txBody>
+      </p:sp>
+      <p:sp>
+        <p:nvSpPr>
+          <p:cNvPr id="77" name="Row num"/>
+          <p:cNvSpPr/>
+          <p:nvPr/>
+        </p:nvSpPr>
+        <p:spPr>
+          <a:xfrm>
+            <a:off x="6035040" y="2650846"/>
+            <a:ext cx="678485" cy="678485"/>
+          </a:xfrm>
+          <a:prstGeom prst="ellipse">
+            <a:avLst/>
+          </a:prstGeom>
+          <a:solidFill>
+            <a:srgbClr val="FFFFFF"/>
+          </a:solidFill>
+          <a:ln w="38100">
+            <a:noFill/>
+          </a:ln>
+        </p:spPr>
+        <p:txBody>
+          <a:bodyPr wrap="square" lIns="0" tIns="36576" rIns="0" bIns="36576" rtlCol="0" anchor="ctr">
+            <a:noAutofit/>
+          </a:bodyPr>
+          <a:lstStyle/>
+          <a:p>
+            <a:pPr algn="ctr" indent="0" marL="0">
+              <a:buNone/>
+            </a:pPr>
+            <a:r>
+              <a:rPr lang="en-US" sz="2000" dirty="0" b="1">
+                <a:solidFill>
+                  <a:srgbClr val="1B2236"/>
+                </a:solidFill>
+                <a:latin typeface="Lexend Deca" pitchFamily="34" charset="0"/>
+                <a:ea typeface="Lexend Deca" pitchFamily="34" charset="-122"/>
+                <a:cs typeface="Lexend Deca" pitchFamily="34" charset="-120"/>
+              </a:rPr>
+              <a:t>02</a:t>
+            </a:r>
+            <a:endParaRPr lang="en-US" sz="2000" dirty="0"/>
+          </a:p>
+        </p:txBody>
+      </p:sp>
+      <p:sp>
+        <p:nvSpPr>
+          <p:cNvPr id="78" name="Row question"/>
+          <p:cNvSpPr/>
+          <p:nvPr/>
+        </p:nvSpPr>
+        <p:spPr>
+          <a:xfrm>
+            <a:off x="6858000" y="2468880"/>
+            <a:ext cx="4800600" cy="457200"/>
+          </a:xfrm>
+          <a:prstGeom prst="rect">
+            <a:avLst/>
+          </a:prstGeom>
+          <a:noFill/>
+          <a:ln w="38100">
+            <a:noFill/>
+          </a:ln>
+        </p:spPr>
+        <p:txBody>
+          <a:bodyPr wrap="square" lIns="73152" tIns="36576" rIns="73152" bIns="36576" rtlCol="0" anchor="ctr">
+            <a:noAutofit/>
+          </a:bodyPr>
+          <a:lstStyle/>
+          <a:p>
+            <a:pPr algn="l" indent="0" marL="0">
+              <a:buNone/>
+            </a:pPr>
+            <a:r>
+              <a:rPr lang="en-US" sz="2200" dirty="0" b="1">
+                <a:solidFill>
+                  <a:srgbClr val="1B2236"/>
+                </a:solidFill>
+                <a:latin typeface="Lexend Deca" pitchFamily="34" charset="0"/>
+                <a:ea typeface="Lexend Deca" pitchFamily="34" charset="-122"/>
+                <a:cs typeface="Lexend Deca" pitchFamily="34" charset="-120"/>
+              </a:rPr>
+              <a:t>Kim's weekend was ...</a:t>
+            </a:r>
+            <a:endParaRPr lang="en-US" sz="2200" dirty="0"/>
+          </a:p>
+        </p:txBody>
+      </p:sp>
+      <p:sp>
+        <p:nvSpPr>
+          <p:cNvPr id="79" name="Option"/>
+          <p:cNvSpPr/>
+          <p:nvPr/>
+        </p:nvSpPr>
+        <p:spPr>
+          <a:xfrm>
+            <a:off x="6858000" y="3017520"/>
+            <a:ext cx="1097280" cy="438912"/>
+          </a:xfrm>
+          <a:prstGeom prst="roundRect">
+            <a:avLst>
+              <a:gd name="adj" fmla="val 22000"/>
+            </a:avLst>
+          </a:prstGeom>
+          <a:solidFill>
+            <a:srgbClr val="FFFFFF"/>
+          </a:solidFill>
+          <a:ln w="38100">
+            <a:noFill/>
+          </a:ln>
+        </p:spPr>
+        <p:txBody>
+          <a:bodyPr wrap="square" lIns="36576" tIns="36576" rIns="36576" bIns="36576" rtlCol="0" anchor="ctr">
+            <a:noAutofit/>
+          </a:bodyPr>
+          <a:lstStyle/>
+          <a:p>
+            <a:pPr algn="ctr" indent="0" marL="0">
+              <a:buNone/>
+            </a:pPr>
+            <a:r>
+              <a:rPr lang="en-US" sz="2000" dirty="0">
+                <a:solidFill>
+                  <a:srgbClr val="1B2236"/>
+                </a:solidFill>
+                <a:latin typeface="Lexend Deca" pitchFamily="34" charset="0"/>
+                <a:ea typeface="Lexend Deca" pitchFamily="34" charset="-122"/>
+                <a:cs typeface="Lexend Deca" pitchFamily="34" charset="-120"/>
+              </a:rPr>
+              <a:t>fun</a:t>
+            </a:r>
+            <a:endParaRPr lang="en-US" sz="2000" dirty="0"/>
+          </a:p>
+        </p:txBody>
+      </p:sp>
+      <p:sp>
+        <p:nvSpPr>
+          <p:cNvPr id="80" name="Option"/>
+          <p:cNvSpPr/>
+          <p:nvPr/>
+        </p:nvSpPr>
+        <p:spPr>
+          <a:xfrm>
+            <a:off x="8065008" y="3017520"/>
+            <a:ext cx="1163117" cy="438912"/>
+          </a:xfrm>
+          <a:prstGeom prst="roundRect">
+            <a:avLst>
+              <a:gd name="adj" fmla="val 22000"/>
+            </a:avLst>
+          </a:prstGeom>
+          <a:solidFill>
+            <a:srgbClr val="FFFFFF"/>
+          </a:solidFill>
+          <a:ln w="38100">
+            <a:noFill/>
+          </a:ln>
+        </p:spPr>
+        <p:txBody>
+          <a:bodyPr wrap="square" lIns="36576" tIns="36576" rIns="36576" bIns="36576" rtlCol="0" anchor="ctr">
+            <a:noAutofit/>
+          </a:bodyPr>
+          <a:lstStyle/>
+          <a:p>
+            <a:pPr algn="ctr" indent="0" marL="0">
+              <a:buNone/>
+            </a:pPr>
+            <a:r>
+              <a:rPr lang="en-US" sz="2000" dirty="0">
+                <a:solidFill>
+                  <a:srgbClr val="1B2236"/>
+                </a:solidFill>
+                <a:latin typeface="Lexend Deca" pitchFamily="34" charset="0"/>
+                <a:ea typeface="Lexend Deca" pitchFamily="34" charset="-122"/>
+                <a:cs typeface="Lexend Deca" pitchFamily="34" charset="-120"/>
+              </a:rPr>
+              <a:t>boring</a:t>
+            </a:r>
+            <a:endParaRPr lang="en-US" sz="2000" dirty="0"/>
+          </a:p>
+        </p:txBody>
+      </p:sp>
+      <p:sp>
+        <p:nvSpPr>
+          <p:cNvPr id="81" name="Circle 2"/>
+          <p:cNvSpPr/>
+          <p:nvPr/>
+        </p:nvSpPr>
+        <p:spPr>
+          <a:xfrm>
+            <a:off x="7955280" y="2953512"/>
+            <a:ext cx="1382573" cy="566928"/>
+          </a:xfrm>
+          <a:prstGeom prst="ellipse">
+            <a:avLst/>
+          </a:prstGeom>
+          <a:noFill/>
+          <a:ln w="50800">
+            <a:solidFill>
+              <a:srgbClr val="5B3FC4"/>
+            </a:solidFill>
+          </a:ln>
+        </p:spPr>
+        <p:txBody>
+          <a:bodyPr wrap="square" lIns="73152" tIns="36576" rIns="73152" bIns="36576" rtlCol="0" anchor="ctr">
+            <a:noAutofit/>
+          </a:bodyPr>
+          <a:lstStyle/>
+          <a:p>
+            <a:pPr algn="l" indent="0" marL="0">
+              <a:buNone/>
+            </a:pPr>
+            <a:r>
+              <a:rPr lang="en-US" sz="2000" dirty="0">
+                <a:solidFill>
+                  <a:srgbClr val="1B2236"/>
+                </a:solidFill>
+                <a:latin typeface="Lexend Deca" pitchFamily="34" charset="0"/>
+                <a:ea typeface="Lexend Deca" pitchFamily="34" charset="-122"/>
+                <a:cs typeface="Lexend Deca" pitchFamily="34" charset="-120"/>
+              </a:rPr>
+              <a:t/>
+            </a:r>
+            <a:endParaRPr lang="en-US" sz="2000" dirty="0"/>
+          </a:p>
+        </p:txBody>
+      </p:sp>
+      <p:sp>
+        <p:nvSpPr>
+          <p:cNvPr id="82" name="Option"/>
+          <p:cNvSpPr/>
+          <p:nvPr/>
+        </p:nvSpPr>
+        <p:spPr>
+          <a:xfrm>
+            <a:off x="9337853" y="3017520"/>
+            <a:ext cx="1097280" cy="438912"/>
+          </a:xfrm>
+          <a:prstGeom prst="roundRect">
+            <a:avLst>
+              <a:gd name="adj" fmla="val 22000"/>
+            </a:avLst>
+          </a:prstGeom>
+          <a:solidFill>
+            <a:srgbClr val="FFFFFF"/>
+          </a:solidFill>
+          <a:ln w="38100">
+            <a:noFill/>
+          </a:ln>
+        </p:spPr>
+        <p:txBody>
+          <a:bodyPr wrap="square" lIns="36576" tIns="36576" rIns="36576" bIns="36576" rtlCol="0" anchor="ctr">
+            <a:noAutofit/>
+          </a:bodyPr>
+          <a:lstStyle/>
+          <a:p>
+            <a:pPr algn="ctr" indent="0" marL="0">
+              <a:buNone/>
+            </a:pPr>
+            <a:r>
+              <a:rPr lang="en-US" sz="2000" dirty="0">
+                <a:solidFill>
+                  <a:srgbClr val="1B2236"/>
+                </a:solidFill>
+                <a:latin typeface="Lexend Deca" pitchFamily="34" charset="0"/>
+                <a:ea typeface="Lexend Deca" pitchFamily="34" charset="-122"/>
+                <a:cs typeface="Lexend Deca" pitchFamily="34" charset="-120"/>
+              </a:rPr>
+              <a:t>great</a:t>
+            </a:r>
+            <a:endParaRPr lang="en-US" sz="2000" dirty="0"/>
+          </a:p>
+        </p:txBody>
+      </p:sp>
+      <p:sp>
+        <p:nvSpPr>
+          <p:cNvPr id="83" name="Row shadow"/>
+          <p:cNvSpPr/>
+          <p:nvPr/>
+        </p:nvSpPr>
+        <p:spPr>
+          <a:xfrm>
+            <a:off x="5970118" y="3750869"/>
+            <a:ext cx="5897880" cy="1188720"/>
+          </a:xfrm>
+          <a:prstGeom prst="round1Rect">
+            <a:avLst/>
+          </a:prstGeom>
+          <a:solidFill>
+            <a:srgbClr val="8FAFE3"/>
+          </a:solidFill>
+          <a:ln w="38100">
+            <a:noFill/>
+          </a:ln>
+        </p:spPr>
+        <p:txBody>
+          <a:bodyPr wrap="square" lIns="73152" tIns="36576" rIns="73152" bIns="36576" rtlCol="0" anchor="ctr">
+            <a:noAutofit/>
+          </a:bodyPr>
+          <a:lstStyle/>
+          <a:p>
+            <a:pPr algn="l" indent="0" marL="0">
+              <a:buNone/>
+            </a:pPr>
+            <a:r>
+              <a:rPr lang="en-US" sz="2000" dirty="0">
+                <a:solidFill>
+                  <a:srgbClr val="1B2236"/>
+                </a:solidFill>
+                <a:latin typeface="Lexend Deca" pitchFamily="34" charset="0"/>
+                <a:ea typeface="Lexend Deca" pitchFamily="34" charset="-122"/>
+                <a:cs typeface="Lexend Deca" pitchFamily="34" charset="-120"/>
+              </a:rPr>
+              <a:t/>
+            </a:r>
+            <a:endParaRPr lang="en-US" sz="2000" dirty="0"/>
+          </a:p>
+        </p:txBody>
+      </p:sp>
+      <p:sp>
+        <p:nvSpPr>
+          <p:cNvPr id="84" name="Row"/>
+          <p:cNvSpPr/>
+          <p:nvPr/>
+        </p:nvSpPr>
+        <p:spPr>
+          <a:xfrm>
+            <a:off x="5897880" y="3694176"/>
+            <a:ext cx="5897880" cy="1188720"/>
+          </a:xfrm>
+          <a:prstGeom prst="round1Rect">
+            <a:avLst/>
+          </a:prstGeom>
+          <a:solidFill>
+            <a:srgbClr val="FFFFFF"/>
+          </a:solidFill>
+          <a:ln w="38100">
+            <a:noFill/>
+          </a:ln>
+        </p:spPr>
+        <p:txBody>
+          <a:bodyPr wrap="square" lIns="73152" tIns="36576" rIns="73152" bIns="36576" rtlCol="0" anchor="ctr">
+            <a:noAutofit/>
+          </a:bodyPr>
+          <a:lstStyle/>
+          <a:p>
+            <a:pPr algn="l" indent="0" marL="0">
+              <a:buNone/>
+            </a:pPr>
+            <a:r>
+              <a:rPr lang="en-US" sz="2000" dirty="0">
+                <a:solidFill>
+                  <a:srgbClr val="1B2236"/>
+                </a:solidFill>
+                <a:latin typeface="Lexend Deca" pitchFamily="34" charset="0"/>
+                <a:ea typeface="Lexend Deca" pitchFamily="34" charset="-122"/>
+                <a:cs typeface="Lexend Deca" pitchFamily="34" charset="-120"/>
+              </a:rPr>
+              <a:t/>
+            </a:r>
+            <a:endParaRPr lang="en-US" sz="2000" dirty="0"/>
+          </a:p>
+        </p:txBody>
+      </p:sp>
+      <p:sp>
+        <p:nvSpPr>
+          <p:cNvPr id="85" name="Row num"/>
+          <p:cNvSpPr/>
+          <p:nvPr/>
+        </p:nvSpPr>
+        <p:spPr>
+          <a:xfrm>
+            <a:off x="6035040" y="3949294"/>
+            <a:ext cx="678485" cy="678485"/>
+          </a:xfrm>
+          <a:prstGeom prst="ellipse">
+            <a:avLst/>
+          </a:prstGeom>
+          <a:solidFill>
+            <a:srgbClr val="B9D2F7"/>
+          </a:solidFill>
+          <a:ln w="38100">
+            <a:noFill/>
+          </a:ln>
+        </p:spPr>
+        <p:txBody>
+          <a:bodyPr wrap="square" lIns="0" tIns="36576" rIns="0" bIns="36576" rtlCol="0" anchor="ctr">
+            <a:noAutofit/>
+          </a:bodyPr>
+          <a:lstStyle/>
+          <a:p>
+            <a:pPr algn="ctr" indent="0" marL="0">
+              <a:buNone/>
+            </a:pPr>
+            <a:r>
+              <a:rPr lang="en-US" sz="2000" dirty="0" b="1">
+                <a:solidFill>
+                  <a:srgbClr val="1B2236"/>
+                </a:solidFill>
+                <a:latin typeface="Lexend Deca" pitchFamily="34" charset="0"/>
+                <a:ea typeface="Lexend Deca" pitchFamily="34" charset="-122"/>
+                <a:cs typeface="Lexend Deca" pitchFamily="34" charset="-120"/>
+              </a:rPr>
+              <a:t>03</a:t>
+            </a:r>
+            <a:endParaRPr lang="en-US" sz="2000" dirty="0"/>
+          </a:p>
+        </p:txBody>
+      </p:sp>
+      <p:sp>
+        <p:nvSpPr>
+          <p:cNvPr id="86" name="Row question"/>
+          <p:cNvSpPr/>
+          <p:nvPr/>
+        </p:nvSpPr>
+        <p:spPr>
+          <a:xfrm>
+            <a:off x="6858000" y="3767328"/>
+            <a:ext cx="4800600" cy="457200"/>
+          </a:xfrm>
+          <a:prstGeom prst="rect">
+            <a:avLst/>
+          </a:prstGeom>
+          <a:noFill/>
+          <a:ln w="38100">
+            <a:noFill/>
+          </a:ln>
+        </p:spPr>
+        <p:txBody>
+          <a:bodyPr wrap="square" lIns="73152" tIns="36576" rIns="73152" bIns="36576" rtlCol="0" anchor="ctr">
+            <a:noAutofit/>
+          </a:bodyPr>
+          <a:lstStyle/>
+          <a:p>
+            <a:pPr algn="l" indent="0" marL="0">
+              <a:buNone/>
+            </a:pPr>
+            <a:r>
+              <a:rPr lang="en-US" sz="2200" dirty="0" b="1">
+                <a:solidFill>
+                  <a:srgbClr val="1B2236"/>
+                </a:solidFill>
+                <a:latin typeface="Lexend Deca" pitchFamily="34" charset="0"/>
+                <a:ea typeface="Lexend Deca" pitchFamily="34" charset="-122"/>
+                <a:cs typeface="Lexend Deca" pitchFamily="34" charset="-120"/>
+              </a:rPr>
+              <a:t>Kim's movie was ...</a:t>
+            </a:r>
+            <a:endParaRPr lang="en-US" sz="2200" dirty="0"/>
+          </a:p>
+        </p:txBody>
+      </p:sp>
+      <p:sp>
+        <p:nvSpPr>
+          <p:cNvPr id="87" name="Option"/>
+          <p:cNvSpPr/>
+          <p:nvPr/>
+        </p:nvSpPr>
+        <p:spPr>
+          <a:xfrm>
+            <a:off x="6858000" y="4315968"/>
+            <a:ext cx="1097280" cy="438912"/>
+          </a:xfrm>
+          <a:prstGeom prst="roundRect">
+            <a:avLst>
+              <a:gd name="adj" fmla="val 22000"/>
+            </a:avLst>
+          </a:prstGeom>
+          <a:solidFill>
+            <a:srgbClr val="F1F5FB"/>
+          </a:solidFill>
+          <a:ln w="38100">
+            <a:noFill/>
+          </a:ln>
+        </p:spPr>
+        <p:txBody>
+          <a:bodyPr wrap="square" lIns="36576" tIns="36576" rIns="36576" bIns="36576" rtlCol="0" anchor="ctr">
+            <a:noAutofit/>
+          </a:bodyPr>
+          <a:lstStyle/>
+          <a:p>
+            <a:pPr algn="ctr" indent="0" marL="0">
+              <a:buNone/>
+            </a:pPr>
+            <a:r>
+              <a:rPr lang="en-US" sz="2000" dirty="0">
+                <a:solidFill>
+                  <a:srgbClr val="1B2236"/>
+                </a:solidFill>
+                <a:latin typeface="Lexend Deca" pitchFamily="34" charset="0"/>
+                <a:ea typeface="Lexend Deca" pitchFamily="34" charset="-122"/>
+                <a:cs typeface="Lexend Deca" pitchFamily="34" charset="-120"/>
+              </a:rPr>
+              <a:t>good</a:t>
+            </a:r>
+            <a:endParaRPr lang="en-US" sz="2000" dirty="0"/>
+          </a:p>
+        </p:txBody>
+      </p:sp>
+      <p:sp>
+        <p:nvSpPr>
+          <p:cNvPr id="88" name="Option"/>
+          <p:cNvSpPr/>
+          <p:nvPr/>
+        </p:nvSpPr>
+        <p:spPr>
+          <a:xfrm>
+            <a:off x="8065008" y="4315968"/>
+            <a:ext cx="1097280" cy="438912"/>
+          </a:xfrm>
+          <a:prstGeom prst="roundRect">
+            <a:avLst>
+              <a:gd name="adj" fmla="val 22000"/>
+            </a:avLst>
+          </a:prstGeom>
+          <a:solidFill>
+            <a:srgbClr val="F1F5FB"/>
+          </a:solidFill>
+          <a:ln w="38100">
+            <a:noFill/>
+          </a:ln>
+        </p:spPr>
+        <p:txBody>
+          <a:bodyPr wrap="square" lIns="36576" tIns="36576" rIns="36576" bIns="36576" rtlCol="0" anchor="ctr">
+            <a:noAutofit/>
+          </a:bodyPr>
+          <a:lstStyle/>
+          <a:p>
+            <a:pPr algn="ctr" indent="0" marL="0">
+              <a:buNone/>
+            </a:pPr>
+            <a:r>
+              <a:rPr lang="en-US" sz="2000" dirty="0">
+                <a:solidFill>
+                  <a:srgbClr val="1B2236"/>
+                </a:solidFill>
+                <a:latin typeface="Lexend Deca" pitchFamily="34" charset="0"/>
+                <a:ea typeface="Lexend Deca" pitchFamily="34" charset="-122"/>
+                <a:cs typeface="Lexend Deca" pitchFamily="34" charset="-120"/>
+              </a:rPr>
+              <a:t>funny</a:t>
+            </a:r>
+            <a:endParaRPr lang="en-US" sz="2000" dirty="0"/>
+          </a:p>
+        </p:txBody>
+      </p:sp>
+      <p:sp>
+        <p:nvSpPr>
+          <p:cNvPr id="89" name="Option"/>
+          <p:cNvSpPr/>
+          <p:nvPr/>
+        </p:nvSpPr>
+        <p:spPr>
+          <a:xfrm>
+            <a:off x="9272016" y="4315968"/>
+            <a:ext cx="1459382" cy="438912"/>
+          </a:xfrm>
+          <a:prstGeom prst="roundRect">
+            <a:avLst>
+              <a:gd name="adj" fmla="val 22000"/>
+            </a:avLst>
+          </a:prstGeom>
+          <a:solidFill>
+            <a:srgbClr val="F1F5FB"/>
+          </a:solidFill>
+          <a:ln w="38100">
+            <a:noFill/>
+          </a:ln>
+        </p:spPr>
+        <p:txBody>
+          <a:bodyPr wrap="square" lIns="36576" tIns="36576" rIns="36576" bIns="36576" rtlCol="0" anchor="ctr">
+            <a:noAutofit/>
+          </a:bodyPr>
+          <a:lstStyle/>
+          <a:p>
+            <a:pPr algn="ctr" indent="0" marL="0">
+              <a:buNone/>
+            </a:pPr>
+            <a:r>
+              <a:rPr lang="en-US" sz="2000" dirty="0">
+                <a:solidFill>
+                  <a:srgbClr val="1B2236"/>
+                </a:solidFill>
+                <a:latin typeface="Lexend Deca" pitchFamily="34" charset="0"/>
+                <a:ea typeface="Lexend Deca" pitchFamily="34" charset="-122"/>
+                <a:cs typeface="Lexend Deca" pitchFamily="34" charset="-120"/>
+              </a:rPr>
+              <a:t>terrible</a:t>
+            </a:r>
+            <a:endParaRPr lang="en-US" sz="2000" dirty="0"/>
+          </a:p>
+        </p:txBody>
+      </p:sp>
+      <p:sp>
+        <p:nvSpPr>
+          <p:cNvPr id="90" name="Circle 3"/>
+          <p:cNvSpPr/>
+          <p:nvPr/>
+        </p:nvSpPr>
+        <p:spPr>
+          <a:xfrm>
+            <a:off x="9162288" y="4251960"/>
+            <a:ext cx="1678838" cy="566928"/>
+          </a:xfrm>
+          <a:prstGeom prst="ellipse">
+            <a:avLst/>
+          </a:prstGeom>
+          <a:noFill/>
+          <a:ln w="50800">
+            <a:solidFill>
+              <a:srgbClr val="5B3FC4"/>
+            </a:solidFill>
+          </a:ln>
+        </p:spPr>
+        <p:txBody>
+          <a:bodyPr wrap="square" lIns="73152" tIns="36576" rIns="73152" bIns="36576" rtlCol="0" anchor="ctr">
+            <a:noAutofit/>
+          </a:bodyPr>
+          <a:lstStyle/>
+          <a:p>
+            <a:pPr algn="l" indent="0" marL="0">
+              <a:buNone/>
+            </a:pPr>
+            <a:r>
+              <a:rPr lang="en-US" sz="2000" dirty="0">
+                <a:solidFill>
+                  <a:srgbClr val="1B2236"/>
+                </a:solidFill>
+                <a:latin typeface="Lexend Deca" pitchFamily="34" charset="0"/>
+                <a:ea typeface="Lexend Deca" pitchFamily="34" charset="-122"/>
+                <a:cs typeface="Lexend Deca" pitchFamily="34" charset="-120"/>
+              </a:rPr>
+              <a:t/>
+            </a:r>
+            <a:endParaRPr lang="en-US" sz="2000" dirty="0"/>
+          </a:p>
+        </p:txBody>
+      </p:sp>
+      <p:sp>
+        <p:nvSpPr>
+          <p:cNvPr id="91" name="Row shadow"/>
+          <p:cNvSpPr/>
+          <p:nvPr/>
+        </p:nvSpPr>
+        <p:spPr>
+          <a:xfrm>
+            <a:off x="5970118" y="5049317"/>
+            <a:ext cx="5897880" cy="1188720"/>
+          </a:xfrm>
+          <a:prstGeom prst="round1Rect">
+            <a:avLst/>
+          </a:prstGeom>
+          <a:solidFill>
+            <a:srgbClr val="8FAFE3"/>
+          </a:solidFill>
+          <a:ln w="38100">
+            <a:noFill/>
+          </a:ln>
+        </p:spPr>
+        <p:txBody>
+          <a:bodyPr wrap="square" lIns="73152" tIns="36576" rIns="73152" bIns="36576" rtlCol="0" anchor="ctr">
+            <a:noAutofit/>
+          </a:bodyPr>
+          <a:lstStyle/>
+          <a:p>
+            <a:pPr algn="l" indent="0" marL="0">
+              <a:buNone/>
+            </a:pPr>
+            <a:r>
+              <a:rPr lang="en-US" sz="2000" dirty="0">
+                <a:solidFill>
+                  <a:srgbClr val="1B2236"/>
+                </a:solidFill>
+                <a:latin typeface="Lexend Deca" pitchFamily="34" charset="0"/>
+                <a:ea typeface="Lexend Deca" pitchFamily="34" charset="-122"/>
+                <a:cs typeface="Lexend Deca" pitchFamily="34" charset="-120"/>
+              </a:rPr>
+              <a:t/>
+            </a:r>
+            <a:endParaRPr lang="en-US" sz="2000" dirty="0"/>
+          </a:p>
+        </p:txBody>
+      </p:sp>
+      <p:sp>
+        <p:nvSpPr>
+          <p:cNvPr id="92" name="Row"/>
+          <p:cNvSpPr/>
+          <p:nvPr/>
+        </p:nvSpPr>
+        <p:spPr>
+          <a:xfrm>
+            <a:off x="5897880" y="4992624"/>
+            <a:ext cx="5897880" cy="1188720"/>
+          </a:xfrm>
+          <a:prstGeom prst="round1Rect">
+            <a:avLst/>
+          </a:prstGeom>
+          <a:solidFill>
+            <a:srgbClr val="B9D2F7"/>
+          </a:solidFill>
+          <a:ln w="38100">
+            <a:noFill/>
+          </a:ln>
+        </p:spPr>
+        <p:txBody>
+          <a:bodyPr wrap="square" lIns="73152" tIns="36576" rIns="73152" bIns="36576" rtlCol="0" anchor="ctr">
+            <a:noAutofit/>
+          </a:bodyPr>
+          <a:lstStyle/>
+          <a:p>
+            <a:pPr algn="l" indent="0" marL="0">
+              <a:buNone/>
+            </a:pPr>
+            <a:r>
+              <a:rPr lang="en-US" sz="2000" dirty="0">
+                <a:solidFill>
+                  <a:srgbClr val="1B2236"/>
+                </a:solidFill>
+                <a:latin typeface="Lexend Deca" pitchFamily="34" charset="0"/>
+                <a:ea typeface="Lexend Deca" pitchFamily="34" charset="-122"/>
+                <a:cs typeface="Lexend Deca" pitchFamily="34" charset="-120"/>
+              </a:rPr>
+              <a:t/>
+            </a:r>
+            <a:endParaRPr lang="en-US" sz="2000" dirty="0"/>
+          </a:p>
+        </p:txBody>
+      </p:sp>
+      <p:sp>
+        <p:nvSpPr>
+          <p:cNvPr id="93" name="Row num"/>
+          <p:cNvSpPr/>
+          <p:nvPr/>
+        </p:nvSpPr>
+        <p:spPr>
+          <a:xfrm>
+            <a:off x="6035040" y="5247742"/>
+            <a:ext cx="678485" cy="678485"/>
+          </a:xfrm>
+          <a:prstGeom prst="ellipse">
+            <a:avLst/>
+          </a:prstGeom>
+          <a:solidFill>
+            <a:srgbClr val="FFFFFF"/>
+          </a:solidFill>
+          <a:ln w="38100">
+            <a:noFill/>
+          </a:ln>
+        </p:spPr>
+        <p:txBody>
+          <a:bodyPr wrap="square" lIns="0" tIns="36576" rIns="0" bIns="36576" rtlCol="0" anchor="ctr">
+            <a:noAutofit/>
+          </a:bodyPr>
+          <a:lstStyle/>
+          <a:p>
+            <a:pPr algn="ctr" indent="0" marL="0">
+              <a:buNone/>
+            </a:pPr>
+            <a:r>
+              <a:rPr lang="en-US" sz="2000" dirty="0" b="1">
+                <a:solidFill>
+                  <a:srgbClr val="1B2236"/>
+                </a:solidFill>
+                <a:latin typeface="Lexend Deca" pitchFamily="34" charset="0"/>
+                <a:ea typeface="Lexend Deca" pitchFamily="34" charset="-122"/>
+                <a:cs typeface="Lexend Deca" pitchFamily="34" charset="-120"/>
+              </a:rPr>
+              <a:t>04</a:t>
+            </a:r>
+            <a:endParaRPr lang="en-US" sz="2000" dirty="0"/>
+          </a:p>
+        </p:txBody>
+      </p:sp>
+      <p:sp>
+        <p:nvSpPr>
+          <p:cNvPr id="94" name="Row question"/>
+          <p:cNvSpPr/>
+          <p:nvPr/>
+        </p:nvSpPr>
+        <p:spPr>
+          <a:xfrm>
+            <a:off x="6858000" y="5065776"/>
+            <a:ext cx="4800600" cy="457200"/>
+          </a:xfrm>
+          <a:prstGeom prst="rect">
+            <a:avLst/>
+          </a:prstGeom>
+          <a:noFill/>
+          <a:ln w="38100">
+            <a:noFill/>
+          </a:ln>
+        </p:spPr>
+        <p:txBody>
+          <a:bodyPr wrap="square" lIns="73152" tIns="36576" rIns="73152" bIns="36576" rtlCol="0" anchor="ctr">
+            <a:noAutofit/>
+          </a:bodyPr>
+          <a:lstStyle/>
+          <a:p>
+            <a:pPr algn="l" indent="0" marL="0">
+              <a:buNone/>
+            </a:pPr>
+            <a:r>
+              <a:rPr lang="en-US" sz="2200" dirty="0" b="1">
+                <a:solidFill>
+                  <a:srgbClr val="1B2236"/>
+                </a:solidFill>
+                <a:latin typeface="Lexend Deca" pitchFamily="34" charset="0"/>
+                <a:ea typeface="Lexend Deca" pitchFamily="34" charset="-122"/>
+                <a:cs typeface="Lexend Deca" pitchFamily="34" charset="-120"/>
+              </a:rPr>
+              <a:t>She stopped it after ...</a:t>
+            </a:r>
+            <a:endParaRPr lang="en-US" sz="2200" dirty="0"/>
+          </a:p>
+        </p:txBody>
+      </p:sp>
+      <p:sp>
+        <p:nvSpPr>
+          <p:cNvPr id="95" name="Option"/>
+          <p:cNvSpPr/>
+          <p:nvPr/>
+        </p:nvSpPr>
+        <p:spPr>
+          <a:xfrm>
+            <a:off x="6858000" y="5614416"/>
+            <a:ext cx="1097280" cy="438912"/>
+          </a:xfrm>
+          <a:prstGeom prst="roundRect">
+            <a:avLst>
+              <a:gd name="adj" fmla="val 22000"/>
+            </a:avLst>
+          </a:prstGeom>
+          <a:solidFill>
+            <a:srgbClr val="FFFFFF"/>
+          </a:solidFill>
+          <a:ln w="38100">
+            <a:noFill/>
+          </a:ln>
+        </p:spPr>
+        <p:txBody>
+          <a:bodyPr wrap="square" lIns="36576" tIns="36576" rIns="36576" bIns="36576" rtlCol="0" anchor="ctr">
+            <a:noAutofit/>
+          </a:bodyPr>
+          <a:lstStyle/>
+          <a:p>
+            <a:pPr algn="ctr" indent="0" marL="0">
+              <a:buNone/>
+            </a:pPr>
+            <a:r>
+              <a:rPr lang="en-US" sz="2000" dirty="0">
+                <a:solidFill>
+                  <a:srgbClr val="1B2236"/>
+                </a:solidFill>
+                <a:latin typeface="Lexend Deca" pitchFamily="34" charset="0"/>
+                <a:ea typeface="Lexend Deca" pitchFamily="34" charset="-122"/>
+                <a:cs typeface="Lexend Deca" pitchFamily="34" charset="-120"/>
+              </a:rPr>
+              <a:t>10</a:t>
+            </a:r>
+            <a:endParaRPr lang="en-US" sz="2000" dirty="0"/>
+          </a:p>
+        </p:txBody>
+      </p:sp>
+      <p:sp>
+        <p:nvSpPr>
+          <p:cNvPr id="96" name="Option"/>
+          <p:cNvSpPr/>
+          <p:nvPr/>
+        </p:nvSpPr>
+        <p:spPr>
+          <a:xfrm>
+            <a:off x="8065008" y="5614416"/>
+            <a:ext cx="1097280" cy="438912"/>
+          </a:xfrm>
+          <a:prstGeom prst="roundRect">
+            <a:avLst>
+              <a:gd name="adj" fmla="val 22000"/>
+            </a:avLst>
+          </a:prstGeom>
+          <a:solidFill>
+            <a:srgbClr val="FFFFFF"/>
+          </a:solidFill>
+          <a:ln w="38100">
+            <a:noFill/>
+          </a:ln>
+        </p:spPr>
+        <p:txBody>
+          <a:bodyPr wrap="square" lIns="36576" tIns="36576" rIns="36576" bIns="36576" rtlCol="0" anchor="ctr">
+            <a:noAutofit/>
+          </a:bodyPr>
+          <a:lstStyle/>
+          <a:p>
+            <a:pPr algn="ctr" indent="0" marL="0">
+              <a:buNone/>
+            </a:pPr>
+            <a:r>
+              <a:rPr lang="en-US" sz="2000" dirty="0">
+                <a:solidFill>
+                  <a:srgbClr val="1B2236"/>
+                </a:solidFill>
+                <a:latin typeface="Lexend Deca" pitchFamily="34" charset="0"/>
+                <a:ea typeface="Lexend Deca" pitchFamily="34" charset="-122"/>
+                <a:cs typeface="Lexend Deca" pitchFamily="34" charset="-120"/>
+              </a:rPr>
+              <a:t>20</a:t>
+            </a:r>
+            <a:endParaRPr lang="en-US" sz="2000" dirty="0"/>
+          </a:p>
+        </p:txBody>
+      </p:sp>
+      <p:sp>
+        <p:nvSpPr>
+          <p:cNvPr id="97" name="Circle 4"/>
+          <p:cNvSpPr/>
+          <p:nvPr/>
+        </p:nvSpPr>
+        <p:spPr>
+          <a:xfrm>
+            <a:off x="7955280" y="5550408"/>
+            <a:ext cx="1316736" cy="566928"/>
+          </a:xfrm>
+          <a:prstGeom prst="ellipse">
+            <a:avLst/>
+          </a:prstGeom>
+          <a:noFill/>
+          <a:ln w="50800">
+            <a:solidFill>
+              <a:srgbClr val="5B3FC4"/>
+            </a:solidFill>
+          </a:ln>
+        </p:spPr>
+        <p:txBody>
+          <a:bodyPr wrap="square" lIns="73152" tIns="36576" rIns="73152" bIns="36576" rtlCol="0" anchor="ctr">
+            <a:noAutofit/>
+          </a:bodyPr>
+          <a:lstStyle/>
+          <a:p>
+            <a:pPr algn="l" indent="0" marL="0">
+              <a:buNone/>
+            </a:pPr>
+            <a:r>
+              <a:rPr lang="en-US" sz="2000" dirty="0">
+                <a:solidFill>
+                  <a:srgbClr val="1B2236"/>
+                </a:solidFill>
+                <a:latin typeface="Lexend Deca" pitchFamily="34" charset="0"/>
+                <a:ea typeface="Lexend Deca" pitchFamily="34" charset="-122"/>
+                <a:cs typeface="Lexend Deca" pitchFamily="34" charset="-120"/>
+              </a:rPr>
+              <a:t/>
+            </a:r>
+            <a:endParaRPr lang="en-US" sz="2000" dirty="0"/>
+          </a:p>
+        </p:txBody>
+      </p:sp>
+      <p:sp>
+        <p:nvSpPr>
+          <p:cNvPr id="98" name="Option"/>
+          <p:cNvSpPr/>
+          <p:nvPr/>
+        </p:nvSpPr>
+        <p:spPr>
+          <a:xfrm>
+            <a:off x="9272016" y="5614416"/>
+            <a:ext cx="1755648" cy="438912"/>
+          </a:xfrm>
+          <a:prstGeom prst="roundRect">
+            <a:avLst>
+              <a:gd name="adj" fmla="val 22000"/>
+            </a:avLst>
+          </a:prstGeom>
+          <a:solidFill>
+            <a:srgbClr val="FFFFFF"/>
+          </a:solidFill>
+          <a:ln w="38100">
+            <a:noFill/>
+          </a:ln>
+        </p:spPr>
+        <p:txBody>
+          <a:bodyPr wrap="square" lIns="36576" tIns="36576" rIns="36576" bIns="36576" rtlCol="0" anchor="ctr">
+            <a:noAutofit/>
+          </a:bodyPr>
+          <a:lstStyle/>
+          <a:p>
+            <a:pPr algn="ctr" indent="0" marL="0">
+              <a:buNone/>
+            </a:pPr>
+            <a:r>
+              <a:rPr lang="en-US" sz="2000" dirty="0">
+                <a:solidFill>
+                  <a:srgbClr val="1B2236"/>
+                </a:solidFill>
+                <a:latin typeface="Lexend Deca" pitchFamily="34" charset="0"/>
+                <a:ea typeface="Lexend Deca" pitchFamily="34" charset="-122"/>
+                <a:cs typeface="Lexend Deca" pitchFamily="34" charset="-120"/>
+              </a:rPr>
+              <a:t>30 minutes</a:t>
+            </a:r>
+            <a:endParaRPr lang="en-US" sz="2000" dirty="0"/>
+          </a:p>
+        </p:txBody>
+      </p:sp>
+    </p:spTree>
+  </p:cSld>
+  <p:clrMapOvr>
+    <a:masterClrMapping/>
+  </p:clrMapOvr>
+  <p:timing>
+    <p:tnLst>
+      <p:par>
+        <p:cTn id="1" dur="indefinite" restart="never" nodeType="tmRoot">
+          <p:childTnLst>
+            <p:seq concurrent="1" nextAc="seek">
+              <p:cTn id="2" dur="indefinite" nodeType="mainSeq">
+                <p:childTnLst>
+                  <p:par>
+                    <p:cTn id="3" fill="hold">
+                      <p:stCondLst>
+                        <p:cond delay="indefinite"/>
+                      </p:stCondLst>
+                      <p:childTnLst>
+                        <p:par>
+                          <p:cTn id="4" fill="hold">
+                            <p:stCondLst>
+                              <p:cond delay="0"/>
+                            </p:stCondLst>
+                            <p:childTnLst>
+                              <p:par>
+                                <p:cTn id="5" presetID="10" presetClass="entr" presetSubtype="0" fill="hold" nodeType="clickEffect">
+                                  <p:stCondLst>
+                                    <p:cond delay="0"/>
+                                  </p:stCondLst>
+                                  <p:childTnLst>
+                                    <p:set>
+                                      <p:cBhvr>
+                                        <p:cTn id="6" dur="1" fill="hold">
+                                          <p:stCondLst>
+                                            <p:cond delay="0"/>
+                                          </p:stCondLst>
+                                        </p:cTn>
+                                        <p:tgtEl>
+                                          <p:spTgt spid="72"/>
+                                        </p:tgtEl>
+                                        <p:attrNameLst>
+                                          <p:attrName>style.visibility</p:attrName>
+                                        </p:attrNameLst>
+                                      </p:cBhvr>
+                                      <p:to>
+                                        <p:strVal val="visible"/>
+                                      </p:to>
+                                    </p:set>
+                                    <p:animEffect transition="in" filter="fade">
+                                      <p:cBhvr>
+                                        <p:cTn id="7" dur="400"/>
+                                        <p:tgtEl>
+                                          <p:spTgt spid="72"/>
+                                        </p:tgtEl>
+                                      </p:cBhvr>
+                                    </p:animEffect>
+                                  </p:childTnLst>
+                                </p:cTn>
+                              </p:par>
+                            </p:childTnLst>
+                          </p:cTn>
+                        </p:par>
+                      </p:childTnLst>
+                    </p:cTn>
+                  </p:par>
+                  <p:par>
+                    <p:cTn id="8" fill="hold">
+                      <p:stCondLst>
+                        <p:cond delay="indefinite"/>
+                      </p:stCondLst>
+                      <p:childTnLst>
+                        <p:par>
+                          <p:cTn id="9" fill="hold">
+                            <p:stCondLst>
+                              <p:cond delay="0"/>
+                            </p:stCondLst>
+                            <p:childTnLst>
+                              <p:par>
+                                <p:cTn id="10" presetID="10" presetClass="entr" presetSubtype="0" fill="hold" nodeType="clickEffect">
+                                  <p:stCondLst>
+                                    <p:cond delay="0"/>
+                                  </p:stCondLst>
+                                  <p:childTnLst>
+                                    <p:set>
+                                      <p:cBhvr>
+                                        <p:cTn id="11" dur="1" fill="hold">
+                                          <p:stCondLst>
+                                            <p:cond delay="0"/>
+                                          </p:stCondLst>
+                                        </p:cTn>
+                                        <p:tgtEl>
+                                          <p:spTgt spid="81"/>
+                                        </p:tgtEl>
+                                        <p:attrNameLst>
+                                          <p:attrName>style.visibility</p:attrName>
+                                        </p:attrNameLst>
+                                      </p:cBhvr>
+                                      <p:to>
+                                        <p:strVal val="visible"/>
+                                      </p:to>
+                                    </p:set>
+                                    <p:animEffect transition="in" filter="fade">
+                                      <p:cBhvr>
+                                        <p:cTn id="12" dur="400"/>
+                                        <p:tgtEl>
+                                          <p:spTgt spid="81"/>
+                                        </p:tgtEl>
+                                      </p:cBhvr>
+                                    </p:animEffect>
+                                  </p:childTnLst>
+                                </p:cTn>
+                              </p:par>
+                            </p:childTnLst>
+                          </p:cTn>
+                        </p:par>
+                      </p:childTnLst>
+                    </p:cTn>
+                  </p:par>
+                  <p:par>
+                    <p:cTn id="13" fill="hold">
+                      <p:stCondLst>
+                        <p:cond delay="indefinite"/>
+                      </p:stCondLst>
+                      <p:childTnLst>
+                        <p:par>
+                          <p:cTn id="14" fill="hold">
+                            <p:stCondLst>
+                              <p:cond delay="0"/>
+                            </p:stCondLst>
+                            <p:childTnLst>
+                              <p:par>
+                                <p:cTn id="15" presetID="10" presetClass="entr" presetSubtype="0" fill="hold" nodeType="clickEffect">
+                                  <p:stCondLst>
+                                    <p:cond delay="0"/>
+                                  </p:stCondLst>
+                                  <p:childTnLst>
+                                    <p:set>
+                                      <p:cBhvr>
+                                        <p:cTn id="16" dur="1" fill="hold">
+                                          <p:stCondLst>
+                                            <p:cond delay="0"/>
+                                          </p:stCondLst>
+                                        </p:cTn>
+                                        <p:tgtEl>
+                                          <p:spTgt spid="90"/>
+                                        </p:tgtEl>
+                                        <p:attrNameLst>
+                                          <p:attrName>style.visibility</p:attrName>
+                                        </p:attrNameLst>
+                                      </p:cBhvr>
+                                      <p:to>
+                                        <p:strVal val="visible"/>
+                                      </p:to>
+                                    </p:set>
+                                    <p:animEffect transition="in" filter="fade">
+                                      <p:cBhvr>
+                                        <p:cTn id="17" dur="400"/>
+                                        <p:tgtEl>
+                                          <p:spTgt spid="90"/>
+                                        </p:tgtEl>
+                                      </p:cBhvr>
+                                    </p:animEffect>
+                                  </p:childTnLst>
+                                </p:cTn>
+                              </p:par>
+                            </p:childTnLst>
+                          </p:cTn>
+                        </p:par>
+                      </p:childTnLst>
+                    </p:cTn>
+                  </p:par>
+                  <p:par>
+                    <p:cTn id="18" fill="hold">
+                      <p:stCondLst>
+                        <p:cond delay="indefinite"/>
+                      </p:stCondLst>
+                      <p:childTnLst>
+                        <p:par>
+                          <p:cTn id="19" fill="hold">
+                            <p:stCondLst>
+                              <p:cond delay="0"/>
+                            </p:stCondLst>
+                            <p:childTnLst>
+                              <p:par>
+                                <p:cTn id="20" presetID="10" presetClass="entr" presetSubtype="0" fill="hold" nodeType="clickEffect">
+                                  <p:stCondLst>
+                                    <p:cond delay="0"/>
+                                  </p:stCondLst>
+                                  <p:childTnLst>
+                                    <p:set>
+                                      <p:cBhvr>
+                                        <p:cTn id="21" dur="1" fill="hold">
+                                          <p:stCondLst>
+                                            <p:cond delay="0"/>
+                                          </p:stCondLst>
+                                        </p:cTn>
+                                        <p:tgtEl>
+                                          <p:spTgt spid="97"/>
+                                        </p:tgtEl>
+                                        <p:attrNameLst>
+                                          <p:attrName>style.visibility</p:attrName>
+                                        </p:attrNameLst>
+                                      </p:cBhvr>
+                                      <p:to>
+                                        <p:strVal val="visible"/>
+                                      </p:to>
+                                    </p:set>
+                                    <p:animEffect transition="in" filter="fade">
+                                      <p:cBhvr>
+                                        <p:cTn id="22" dur="400"/>
+                                        <p:tgtEl>
+                                          <p:spTgt spid="97"/>
+                                        </p:tgtEl>
+                                      </p:cBhvr>
+                                    </p:animEffect>
+                                  </p:childTnLst>
+                                </p:cTn>
+                              </p:par>
+                            </p:childTnLst>
+                          </p:cTn>
+                        </p:par>
+                      </p:childTnLst>
+                    </p:cTn>
+                  </p:par>
+                </p:childTnLst>
+              </p:cTn>
+              <p:prevCondLst>
+                <p:cond evt="onPrev" delay="0">
+                  <p:tgtEl>
+                    <p:sldTgt/>
+                  </p:tgtEl>
+                </p:cond>
+              </p:prevCondLst>
+              <p:nextCondLst>
+                <p:cond evt="onNext" delay="0">
+                  <p:tgtEl>
+                    <p:sldTgt/>
+                  </p:tgtEl>
+                </p:cond>
+              </p:nextCondLst>
+            </p:seq>
+          </p:childTnLst>
+        </p:cTn>
+      </p:par>
+    </p:tnLst>
+  </p:timing>
+</p:sld>
+</file>
+
 <file path=ppt/slides/slide8.xml><?xml version="1.0" encoding="utf-8"?>
 <p:sld xmlns:a="http://schemas.openxmlformats.org/drawingml/2006/main" xmlns:r="http://schemas.openxmlformats.org/officeDocument/2006/relationships" xmlns:p="http://schemas.openxmlformats.org/presentationml/2006/main">
   <p:cSld name="Slide 12">
@@ -21648,7 +21809,7 @@
 
 <file path=ppt/slides/slide9.xml><?xml version="1.0" encoding="utf-8"?>
 <p:sld xmlns:a="http://schemas.openxmlformats.org/drawingml/2006/main" xmlns:r="http://schemas.openxmlformats.org/officeDocument/2006/relationships" xmlns:p="http://schemas.openxmlformats.org/presentationml/2006/main">
-  <p:cSld name="Slide 9">
+  <p:cSld name="Slide 4">
     <p:bg>
       <p:bgPr>
         <a:solidFill>
@@ -21678,32 +21839,8 @@
         </p:nvSpPr>
         <p:spPr>
           <a:xfrm>
-            <a:off x="0" y="0"/>
-            <a:ext cx="3063240" cy="6858000"/>
-          </a:xfrm>
-          <a:prstGeom prst="rect">
-            <a:avLst/>
-          </a:prstGeom>
-          <a:solidFill>
-            <a:srgbClr val="B9D2F7"/>
-          </a:solidFill>
-          <a:ln/>
-        </p:spPr>
-        <p:txBody>
-          <a:bodyPr/>
-          <a:p/>
-        </p:txBody>
-      </p:sp>
-      <p:sp>
-        <p:nvSpPr>
-          <p:cNvPr id="4" name="Shape 2"/>
-          <p:cNvSpPr/>
-          <p:nvPr/>
-        </p:nvSpPr>
-        <p:spPr>
-          <a:xfrm>
-            <a:off x="8156448" y="1289304"/>
-            <a:ext cx="3429000" cy="4983480"/>
+            <a:off x="6742786" y="3649370"/>
+            <a:ext cx="4912157" cy="2561234"/>
           </a:xfrm>
           <a:prstGeom prst="round1Rect">
             <a:avLst>
@@ -21711,9 +21848,14 @@
             </a:avLst>
           </a:prstGeom>
           <a:solidFill>
-            <a:srgbClr val="8FAFE3"/>
-          </a:solidFill>
-          <a:ln/>
+            <a:srgbClr val="B9D2F7"/>
+          </a:solidFill>
+          <a:ln w="76200">
+            <a:solidFill>
+              <a:srgbClr val="FFFFFF"/>
+            </a:solidFill>
+            <a:prstDash val="solid"/>
+          </a:ln>
         </p:spPr>
         <p:txBody>
           <a:bodyPr/>
@@ -21728,8 +21870,133 @@
         </p:nvSpPr>
         <p:spPr>
           <a:xfrm>
-            <a:off x="8321040" y="1097280"/>
-            <a:ext cx="3429000" cy="4983480"/>
+            <a:off x="560116" y="1350752"/>
+            <a:ext cx="5663794" cy="1566367"/>
+          </a:xfrm>
+          <a:prstGeom prst="roundRect">
+            <a:avLst>
+              <a:gd name="adj" fmla="val 16667"/>
+            </a:avLst>
+          </a:prstGeom>
+          <a:solidFill>
+            <a:srgbClr val="8FAFE3"/>
+          </a:solidFill>
+          <a:ln/>
+        </p:spPr>
+        <p:txBody>
+          <a:bodyPr/>
+          <a:p/>
+        </p:txBody>
+      </p:sp>
+      <p:sp>
+        <p:nvSpPr>
+          <p:cNvPr id="6" name="Shape 4"/>
+          <p:cNvSpPr/>
+          <p:nvPr/>
+        </p:nvSpPr>
+        <p:spPr>
+          <a:xfrm>
+            <a:off x="593446" y="1286561"/>
+            <a:ext cx="5663794" cy="1566367"/>
+          </a:xfrm>
+          <a:prstGeom prst="roundRect">
+            <a:avLst>
+              <a:gd name="adj" fmla="val 16667"/>
+            </a:avLst>
+          </a:prstGeom>
+          <a:solidFill>
+            <a:srgbClr val="FFFFFF"/>
+          </a:solidFill>
+          <a:ln/>
+        </p:spPr>
+        <p:txBody>
+          <a:bodyPr/>
+          <a:p/>
+        </p:txBody>
+      </p:sp>
+      <p:sp>
+        <p:nvSpPr>
+          <p:cNvPr id="7" name="Text 5"/>
+          <p:cNvSpPr/>
+          <p:nvPr/>
+        </p:nvSpPr>
+        <p:spPr>
+          <a:xfrm>
+            <a:off x="832104" y="1371600"/>
+            <a:ext cx="5257800" cy="1417320"/>
+          </a:xfrm>
+          <a:prstGeom prst="rect">
+            <a:avLst/>
+          </a:prstGeom>
+          <a:noFill/>
+          <a:ln/>
+        </p:spPr>
+        <p:txBody>
+          <a:bodyPr wrap="square" rtlCol="0" anchor="ctr"/>
+          <a:lstStyle/>
+          <a:p>
+            <a:pPr algn="l" indent="0" marL="0">
+              <a:buNone/>
+            </a:pPr>
+            <a:r>
+              <a:rPr lang="en-US" sz="2000" dirty="0" b="1">
+                <a:solidFill>
+                  <a:srgbClr val="5B3FC4"/>
+                </a:solidFill>
+                <a:latin typeface="Lexend Deca" pitchFamily="34" charset="0"/>
+                <a:ea typeface="Lexend Deca" pitchFamily="34" charset="-122"/>
+                <a:cs typeface="Lexend Deca" pitchFamily="34" charset="-120"/>
+              </a:rPr>
+              <a:t>Grammar Box 1</a:t>
+            </a:r>
+            <a:endParaRPr lang="en-US" sz="2000" dirty="0"/>
+          </a:p>
+          <a:p>
+            <a:pPr algn="l" indent="0" marL="0">
+              <a:buNone/>
+            </a:pPr>
+            <a:r>
+              <a:rPr lang="en-US" sz="3200" dirty="0" b="1">
+                <a:solidFill>
+                  <a:srgbClr val="1B2236"/>
+                </a:solidFill>
+                <a:latin typeface="Lexend Deca" pitchFamily="34" charset="0"/>
+                <a:ea typeface="Lexend Deca" pitchFamily="34" charset="-122"/>
+                <a:cs typeface="Lexend Deca" pitchFamily="34" charset="-120"/>
+              </a:rPr>
+              <a:t>How was ...?</a:t>
+            </a:r>
+            <a:endParaRPr lang="en-US" sz="3200" dirty="0"/>
+          </a:p>
+          <a:p>
+            <a:pPr algn="l" indent="0" marL="0">
+              <a:buNone/>
+            </a:pPr>
+            <a:r>
+              <a:rPr lang="en-US" sz="3200" dirty="0" b="1">
+                <a:solidFill>
+                  <a:srgbClr val="1B2236"/>
+                </a:solidFill>
+                <a:latin typeface="Lexend Deca" pitchFamily="34" charset="0"/>
+                <a:ea typeface="Lexend Deca" pitchFamily="34" charset="-122"/>
+                <a:cs typeface="Lexend Deca" pitchFamily="34" charset="-120"/>
+              </a:rPr>
+              <a:t>Was it ...?</a:t>
+            </a:r>
+            <a:endParaRPr lang="en-US" sz="3200" dirty="0"/>
+          </a:p>
+        </p:txBody>
+      </p:sp>
+      <p:sp>
+        <p:nvSpPr>
+          <p:cNvPr id="8" name="Shape 6"/>
+          <p:cNvSpPr/>
+          <p:nvPr/>
+        </p:nvSpPr>
+        <p:spPr>
+          <a:xfrm>
+            <a:off x="1305763" y="3649370"/>
+            <a:ext cx="4790542" cy="2599639"/>
           </a:xfrm>
           <a:prstGeom prst="round1Rect">
             <a:avLst>
@@ -21737,9 +22004,14 @@
             </a:avLst>
           </a:prstGeom>
           <a:solidFill>
-            <a:srgbClr val="B9D2F7"/>
-          </a:solidFill>
-          <a:ln/>
+            <a:srgbClr val="FFFFFF"/>
+          </a:solidFill>
+          <a:ln w="25400">
+            <a:solidFill>
+              <a:srgbClr val="8FAFE3"/>
+            </a:solidFill>
+            <a:prstDash val="solid"/>
+          </a:ln>
         </p:spPr>
         <p:txBody>
           <a:bodyPr/>
@@ -21748,19 +22020,17 @@
       </p:sp>
       <p:sp>
         <p:nvSpPr>
-          <p:cNvPr id="6" name="Shape 4"/>
-          <p:cNvSpPr/>
-          <p:nvPr/>
-        </p:nvSpPr>
-        <p:spPr>
-          <a:xfrm>
-            <a:off x="3394847" y="1032586"/>
-            <a:ext cx="4424782" cy="1863547"/>
-          </a:xfrm>
-          <a:prstGeom prst="roundRect">
-            <a:avLst>
-              <a:gd name="adj" fmla="val 16667"/>
-            </a:avLst>
+          <p:cNvPr id="15" name="Shape 13"/>
+          <p:cNvSpPr/>
+          <p:nvPr/>
+        </p:nvSpPr>
+        <p:spPr>
+          <a:xfrm>
+            <a:off x="741578" y="3253435"/>
+            <a:ext cx="1024128" cy="967435"/>
+          </a:xfrm>
+          <a:prstGeom prst="star10">
+            <a:avLst/>
           </a:prstGeom>
           <a:solidFill>
             <a:srgbClr val="8FAFE3"/>
@@ -21774,22 +22044,20 @@
       </p:sp>
       <p:sp>
         <p:nvSpPr>
-          <p:cNvPr id="7" name="Shape 5"/>
-          <p:cNvSpPr/>
-          <p:nvPr/>
-        </p:nvSpPr>
-        <p:spPr>
-          <a:xfrm>
-            <a:off x="3420770" y="956462"/>
-            <a:ext cx="4424782" cy="1863547"/>
-          </a:xfrm>
-          <a:prstGeom prst="roundRect">
-            <a:avLst>
-              <a:gd name="adj" fmla="val 16667"/>
-            </a:avLst>
-          </a:prstGeom>
-          <a:solidFill>
-            <a:srgbClr val="FFFFFF"/>
+          <p:cNvPr id="16" name="Shape 14"/>
+          <p:cNvSpPr/>
+          <p:nvPr/>
+        </p:nvSpPr>
+        <p:spPr>
+          <a:xfrm>
+            <a:off x="823874" y="3240634"/>
+            <a:ext cx="1042416" cy="1042416"/>
+          </a:xfrm>
+          <a:prstGeom prst="star10">
+            <a:avLst/>
+          </a:prstGeom>
+          <a:solidFill>
+            <a:srgbClr val="FFE28C"/>
           </a:solidFill>
           <a:ln/>
         </p:spPr>
@@ -21800,146 +22068,31 @@
       </p:sp>
       <p:sp>
         <p:nvSpPr>
-          <p:cNvPr id="8" name="Text 6"/>
-          <p:cNvSpPr/>
-          <p:nvPr/>
-        </p:nvSpPr>
-        <p:spPr>
-          <a:xfrm>
-            <a:off x="3566160" y="1078992"/>
-            <a:ext cx="4114800" cy="749808"/>
-          </a:xfrm>
-          <a:prstGeom prst="rect">
-            <a:avLst/>
-          </a:prstGeom>
-          <a:noFill/>
+          <p:cNvPr id="17" name="Shape 15"/>
+          <p:cNvSpPr/>
+          <p:nvPr/>
+        </p:nvSpPr>
+        <p:spPr>
+          <a:xfrm rot="900000">
+            <a:off x="1107338" y="3539642"/>
+            <a:ext cx="445313" cy="445313"/>
+          </a:xfrm>
+          <a:prstGeom prst="mathPlus">
+            <a:avLst/>
+          </a:prstGeom>
+          <a:solidFill>
+            <a:srgbClr val="1B2236"/>
+          </a:solidFill>
           <a:ln/>
         </p:spPr>
         <p:txBody>
-          <a:bodyPr wrap="square" rtlCol="0" anchor="ctr"/>
-          <a:lstStyle/>
-          <a:p>
-            <a:pPr algn="l" indent="0" marL="0">
-              <a:buNone/>
-            </a:pPr>
-            <a:r>
-              <a:rPr lang="en-US" sz="4400" dirty="0" b="1">
-                <a:solidFill>
-                  <a:srgbClr val="1B2236"/>
-                </a:solidFill>
-                <a:latin typeface="Lexend Deca" pitchFamily="34" charset="0"/>
-                <a:ea typeface="Lexend Deca" pitchFamily="34" charset="-122"/>
-                <a:cs typeface="Lexend Deca" pitchFamily="34" charset="-120"/>
-              </a:rPr>
-              <a:t>What did</a:t>
-            </a:r>
-            <a:endParaRPr lang="en-US" sz="4400" dirty="0"/>
-          </a:p>
-        </p:txBody>
-      </p:sp>
-      <p:sp>
-        <p:nvSpPr>
-          <p:cNvPr id="9" name="Text 7"/>
-          <p:cNvSpPr/>
-          <p:nvPr/>
-        </p:nvSpPr>
-        <p:spPr>
-          <a:xfrm>
-            <a:off x="3566160" y="1828800"/>
-            <a:ext cx="4114800" cy="822960"/>
-          </a:xfrm>
-          <a:prstGeom prst="rect">
-            <a:avLst/>
-          </a:prstGeom>
-          <a:noFill/>
-          <a:ln/>
-        </p:spPr>
-        <p:txBody>
-          <a:bodyPr wrap="square" rtlCol="0" anchor="ctr"/>
-          <a:lstStyle/>
-          <a:p>
-            <a:pPr algn="l" indent="0" marL="0">
-              <a:buNone/>
-            </a:pPr>
-            <a:r>
-              <a:rPr lang="en-US" sz="4400" dirty="0" b="1">
-                <a:solidFill>
-                  <a:srgbClr val="1B2236"/>
-                </a:solidFill>
-                <a:latin typeface="Lexend Deca" pitchFamily="34" charset="0"/>
-                <a:ea typeface="Lexend Deca" pitchFamily="34" charset="-122"/>
-                <a:cs typeface="Lexend Deca" pitchFamily="34" charset="-120"/>
-              </a:rPr>
-              <a:t>you do?</a:t>
-            </a:r>
-            <a:endParaRPr lang="en-US" sz="4400" dirty="0"/>
-          </a:p>
-        </p:txBody>
-      </p:sp>
-      <p:sp>
-        <p:nvSpPr>
-          <p:cNvPr id="10" name="Text 8"/>
-          <p:cNvSpPr/>
-          <p:nvPr/>
-        </p:nvSpPr>
-        <p:spPr>
-          <a:xfrm>
-            <a:off x="3487522" y="3108960"/>
-            <a:ext cx="4206240" cy="868680"/>
-          </a:xfrm>
-          <a:prstGeom prst="rect">
-            <a:avLst/>
-          </a:prstGeom>
-          <a:noFill/>
-          <a:ln/>
-        </p:spPr>
-        <p:txBody>
-          <a:bodyPr wrap="square" lIns="0" tIns="0" rIns="0" bIns="0" rtlCol="0" anchor="ctr"/>
-          <a:lstStyle/>
-          <a:p>
-            <a:pPr algn="l" indent="0" marL="0">
-              <a:buNone/>
-            </a:pPr>
-            <a:r>
-              <a:rPr lang="en-US" sz="2000" dirty="0">
-                <a:solidFill>
-                  <a:srgbClr val="1B2236"/>
-                </a:solidFill>
-                <a:latin typeface="Lexend Deca" pitchFamily="34" charset="0"/>
-                <a:ea typeface="Lexend Deca" pitchFamily="34" charset="-122"/>
-                <a:cs typeface="Lexend Deca" pitchFamily="34" charset="-120"/>
-              </a:rPr>
-              <a:t>Answer with </a:t>
-            </a:r>
-            <a:r>
-              <a:rPr lang="en-US" sz="2000" dirty="0" b="1">
-                <a:solidFill>
-                  <a:srgbClr val="5B3FC4"/>
-                </a:solidFill>
-                <a:latin typeface="Lexend Deca" pitchFamily="34" charset="0"/>
-                <a:ea typeface="Lexend Deca" pitchFamily="34" charset="-122"/>
-                <a:cs typeface="Lexend Deca" pitchFamily="34" charset="-120"/>
-              </a:rPr>
-              <a:t>-ed</a:t>
-            </a:r>
-            <a:r>
-              <a:rPr lang="en-US" sz="2000" dirty="0">
-                <a:solidFill>
-                  <a:srgbClr val="1B2236"/>
-                </a:solidFill>
-                <a:latin typeface="Lexend Deca" pitchFamily="34" charset="0"/>
-                <a:ea typeface="Lexend Deca" pitchFamily="34" charset="-122"/>
-                <a:cs typeface="Lexend Deca" pitchFamily="34" charset="-120"/>
-              </a:rPr>
-              <a:t>.</a:t>
-            </a:r>
-            <a:endParaRPr lang="en-US" sz="2000" dirty="0"/>
-          </a:p>
+          <a:bodyPr/>
+          <a:p/>
         </p:txBody>
       </p:sp>
       <p:pic>
         <p:nvPicPr>
-          <p:cNvPr id="65" name="Picture 65" descr="L5_cleaned_the_house.png"/>
+          <p:cNvPr id="42" name="Picture 42" descr="L5_fun.png"/>
           <p:cNvPicPr>
             <a:picLocks noChangeAspect="1"/>
           </p:cNvPicPr>
@@ -21953,8 +22106,8 @@
         </p:blipFill>
         <p:spPr>
           <a:xfrm>
-            <a:off x="160020" y="2423160"/>
-            <a:ext cx="2743200" cy="1920240"/>
+            <a:off x="7598664" y="1216152"/>
+            <a:ext cx="3254350" cy="2278045"/>
           </a:xfrm>
           <a:prstGeom prst="rect">
             <a:avLst/>
@@ -21963,14 +22116,14 @@
       </p:pic>
       <p:sp>
         <p:nvSpPr>
-          <p:cNvPr id="66" name="Wh"/>
-          <p:cNvSpPr/>
-          <p:nvPr/>
-        </p:nvSpPr>
-        <p:spPr>
-          <a:xfrm>
-            <a:off x="3520440" y="4114800"/>
-            <a:ext cx="907999" cy="530352"/>
+          <p:cNvPr id="43" name="Q head"/>
+          <p:cNvSpPr/>
+          <p:nvPr/>
+        </p:nvSpPr>
+        <p:spPr>
+          <a:xfrm>
+            <a:off x="1920240" y="3794760"/>
+            <a:ext cx="4023360" cy="457200"/>
           </a:xfrm>
           <a:prstGeom prst="rect">
             <a:avLst/>
@@ -21981,7 +22134,7 @@
           </a:ln>
         </p:spPr>
         <p:txBody>
-          <a:bodyPr wrap="square" lIns="0" tIns="36576" rIns="0" bIns="36576" rtlCol="0" anchor="ctr">
+          <a:bodyPr wrap="square" lIns="73152" tIns="36576" rIns="73152" bIns="36576" rtlCol="0" anchor="ctr">
             <a:noAutofit/>
           </a:bodyPr>
           <a:lstStyle/>
@@ -21990,30 +22143,73 @@
               <a:buNone/>
             </a:pPr>
             <a:r>
-              <a:rPr lang="en-US" sz="2200" dirty="0">
-                <a:solidFill>
-                  <a:srgbClr val="1B2236"/>
-                </a:solidFill>
-                <a:latin typeface="Lexend Deca" pitchFamily="34" charset="0"/>
-                <a:ea typeface="Lexend Deca" pitchFamily="34" charset="-122"/>
-                <a:cs typeface="Lexend Deca" pitchFamily="34" charset="-120"/>
-              </a:rPr>
-              <a:t>What</a:t>
-            </a:r>
-            <a:endParaRPr lang="en-US" sz="2200" dirty="0"/>
-          </a:p>
-        </p:txBody>
-      </p:sp>
-      <p:sp>
-        <p:nvSpPr>
-          <p:cNvPr id="67" name="Highlight"/>
-          <p:cNvSpPr/>
-          <p:nvPr/>
-        </p:nvSpPr>
-        <p:spPr>
-          <a:xfrm>
-            <a:off x="4428439" y="4114800"/>
-            <a:ext cx="799551" cy="530352"/>
+              <a:rPr lang="en-US" sz="2000" dirty="0" b="1">
+                <a:solidFill>
+                  <a:srgbClr val="5B3FC4"/>
+                </a:solidFill>
+                <a:latin typeface="Lexend Deca" pitchFamily="34" charset="0"/>
+                <a:ea typeface="Lexend Deca" pitchFamily="34" charset="-122"/>
+                <a:cs typeface="Lexend Deca" pitchFamily="34" charset="-120"/>
+              </a:rPr>
+              <a:t>QUESTION</a:t>
+            </a:r>
+            <a:endParaRPr lang="en-US" sz="2000" dirty="0"/>
+          </a:p>
+        </p:txBody>
+      </p:sp>
+      <p:sp>
+        <p:nvSpPr>
+          <p:cNvPr id="44" name="A head"/>
+          <p:cNvSpPr/>
+          <p:nvPr/>
+        </p:nvSpPr>
+        <p:spPr>
+          <a:xfrm>
+            <a:off x="7040880" y="3794760"/>
+            <a:ext cx="4480560" cy="457200"/>
+          </a:xfrm>
+          <a:prstGeom prst="rect">
+            <a:avLst/>
+          </a:prstGeom>
+          <a:noFill/>
+          <a:ln w="38100">
+            <a:noFill/>
+          </a:ln>
+        </p:spPr>
+        <p:txBody>
+          <a:bodyPr wrap="square" lIns="73152" tIns="36576" rIns="73152" bIns="36576" rtlCol="0" anchor="ctr">
+            <a:noAutofit/>
+          </a:bodyPr>
+          <a:lstStyle/>
+          <a:p>
+            <a:pPr algn="l" indent="0" marL="0">
+              <a:buNone/>
+            </a:pPr>
+            <a:r>
+              <a:rPr lang="en-US" sz="2000" dirty="0" b="1">
+                <a:solidFill>
+                  <a:srgbClr val="5B3FC4"/>
+                </a:solidFill>
+                <a:latin typeface="Lexend Deca" pitchFamily="34" charset="0"/>
+                <a:ea typeface="Lexend Deca" pitchFamily="34" charset="-122"/>
+                <a:cs typeface="Lexend Deca" pitchFamily="34" charset="-120"/>
+              </a:rPr>
+              <a:t>ANSWER</a:t>
+            </a:r>
+            <a:endParaRPr lang="en-US" sz="2000" dirty="0"/>
+          </a:p>
+        </p:txBody>
+      </p:sp>
+      <p:sp>
+        <p:nvSpPr>
+          <p:cNvPr id="45" name="Highlight"/>
+          <p:cNvSpPr/>
+          <p:nvPr/>
+        </p:nvSpPr>
+        <p:spPr>
+          <a:xfrm>
+            <a:off x="1481328" y="4453128"/>
+            <a:ext cx="1188720" cy="548640"/>
           </a:xfrm>
           <a:prstGeom prst="roundRect">
             <a:avLst>
@@ -22053,14 +22249,14 @@
       </p:sp>
       <p:sp>
         <p:nvSpPr>
-          <p:cNvPr id="68" name="Helper"/>
-          <p:cNvSpPr/>
-          <p:nvPr/>
-        </p:nvSpPr>
-        <p:spPr>
-          <a:xfrm>
-            <a:off x="4428439" y="4114800"/>
-            <a:ext cx="799551" cy="530352"/>
+          <p:cNvPr id="46" name="Helper"/>
+          <p:cNvSpPr/>
+          <p:nvPr/>
+        </p:nvSpPr>
+        <p:spPr>
+          <a:xfrm>
+            <a:off x="1481328" y="4315968"/>
+            <a:ext cx="1188720" cy="822960"/>
           </a:xfrm>
           <a:prstGeom prst="rect">
             <a:avLst/>
@@ -22071,7 +22267,7 @@
           </a:ln>
         </p:spPr>
         <p:txBody>
-          <a:bodyPr wrap="square" lIns="0" tIns="36576" rIns="0" bIns="36576" rtlCol="0" anchor="ctr">
+          <a:bodyPr wrap="square" lIns="73152" tIns="36576" rIns="73152" bIns="36576" rtlCol="0" anchor="ctr">
             <a:noAutofit/>
           </a:bodyPr>
           <a:lstStyle/>
@@ -22080,30 +22276,30 @@
               <a:buNone/>
             </a:pPr>
             <a:r>
-              <a:rPr lang="en-US" sz="2200" dirty="0" b="1">
-                <a:solidFill>
-                  <a:srgbClr val="1B2236"/>
-                </a:solidFill>
-                <a:latin typeface="Lexend Deca" pitchFamily="34" charset="0"/>
-                <a:ea typeface="Lexend Deca" pitchFamily="34" charset="-122"/>
-                <a:cs typeface="Lexend Deca" pitchFamily="34" charset="-120"/>
-              </a:rPr>
-              <a:t>did</a:t>
-            </a:r>
-            <a:endParaRPr lang="en-US" sz="2200" dirty="0"/>
-          </a:p>
-        </p:txBody>
-      </p:sp>
-      <p:sp>
-        <p:nvSpPr>
-          <p:cNvPr id="69" name="Rest"/>
-          <p:cNvSpPr/>
-          <p:nvPr/>
-        </p:nvSpPr>
-        <p:spPr>
-          <a:xfrm>
-            <a:off x="5282855" y="4114800"/>
-            <a:ext cx="1239012" cy="530352"/>
+              <a:rPr lang="en-US" sz="2600" dirty="0" b="1">
+                <a:solidFill>
+                  <a:srgbClr val="1B2236"/>
+                </a:solidFill>
+                <a:latin typeface="Lexend Deca" pitchFamily="34" charset="0"/>
+                <a:ea typeface="Lexend Deca" pitchFamily="34" charset="-122"/>
+                <a:cs typeface="Lexend Deca" pitchFamily="34" charset="-120"/>
+              </a:rPr>
+              <a:t>How</a:t>
+            </a:r>
+            <a:endParaRPr lang="en-US" sz="2600" dirty="0"/>
+          </a:p>
+        </p:txBody>
+      </p:sp>
+      <p:sp>
+        <p:nvSpPr>
+          <p:cNvPr id="47" name="Question"/>
+          <p:cNvSpPr/>
+          <p:nvPr/>
+        </p:nvSpPr>
+        <p:spPr>
+          <a:xfrm>
+            <a:off x="2697480" y="4315968"/>
+            <a:ext cx="3291840" cy="822960"/>
           </a:xfrm>
           <a:prstGeom prst="rect">
             <a:avLst/>
@@ -22114,7 +22310,7 @@
           </a:ln>
         </p:spPr>
         <p:txBody>
-          <a:bodyPr wrap="square" lIns="0" tIns="36576" rIns="0" bIns="36576" rtlCol="0" anchor="ctr">
+          <a:bodyPr wrap="square" lIns="73152" tIns="36576" rIns="73152" bIns="36576" rtlCol="0" anchor="ctr">
             <a:noAutofit/>
           </a:bodyPr>
           <a:lstStyle/>
@@ -22123,6 +22319,17 @@
               <a:buNone/>
             </a:pPr>
             <a:r>
+              <a:rPr lang="en-US" sz="2200" dirty="0" b="1">
+                <a:solidFill>
+                  <a:srgbClr val="1B2236"/>
+                </a:solidFill>
+                <a:latin typeface="Lexend Deca" pitchFamily="34" charset="0"/>
+                <a:ea typeface="Lexend Deca" pitchFamily="34" charset="-122"/>
+                <a:cs typeface="Lexend Deca" pitchFamily="34" charset="-120"/>
+              </a:rPr>
+              <a:t>was</a:t>
+            </a:r>
+            <a:r>
               <a:rPr lang="en-US" sz="2200" dirty="0">
                 <a:solidFill>
                   <a:srgbClr val="1B2236"/>
@@ -22131,7 +22338,7 @@
                 <a:ea typeface="Lexend Deca" pitchFamily="34" charset="-122"/>
                 <a:cs typeface="Lexend Deca" pitchFamily="34" charset="-120"/>
               </a:rPr>
-              <a:t>you do?</a:t>
+              <a:t> your weekend?</a:t>
             </a:r>
             <a:endParaRPr lang="en-US" sz="2200" dirty="0"/>
           </a:p>
@@ -22139,14 +22346,61 @@
       </p:sp>
       <p:sp>
         <p:nvSpPr>
-          <p:cNvPr id="70" name="Wh"/>
-          <p:cNvSpPr/>
-          <p:nvPr/>
-        </p:nvSpPr>
-        <p:spPr>
-          <a:xfrm>
-            <a:off x="3520440" y="4846320"/>
-            <a:ext cx="907999" cy="530352"/>
+          <p:cNvPr id="49" name="Answer bg"/>
+          <p:cNvSpPr/>
+          <p:nvPr/>
+        </p:nvSpPr>
+        <p:spPr>
+          <a:xfrm>
+            <a:off x="6949440" y="4334256"/>
+            <a:ext cx="4526280" cy="786384"/>
+          </a:xfrm>
+          <a:prstGeom prst="roundRect">
+            <a:avLst>
+              <a:gd name="adj" fmla="val 22000"/>
+            </a:avLst>
+          </a:prstGeom>
+          <a:solidFill>
+            <a:srgbClr val="FFFFFF"/>
+          </a:solidFill>
+          <a:ln w="38100">
+            <a:noFill/>
+          </a:ln>
+        </p:spPr>
+        <p:txBody>
+          <a:bodyPr wrap="square" lIns="73152" tIns="36576" rIns="73152" bIns="36576" rtlCol="0" anchor="ctr">
+            <a:noAutofit/>
+          </a:bodyPr>
+          <a:lstStyle/>
+          <a:p>
+            <a:pPr algn="l" indent="0" marL="0">
+              <a:buNone/>
+            </a:pPr>
+            <a:r>
+              <a:rPr lang="en-US" sz="2000" dirty="0">
+                <a:solidFill>
+                  <a:srgbClr val="1B2236"/>
+                </a:solidFill>
+                <a:latin typeface="Lexend Deca" pitchFamily="34" charset="0"/>
+                <a:ea typeface="Lexend Deca" pitchFamily="34" charset="-122"/>
+                <a:cs typeface="Lexend Deca" pitchFamily="34" charset="-120"/>
+              </a:rPr>
+              <a:t/>
+            </a:r>
+            <a:endParaRPr lang="en-US" sz="2000" dirty="0"/>
+          </a:p>
+        </p:txBody>
+      </p:sp>
+      <p:sp>
+        <p:nvSpPr>
+          <p:cNvPr id="48" name="Answer"/>
+          <p:cNvSpPr/>
+          <p:nvPr/>
+        </p:nvSpPr>
+        <p:spPr>
+          <a:xfrm>
+            <a:off x="6949440" y="4315968"/>
+            <a:ext cx="4526280" cy="822960"/>
           </a:xfrm>
           <a:prstGeom prst="rect">
             <a:avLst/>
@@ -22157,7 +22411,7 @@
           </a:ln>
         </p:spPr>
         <p:txBody>
-          <a:bodyPr wrap="square" lIns="0" tIns="36576" rIns="0" bIns="36576" rtlCol="0" anchor="ctr">
+          <a:bodyPr wrap="square" lIns="73152" tIns="36576" rIns="73152" bIns="36576" rtlCol="0" anchor="ctr">
             <a:noAutofit/>
           </a:bodyPr>
           <a:lstStyle/>
@@ -22174,22 +22428,83 @@
                 <a:ea typeface="Lexend Deca" pitchFamily="34" charset="-122"/>
                 <a:cs typeface="Lexend Deca" pitchFamily="34" charset="-120"/>
               </a:rPr>
-              <a:t>What</a:t>
+              <a:t>It </a:t>
+            </a:r>
+            <a:r>
+              <a:rPr lang="en-US" sz="2200" dirty="0" b="1">
+                <a:solidFill>
+                  <a:srgbClr val="1B2236"/>
+                </a:solidFill>
+                <a:latin typeface="Lexend Deca" pitchFamily="34" charset="0"/>
+                <a:ea typeface="Lexend Deca" pitchFamily="34" charset="-122"/>
+                <a:cs typeface="Lexend Deca" pitchFamily="34" charset="-120"/>
+              </a:rPr>
+              <a:t>was</a:t>
+            </a:r>
+            <a:r>
+              <a:rPr lang="en-US" sz="2200" dirty="0">
+                <a:solidFill>
+                  <a:srgbClr val="1B2236"/>
+                </a:solidFill>
+                <a:latin typeface="Lexend Deca" pitchFamily="34" charset="0"/>
+                <a:ea typeface="Lexend Deca" pitchFamily="34" charset="-122"/>
+                <a:cs typeface="Lexend Deca" pitchFamily="34" charset="-120"/>
+              </a:rPr>
+              <a:t> great.</a:t>
             </a:r>
             <a:endParaRPr lang="en-US" sz="2200" dirty="0"/>
           </a:p>
-        </p:txBody>
-      </p:sp>
-      <p:sp>
-        <p:nvSpPr>
-          <p:cNvPr id="71" name="Highlight"/>
-          <p:cNvSpPr/>
-          <p:nvPr/>
-        </p:nvSpPr>
-        <p:spPr>
-          <a:xfrm>
-            <a:off x="4428439" y="4846320"/>
-            <a:ext cx="799551" cy="530352"/>
+          <a:p>
+            <a:pPr algn="l" indent="0" marL="0">
+              <a:buNone/>
+            </a:pPr>
+            <a:r>
+              <a:rPr lang="en-US" sz="2200" dirty="0">
+                <a:solidFill>
+                  <a:srgbClr val="1B2236"/>
+                </a:solidFill>
+                <a:latin typeface="Lexend Deca" pitchFamily="34" charset="0"/>
+                <a:ea typeface="Lexend Deca" pitchFamily="34" charset="-122"/>
+                <a:cs typeface="Lexend Deca" pitchFamily="34" charset="-120"/>
+              </a:rPr>
+              <a:t>It </a:t>
+            </a:r>
+            <a:r>
+              <a:rPr lang="en-US" sz="2200" dirty="0" b="1">
+                <a:solidFill>
+                  <a:srgbClr val="1B2236"/>
+                </a:solidFill>
+                <a:latin typeface="Lexend Deca" pitchFamily="34" charset="0"/>
+                <a:ea typeface="Lexend Deca" pitchFamily="34" charset="-122"/>
+                <a:cs typeface="Lexend Deca" pitchFamily="34" charset="-120"/>
+              </a:rPr>
+              <a:t>was</a:t>
+            </a:r>
+            <a:r>
+              <a:rPr lang="en-US" sz="2200" dirty="0">
+                <a:solidFill>
+                  <a:srgbClr val="1B2236"/>
+                </a:solidFill>
+                <a:latin typeface="Lexend Deca" pitchFamily="34" charset="0"/>
+                <a:ea typeface="Lexend Deca" pitchFamily="34" charset="-122"/>
+                <a:cs typeface="Lexend Deca" pitchFamily="34" charset="-120"/>
+              </a:rPr>
+              <a:t> boring.</a:t>
+            </a:r>
+            <a:endParaRPr lang="en-US" sz="2200" dirty="0"/>
+          </a:p>
+        </p:txBody>
+      </p:sp>
+      <p:sp>
+        <p:nvSpPr>
+          <p:cNvPr id="50" name="Highlight"/>
+          <p:cNvSpPr/>
+          <p:nvPr/>
+        </p:nvSpPr>
+        <p:spPr>
+          <a:xfrm>
+            <a:off x="1481328" y="5367528"/>
+            <a:ext cx="1188720" cy="548640"/>
           </a:xfrm>
           <a:prstGeom prst="roundRect">
             <a:avLst>
@@ -22229,14 +22544,14 @@
       </p:sp>
       <p:sp>
         <p:nvSpPr>
-          <p:cNvPr id="72" name="Helper"/>
-          <p:cNvSpPr/>
-          <p:nvPr/>
-        </p:nvSpPr>
-        <p:spPr>
-          <a:xfrm>
-            <a:off x="4428439" y="4846320"/>
-            <a:ext cx="799551" cy="530352"/>
+          <p:cNvPr id="51" name="Helper"/>
+          <p:cNvSpPr/>
+          <p:nvPr/>
+        </p:nvSpPr>
+        <p:spPr>
+          <a:xfrm>
+            <a:off x="1481328" y="5230368"/>
+            <a:ext cx="1188720" cy="822960"/>
           </a:xfrm>
           <a:prstGeom prst="rect">
             <a:avLst/>
@@ -22247,7 +22562,7 @@
           </a:ln>
         </p:spPr>
         <p:txBody>
-          <a:bodyPr wrap="square" lIns="0" tIns="36576" rIns="0" bIns="36576" rtlCol="0" anchor="ctr">
+          <a:bodyPr wrap="square" lIns="73152" tIns="36576" rIns="73152" bIns="36576" rtlCol="0" anchor="ctr">
             <a:noAutofit/>
           </a:bodyPr>
           <a:lstStyle/>
@@ -22256,30 +22571,30 @@
               <a:buNone/>
             </a:pPr>
             <a:r>
-              <a:rPr lang="en-US" sz="2200" dirty="0" b="1">
-                <a:solidFill>
-                  <a:srgbClr val="1B2236"/>
-                </a:solidFill>
-                <a:latin typeface="Lexend Deca" pitchFamily="34" charset="0"/>
-                <a:ea typeface="Lexend Deca" pitchFamily="34" charset="-122"/>
-                <a:cs typeface="Lexend Deca" pitchFamily="34" charset="-120"/>
-              </a:rPr>
-              <a:t>did</a:t>
-            </a:r>
-            <a:endParaRPr lang="en-US" sz="2200" dirty="0"/>
-          </a:p>
-        </p:txBody>
-      </p:sp>
-      <p:sp>
-        <p:nvSpPr>
-          <p:cNvPr id="73" name="Rest"/>
-          <p:cNvSpPr/>
-          <p:nvPr/>
-        </p:nvSpPr>
-        <p:spPr>
-          <a:xfrm>
-            <a:off x="5282855" y="4846320"/>
-            <a:ext cx="1239012" cy="530352"/>
+              <a:rPr lang="en-US" sz="2600" dirty="0" b="1">
+                <a:solidFill>
+                  <a:srgbClr val="1B2236"/>
+                </a:solidFill>
+                <a:latin typeface="Lexend Deca" pitchFamily="34" charset="0"/>
+                <a:ea typeface="Lexend Deca" pitchFamily="34" charset="-122"/>
+                <a:cs typeface="Lexend Deca" pitchFamily="34" charset="-120"/>
+              </a:rPr>
+              <a:t>Was</a:t>
+            </a:r>
+            <a:endParaRPr lang="en-US" sz="2600" dirty="0"/>
+          </a:p>
+        </p:txBody>
+      </p:sp>
+      <p:sp>
+        <p:nvSpPr>
+          <p:cNvPr id="52" name="Question"/>
+          <p:cNvSpPr/>
+          <p:nvPr/>
+        </p:nvSpPr>
+        <p:spPr>
+          <a:xfrm>
+            <a:off x="2697480" y="5230368"/>
+            <a:ext cx="3291840" cy="822960"/>
           </a:xfrm>
           <a:prstGeom prst="rect">
             <a:avLst/>
@@ -22290,7 +22605,7 @@
           </a:ln>
         </p:spPr>
         <p:txBody>
-          <a:bodyPr wrap="square" lIns="0" tIns="36576" rIns="0" bIns="36576" rtlCol="0" anchor="ctr">
+          <a:bodyPr wrap="square" lIns="73152" tIns="36576" rIns="73152" bIns="36576" rtlCol="0" anchor="ctr">
             <a:noAutofit/>
           </a:bodyPr>
           <a:lstStyle/>
@@ -22307,7 +22622,7 @@
                 <a:ea typeface="Lexend Deca" pitchFamily="34" charset="-122"/>
                 <a:cs typeface="Lexend Deca" pitchFamily="34" charset="-120"/>
               </a:rPr>
-              <a:t>she do?</a:t>
+              <a:t>it fun?</a:t>
             </a:r>
             <a:endParaRPr lang="en-US" sz="2200" dirty="0"/>
           </a:p>
@@ -22315,14 +22630,61 @@
       </p:sp>
       <p:sp>
         <p:nvSpPr>
-          <p:cNvPr id="74" name="Wh"/>
-          <p:cNvSpPr/>
-          <p:nvPr/>
-        </p:nvSpPr>
-        <p:spPr>
-          <a:xfrm>
-            <a:off x="3520440" y="5577840"/>
-            <a:ext cx="907999" cy="530352"/>
+          <p:cNvPr id="54" name="Answer bg"/>
+          <p:cNvSpPr/>
+          <p:nvPr/>
+        </p:nvSpPr>
+        <p:spPr>
+          <a:xfrm>
+            <a:off x="6949440" y="5248656"/>
+            <a:ext cx="4526280" cy="786384"/>
+          </a:xfrm>
+          <a:prstGeom prst="roundRect">
+            <a:avLst>
+              <a:gd name="adj" fmla="val 22000"/>
+            </a:avLst>
+          </a:prstGeom>
+          <a:solidFill>
+            <a:srgbClr val="FFFFFF"/>
+          </a:solidFill>
+          <a:ln w="38100">
+            <a:noFill/>
+          </a:ln>
+        </p:spPr>
+        <p:txBody>
+          <a:bodyPr wrap="square" lIns="73152" tIns="36576" rIns="73152" bIns="36576" rtlCol="0" anchor="ctr">
+            <a:noAutofit/>
+          </a:bodyPr>
+          <a:lstStyle/>
+          <a:p>
+            <a:pPr algn="l" indent="0" marL="0">
+              <a:buNone/>
+            </a:pPr>
+            <a:r>
+              <a:rPr lang="en-US" sz="2000" dirty="0">
+                <a:solidFill>
+                  <a:srgbClr val="1B2236"/>
+                </a:solidFill>
+                <a:latin typeface="Lexend Deca" pitchFamily="34" charset="0"/>
+                <a:ea typeface="Lexend Deca" pitchFamily="34" charset="-122"/>
+                <a:cs typeface="Lexend Deca" pitchFamily="34" charset="-120"/>
+              </a:rPr>
+              <a:t/>
+            </a:r>
+            <a:endParaRPr lang="en-US" sz="2000" dirty="0"/>
+          </a:p>
+        </p:txBody>
+      </p:sp>
+      <p:sp>
+        <p:nvSpPr>
+          <p:cNvPr id="53" name="Answer"/>
+          <p:cNvSpPr/>
+          <p:nvPr/>
+        </p:nvSpPr>
+        <p:spPr>
+          <a:xfrm>
+            <a:off x="6949440" y="5230368"/>
+            <a:ext cx="4526280" cy="822960"/>
           </a:xfrm>
           <a:prstGeom prst="rect">
             <a:avLst/>
@@ -22333,53 +22695,6 @@
           </a:ln>
         </p:spPr>
         <p:txBody>
-          <a:bodyPr wrap="square" lIns="0" tIns="36576" rIns="0" bIns="36576" rtlCol="0" anchor="ctr">
-            <a:noAutofit/>
-          </a:bodyPr>
-          <a:lstStyle/>
-          <a:p>
-            <a:pPr algn="l" indent="0" marL="0">
-              <a:buNone/>
-            </a:pPr>
-            <a:r>
-              <a:rPr lang="en-US" sz="2200" dirty="0">
-                <a:solidFill>
-                  <a:srgbClr val="1B2236"/>
-                </a:solidFill>
-                <a:latin typeface="Lexend Deca" pitchFamily="34" charset="0"/>
-                <a:ea typeface="Lexend Deca" pitchFamily="34" charset="-122"/>
-                <a:cs typeface="Lexend Deca" pitchFamily="34" charset="-120"/>
-              </a:rPr>
-              <a:t>What</a:t>
-            </a:r>
-            <a:endParaRPr lang="en-US" sz="2200" dirty="0"/>
-          </a:p>
-        </p:txBody>
-      </p:sp>
-      <p:sp>
-        <p:nvSpPr>
-          <p:cNvPr id="75" name="Highlight"/>
-          <p:cNvSpPr/>
-          <p:nvPr/>
-        </p:nvSpPr>
-        <p:spPr>
-          <a:xfrm>
-            <a:off x="4428439" y="5577840"/>
-            <a:ext cx="799551" cy="530352"/>
-          </a:xfrm>
-          <a:prstGeom prst="roundRect">
-            <a:avLst>
-              <a:gd name="adj" fmla="val 22000"/>
-            </a:avLst>
-          </a:prstGeom>
-          <a:solidFill>
-            <a:srgbClr val="FFE28C"/>
-          </a:solidFill>
-          <a:ln w="38100">
-            <a:noFill/>
-          </a:ln>
-        </p:spPr>
-        <p:txBody>
           <a:bodyPr wrap="square" lIns="73152" tIns="36576" rIns="73152" bIns="36576" rtlCol="0" anchor="ctr">
             <a:noAutofit/>
           </a:bodyPr>
@@ -22389,48 +22704,16 @@
               <a:buNone/>
             </a:pPr>
             <a:r>
-              <a:rPr lang="en-US" sz="2000" dirty="0">
-                <a:solidFill>
-                  <a:srgbClr val="1B2236"/>
-                </a:solidFill>
-                <a:latin typeface="Lexend Deca" pitchFamily="34" charset="0"/>
-                <a:ea typeface="Lexend Deca" pitchFamily="34" charset="-122"/>
-                <a:cs typeface="Lexend Deca" pitchFamily="34" charset="-120"/>
-              </a:rPr>
-              <a:t/>
-            </a:r>
-            <a:endParaRPr lang="en-US" sz="2000" dirty="0"/>
-          </a:p>
-        </p:txBody>
-      </p:sp>
-      <p:sp>
-        <p:nvSpPr>
-          <p:cNvPr id="76" name="Helper"/>
-          <p:cNvSpPr/>
-          <p:nvPr/>
-        </p:nvSpPr>
-        <p:spPr>
-          <a:xfrm>
-            <a:off x="4428439" y="5577840"/>
-            <a:ext cx="799551" cy="530352"/>
-          </a:xfrm>
-          <a:prstGeom prst="rect">
-            <a:avLst/>
-          </a:prstGeom>
-          <a:noFill/>
-          <a:ln w="38100">
-            <a:noFill/>
-          </a:ln>
-        </p:spPr>
-        <p:txBody>
-          <a:bodyPr wrap="square" lIns="0" tIns="36576" rIns="0" bIns="36576" rtlCol="0" anchor="ctr">
-            <a:noAutofit/>
-          </a:bodyPr>
-          <a:lstStyle/>
-          <a:p>
-            <a:pPr algn="ctr" indent="0" marL="0">
-              <a:buNone/>
-            </a:pPr>
+              <a:rPr lang="en-US" sz="2200" dirty="0">
+                <a:solidFill>
+                  <a:srgbClr val="1B2236"/>
+                </a:solidFill>
+                <a:latin typeface="Lexend Deca" pitchFamily="34" charset="0"/>
+                <a:ea typeface="Lexend Deca" pitchFamily="34" charset="-122"/>
+                <a:cs typeface="Lexend Deca" pitchFamily="34" charset="-120"/>
+              </a:rPr>
+              <a:t>Yes, it </a:t>
+            </a:r>
             <a:r>
               <a:rPr lang="en-US" sz="2200" dirty="0" b="1">
                 <a:solidFill>
@@ -22440,36 +22723,21 @@
                 <a:ea typeface="Lexend Deca" pitchFamily="34" charset="-122"/>
                 <a:cs typeface="Lexend Deca" pitchFamily="34" charset="-120"/>
               </a:rPr>
-              <a:t>did</a:t>
+              <a:t>was</a:t>
+            </a:r>
+            <a:r>
+              <a:rPr lang="en-US" sz="2200" dirty="0">
+                <a:solidFill>
+                  <a:srgbClr val="1B2236"/>
+                </a:solidFill>
+                <a:latin typeface="Lexend Deca" pitchFamily="34" charset="0"/>
+                <a:ea typeface="Lexend Deca" pitchFamily="34" charset="-122"/>
+                <a:cs typeface="Lexend Deca" pitchFamily="34" charset="-120"/>
+              </a:rPr>
+              <a:t>.</a:t>
             </a:r>
             <a:endParaRPr lang="en-US" sz="2200" dirty="0"/>
           </a:p>
-        </p:txBody>
-      </p:sp>
-      <p:sp>
-        <p:nvSpPr>
-          <p:cNvPr id="77" name="Rest"/>
-          <p:cNvSpPr/>
-          <p:nvPr/>
-        </p:nvSpPr>
-        <p:spPr>
-          <a:xfrm>
-            <a:off x="5282855" y="5577840"/>
-            <a:ext cx="1088136" cy="530352"/>
-          </a:xfrm>
-          <a:prstGeom prst="rect">
-            <a:avLst/>
-          </a:prstGeom>
-          <a:noFill/>
-          <a:ln w="38100">
-            <a:noFill/>
-          </a:ln>
-        </p:spPr>
-        <p:txBody>
-          <a:bodyPr wrap="square" lIns="0" tIns="36576" rIns="0" bIns="36576" rtlCol="0" anchor="ctr">
-            <a:noAutofit/>
-          </a:bodyPr>
-          <a:lstStyle/>
           <a:p>
             <a:pPr algn="l" indent="0" marL="0">
               <a:buNone/>
@@ -22483,282 +22751,19 @@
                 <a:ea typeface="Lexend Deca" pitchFamily="34" charset="-122"/>
                 <a:cs typeface="Lexend Deca" pitchFamily="34" charset="-120"/>
               </a:rPr>
-              <a:t>he do?</a:t>
-            </a:r>
-            <a:endParaRPr lang="en-US" sz="2200" dirty="0"/>
-          </a:p>
-        </p:txBody>
-      </p:sp>
-      <p:sp>
-        <p:nvSpPr>
-          <p:cNvPr id="78" name="Card head"/>
-          <p:cNvSpPr/>
-          <p:nvPr/>
-        </p:nvSpPr>
-        <p:spPr>
-          <a:xfrm>
-            <a:off x="8549640" y="1280160"/>
-            <a:ext cx="3017520" cy="548640"/>
-          </a:xfrm>
-          <a:prstGeom prst="rect">
-            <a:avLst/>
-          </a:prstGeom>
-          <a:noFill/>
-          <a:ln w="38100">
-            <a:noFill/>
-          </a:ln>
-        </p:spPr>
-        <p:txBody>
-          <a:bodyPr wrap="square" lIns="73152" tIns="36576" rIns="73152" bIns="36576" rtlCol="0" anchor="ctr">
-            <a:noAutofit/>
-          </a:bodyPr>
-          <a:lstStyle/>
-          <a:p>
-            <a:pPr algn="l" indent="0" marL="0">
-              <a:buNone/>
-            </a:pPr>
-            <a:r>
-              <a:rPr lang="en-US" sz="2400" dirty="0" b="1">
-                <a:solidFill>
-                  <a:srgbClr val="1B2236"/>
-                </a:solidFill>
-                <a:latin typeface="Lexend Deca" pitchFamily="34" charset="0"/>
-                <a:ea typeface="Lexend Deca" pitchFamily="34" charset="-122"/>
-                <a:cs typeface="Lexend Deca" pitchFamily="34" charset="-120"/>
-              </a:rPr>
-              <a:t>Answers</a:t>
-            </a:r>
-            <a:endParaRPr lang="en-US" sz="2400" dirty="0"/>
-          </a:p>
-        </p:txBody>
-      </p:sp>
-      <p:sp>
-        <p:nvSpPr>
-          <p:cNvPr id="79" name="Card item"/>
-          <p:cNvSpPr/>
-          <p:nvPr/>
-        </p:nvSpPr>
-        <p:spPr>
-          <a:xfrm>
-            <a:off x="8549640" y="1920240"/>
-            <a:ext cx="3017520" cy="777240"/>
-          </a:xfrm>
-          <a:prstGeom prst="rect">
-            <a:avLst/>
-          </a:prstGeom>
-          <a:noFill/>
-          <a:ln w="38100">
-            <a:noFill/>
-          </a:ln>
-        </p:spPr>
-        <p:txBody>
-          <a:bodyPr wrap="square" lIns="73152" tIns="36576" rIns="73152" bIns="36576" rtlCol="0" anchor="ctr">
-            <a:noAutofit/>
-          </a:bodyPr>
-          <a:lstStyle/>
-          <a:p>
-            <a:pPr algn="l" indent="0" marL="0">
-              <a:buNone/>
-            </a:pPr>
-            <a:r>
-              <a:rPr lang="en-US" sz="2000" dirty="0">
-                <a:solidFill>
-                  <a:srgbClr val="1B2236"/>
-                </a:solidFill>
-                <a:latin typeface="Lexend Deca" pitchFamily="34" charset="0"/>
-                <a:ea typeface="Lexend Deca" pitchFamily="34" charset="-122"/>
-                <a:cs typeface="Lexend Deca" pitchFamily="34" charset="-120"/>
-              </a:rPr>
-              <a:t>I clean</a:t>
-            </a:r>
-            <a:r>
-              <a:rPr lang="en-US" sz="2000" dirty="0" b="1">
-                <a:solidFill>
-                  <a:srgbClr val="5B3FC4"/>
-                </a:solidFill>
-                <a:latin typeface="Lexend Deca" pitchFamily="34" charset="0"/>
-                <a:ea typeface="Lexend Deca" pitchFamily="34" charset="-122"/>
-                <a:cs typeface="Lexend Deca" pitchFamily="34" charset="-120"/>
-              </a:rPr>
-              <a:t>ed</a:t>
-            </a:r>
-            <a:r>
-              <a:rPr lang="en-US" sz="2000" dirty="0">
-                <a:solidFill>
-                  <a:srgbClr val="1B2236"/>
-                </a:solidFill>
-                <a:latin typeface="Lexend Deca" pitchFamily="34" charset="0"/>
-                <a:ea typeface="Lexend Deca" pitchFamily="34" charset="-122"/>
-                <a:cs typeface="Lexend Deca" pitchFamily="34" charset="-120"/>
-              </a:rPr>
-              <a:t> the house.</a:t>
-            </a:r>
-            <a:endParaRPr lang="en-US" sz="2000" dirty="0"/>
-          </a:p>
-        </p:txBody>
-      </p:sp>
-      <p:sp>
-        <p:nvSpPr>
-          <p:cNvPr id="80" name="Card item"/>
-          <p:cNvSpPr/>
-          <p:nvPr/>
-        </p:nvSpPr>
-        <p:spPr>
-          <a:xfrm>
-            <a:off x="8549640" y="2724912"/>
-            <a:ext cx="3017520" cy="777240"/>
-          </a:xfrm>
-          <a:prstGeom prst="rect">
-            <a:avLst/>
-          </a:prstGeom>
-          <a:noFill/>
-          <a:ln w="38100">
-            <a:noFill/>
-          </a:ln>
-        </p:spPr>
-        <p:txBody>
-          <a:bodyPr wrap="square" lIns="73152" tIns="36576" rIns="73152" bIns="36576" rtlCol="0" anchor="ctr">
-            <a:noAutofit/>
-          </a:bodyPr>
-          <a:lstStyle/>
-          <a:p>
-            <a:pPr algn="l" indent="0" marL="0">
-              <a:buNone/>
-            </a:pPr>
-            <a:r>
-              <a:rPr lang="en-US" sz="2000" dirty="0">
-                <a:solidFill>
-                  <a:srgbClr val="1B2236"/>
-                </a:solidFill>
-                <a:latin typeface="Lexend Deca" pitchFamily="34" charset="0"/>
-                <a:ea typeface="Lexend Deca" pitchFamily="34" charset="-122"/>
-                <a:cs typeface="Lexend Deca" pitchFamily="34" charset="-120"/>
-              </a:rPr>
-              <a:t>She watch</a:t>
-            </a:r>
-            <a:r>
-              <a:rPr lang="en-US" sz="2000" dirty="0" b="1">
-                <a:solidFill>
-                  <a:srgbClr val="5B3FC4"/>
-                </a:solidFill>
-                <a:latin typeface="Lexend Deca" pitchFamily="34" charset="0"/>
-                <a:ea typeface="Lexend Deca" pitchFamily="34" charset="-122"/>
-                <a:cs typeface="Lexend Deca" pitchFamily="34" charset="-120"/>
-              </a:rPr>
-              <a:t>ed</a:t>
-            </a:r>
-            <a:r>
-              <a:rPr lang="en-US" sz="2000" dirty="0">
-                <a:solidFill>
-                  <a:srgbClr val="1B2236"/>
-                </a:solidFill>
-                <a:latin typeface="Lexend Deca" pitchFamily="34" charset="0"/>
-                <a:ea typeface="Lexend Deca" pitchFamily="34" charset="-122"/>
-                <a:cs typeface="Lexend Deca" pitchFamily="34" charset="-120"/>
-              </a:rPr>
-              <a:t> a movie.</a:t>
-            </a:r>
-            <a:endParaRPr lang="en-US" sz="2000" dirty="0"/>
-          </a:p>
-        </p:txBody>
-      </p:sp>
-      <p:sp>
-        <p:nvSpPr>
-          <p:cNvPr id="81" name="Card item"/>
-          <p:cNvSpPr/>
-          <p:nvPr/>
-        </p:nvSpPr>
-        <p:spPr>
-          <a:xfrm>
-            <a:off x="8549640" y="3529584"/>
-            <a:ext cx="3017520" cy="457200"/>
-          </a:xfrm>
-          <a:prstGeom prst="rect">
-            <a:avLst/>
-          </a:prstGeom>
-          <a:noFill/>
-          <a:ln w="38100">
-            <a:noFill/>
-          </a:ln>
-        </p:spPr>
-        <p:txBody>
-          <a:bodyPr wrap="square" lIns="73152" tIns="36576" rIns="73152" bIns="36576" rtlCol="0" anchor="ctr">
-            <a:noAutofit/>
-          </a:bodyPr>
-          <a:lstStyle/>
-          <a:p>
-            <a:pPr algn="l" indent="0" marL="0">
-              <a:buNone/>
-            </a:pPr>
-            <a:r>
-              <a:rPr lang="en-US" sz="2000" dirty="0">
-                <a:solidFill>
-                  <a:srgbClr val="1B2236"/>
-                </a:solidFill>
-                <a:latin typeface="Lexend Deca" pitchFamily="34" charset="0"/>
-                <a:ea typeface="Lexend Deca" pitchFamily="34" charset="-122"/>
-                <a:cs typeface="Lexend Deca" pitchFamily="34" charset="-120"/>
-              </a:rPr>
-              <a:t>He visit</a:t>
-            </a:r>
-            <a:r>
-              <a:rPr lang="en-US" sz="2000" dirty="0" b="1">
-                <a:solidFill>
-                  <a:srgbClr val="5B3FC4"/>
-                </a:solidFill>
-                <a:latin typeface="Lexend Deca" pitchFamily="34" charset="0"/>
-                <a:ea typeface="Lexend Deca" pitchFamily="34" charset="-122"/>
-                <a:cs typeface="Lexend Deca" pitchFamily="34" charset="-120"/>
-              </a:rPr>
-              <a:t>ed</a:t>
-            </a:r>
-            <a:r>
-              <a:rPr lang="en-US" sz="2000" dirty="0">
-                <a:solidFill>
-                  <a:srgbClr val="1B2236"/>
-                </a:solidFill>
-                <a:latin typeface="Lexend Deca" pitchFamily="34" charset="0"/>
-                <a:ea typeface="Lexend Deca" pitchFamily="34" charset="-122"/>
-                <a:cs typeface="Lexend Deca" pitchFamily="34" charset="-120"/>
-              </a:rPr>
-              <a:t> family.</a:t>
-            </a:r>
-            <a:endParaRPr lang="en-US" sz="2000" dirty="0"/>
-          </a:p>
-        </p:txBody>
-      </p:sp>
-      <p:sp>
-        <p:nvSpPr>
-          <p:cNvPr id="82" name="Example"/>
-          <p:cNvSpPr/>
-          <p:nvPr/>
-        </p:nvSpPr>
-        <p:spPr>
-          <a:xfrm>
-            <a:off x="8549640" y="5394960"/>
-            <a:ext cx="3017520" cy="502920"/>
-          </a:xfrm>
-          <a:prstGeom prst="roundRect">
-            <a:avLst>
-              <a:gd name="adj" fmla="val 22000"/>
-            </a:avLst>
-          </a:prstGeom>
-          <a:solidFill>
-            <a:srgbClr val="FFFFFF"/>
-          </a:solidFill>
-          <a:ln w="38100">
-            <a:noFill/>
-          </a:ln>
-        </p:spPr>
-        <p:txBody>
-          <a:bodyPr wrap="square" lIns="73152" tIns="36576" rIns="73152" bIns="36576" rtlCol="0" anchor="ctr">
-            <a:noAutofit/>
-          </a:bodyPr>
-          <a:lstStyle/>
-          <a:p>
-            <a:pPr algn="ctr" indent="0" marL="0">
-              <a:buNone/>
-            </a:pPr>
+              <a:t>No, it </a:t>
+            </a:r>
+            <a:r>
+              <a:rPr lang="en-US" sz="2200" dirty="0" b="1">
+                <a:solidFill>
+                  <a:srgbClr val="1B2236"/>
+                </a:solidFill>
+                <a:latin typeface="Lexend Deca" pitchFamily="34" charset="0"/>
+                <a:ea typeface="Lexend Deca" pitchFamily="34" charset="-122"/>
+                <a:cs typeface="Lexend Deca" pitchFamily="34" charset="-120"/>
+              </a:rPr>
+              <a:t>wasn't</a:t>
+            </a:r>
             <a:r>
               <a:rPr lang="en-US" sz="2200" dirty="0">
                 <a:solidFill>
@@ -22768,29 +22773,7 @@
                 <a:ea typeface="Lexend Deca" pitchFamily="34" charset="-122"/>
                 <a:cs typeface="Lexend Deca" pitchFamily="34" charset="-120"/>
               </a:rPr>
-              <a:t>... last </a:t>
-            </a:r>
-            <a:r>
-              <a:rPr lang="en-US" sz="2200" dirty="0" b="1">
-                <a:solidFill>
-                  <a:srgbClr val="5B3FC4"/>
-                </a:solidFill>
-                <a:latin typeface="Lexend Deca" pitchFamily="34" charset="0"/>
-                <a:ea typeface="Lexend Deca" pitchFamily="34" charset="-122"/>
-                <a:cs typeface="Lexend Deca" pitchFamily="34" charset="-120"/>
-              </a:rPr>
-              <a:t>weekend</a:t>
-            </a:r>
-            <a:r>
-              <a:rPr lang="en-US" sz="2200" dirty="0">
-                <a:solidFill>
-                  <a:srgbClr val="1B2236"/>
-                </a:solidFill>
-                <a:latin typeface="Lexend Deca" pitchFamily="34" charset="0"/>
-                <a:ea typeface="Lexend Deca" pitchFamily="34" charset="-122"/>
-                <a:cs typeface="Lexend Deca" pitchFamily="34" charset="-120"/>
-              </a:rPr>
-              <a:t>?</a:t>
+              <a:t>.</a:t>
             </a:r>
             <a:endParaRPr lang="en-US" sz="2200" dirty="0"/>
           </a:p>
@@ -22835,7 +22818,7 @@
                                           </p:stCondLst>
                                         </p:cTn>
                                         <p:tgtEl>
-                                          <p:spTgt spid="67"/>
+                                          <p:spTgt spid="45"/>
                                         </p:tgtEl>
                                         <p:attrNameLst>
                                           <p:attrName>style.visibility</p:attrName>
@@ -22849,7 +22832,42 @@
                                       <p:cBhvr>
                                         <p:cTn id="7" dur="400"/>
                                         <p:tgtEl>
-                                          <p:spTgt spid="67"/>
+                                          <p:spTgt spid="45"/>
+                                        </p:tgtEl>
+                                      </p:cBhvr>
+                                    </p:animEffect>
+                                  </p:childTnLst>
+                                </p:cTn>
+                              </p:par>
+                              <p:par>
+                                <p:cTn id="8" presetID="10" presetClass="entr" presetSubtype="0" fill="hold" nodeType="withEffect">
+                                  <p:stCondLst>
+                                    <p:cond delay="0"/>
+                                  </p:stCondLst>
+                                  <p:childTnLst>
+                                    <p:set>
+                                      <p:cBhvr>
+                                        <p:cTn id="9" dur="1" fill="hold">
+                                          <p:stCondLst>
+                                            <p:cond delay="0"/>
+                                          </p:stCondLst>
+                                        </p:cTn>
+                                        <p:tgtEl>
+                                          <p:spTgt spid="49"/>
+                                        </p:tgtEl>
+                                        <p:attrNameLst>
+                                          <p:attrName>style.visibility</p:attrName>
+                                        </p:attrNameLst>
+                                      </p:cBhvr>
+                                      <p:to>
+                                        <p:strVal val="visible"/>
+                                      </p:to>
+                                    </p:set>
+                                    <p:animEffect transition="in" filter="fade">
+                                      <p:cBhvr>
+                                        <p:cTn id="10" dur="400"/>
+                                        <p:tgtEl>
+                                          <p:spTgt spid="49"/>
                                         </p:tgtEl>
                                       </p:cBhvr>
                                     </p:animEffect>
@@ -22863,32 +22881,32 @@
                     </p:cTn>
                   </p:par>
                   <p:par>
-                    <p:cTn id="8" fill="hold">
+                    <p:cTn id="11" fill="hold">
                       <p:stCondLst>
                         <p:cond delay="indefinite"/>
                       </p:stCondLst>
                       <p:childTnLst>
                         <p:par>
-                          <p:cTn id="9" fill="hold">
+                          <p:cTn id="12" fill="hold">
                             <p:stCondLst>
                               <p:cond delay="0"/>
                             </p:stCondLst>
                             <p:childTnLst>
                               <p:par>
-                                <p:cTn id="10" presetID="10" presetClass="entr" presetSubtype="0" fill="hold" nodeType="clickEffect">
+                                <p:cTn id="13" presetID="10" presetClass="entr" presetSubtype="0" fill="hold" nodeType="clickEffect">
                                   <p:stCondLst>
                                     <p:cond delay="0"/>
                                   </p:stCondLst>
                                   <p:childTnLst>
                                     <p:set>
                                       <p:cBhvr>
-                                        <p:cTn id="11" dur="1" fill="hold">
+                                        <p:cTn id="14" dur="1" fill="hold">
                                           <p:stCondLst>
                                             <p:cond delay="0"/>
                                           </p:stCondLst>
                                         </p:cTn>
                                         <p:tgtEl>
-                                          <p:spTgt spid="71"/>
+                                          <p:spTgt spid="50"/>
                                         </p:tgtEl>
                                         <p:attrNameLst>
                                           <p:attrName>style.visibility</p:attrName>
@@ -22900,48 +22918,30 @@
                                     </p:set>
                                     <p:animEffect transition="in" filter="fade">
                                       <p:cBhvr>
-                                        <p:cTn id="12" dur="400"/>
+                                        <p:cTn id="15" dur="400"/>
                                         <p:tgtEl>
-                                          <p:spTgt spid="71"/>
+                                          <p:spTgt spid="50"/>
                                         </p:tgtEl>
                                       </p:cBhvr>
                                     </p:animEffect>
                                   </p:childTnLst>
                                 </p:cTn>
                               </p:par>
-                            </p:childTnLst>
-                          </p:cTn>
-                        </p:par>
-                      </p:childTnLst>
-                    </p:cTn>
-                  </p:par>
-                  <p:par>
-                    <p:cTn id="13" fill="hold">
-                      <p:stCondLst>
-                        <p:cond delay="indefinite"/>
-                      </p:stCondLst>
-                      <p:childTnLst>
-                        <p:par>
-                          <p:cTn id="14" fill="hold">
-                            <p:stCondLst>
-                              <p:cond delay="0"/>
-                            </p:stCondLst>
-                            <p:childTnLst>
                               <p:par>
-                                <p:cTn id="15" presetID="10" presetClass="entr" presetSubtype="0" fill="hold" nodeType="clickEffect">
+                                <p:cTn id="16" presetID="10" presetClass="entr" presetSubtype="0" fill="hold" nodeType="withEffect">
                                   <p:stCondLst>
                                     <p:cond delay="0"/>
                                   </p:stCondLst>
                                   <p:childTnLst>
                                     <p:set>
                                       <p:cBhvr>
-                                        <p:cTn id="16" dur="1" fill="hold">
+                                        <p:cTn id="17" dur="1" fill="hold">
                                           <p:stCondLst>
                                             <p:cond delay="0"/>
                                           </p:stCondLst>
                                         </p:cTn>
                                         <p:tgtEl>
-                                          <p:spTgt spid="75"/>
+                                          <p:spTgt spid="54"/>
                                         </p:tgtEl>
                                         <p:attrNameLst>
                                           <p:attrName>style.visibility</p:attrName>
@@ -22953,9 +22953,9 @@
                                     </p:set>
                                     <p:animEffect transition="in" filter="fade">
                                       <p:cBhvr>
-                                        <p:cTn id="17" dur="400"/>
+                                        <p:cTn id="18" dur="400"/>
                                         <p:tgtEl>
-                                          <p:spTgt spid="75"/>
+                                          <p:spTgt spid="54"/>
                                         </p:tgtEl>
                                       </p:cBhvr>
                                     </p:animEffect>
